--- a/docs/設計架構簡報.pptx
+++ b/docs/設計架構簡報.pptx
@@ -122,28 +122,28 @@
   <p:extLst>
     <p:ext uri="{521415D9-36F7-43E2-AB2F-B90AF26B5E84}">
       <p14:sectionLst xmlns:p14="http://schemas.microsoft.com/office/powerpoint/2010/main">
-        <p14:section name="概觀" id="{A205F708-5CE0-4553-9B6B-12D8961946C8}">
+        <p14:section name="概觀" id="{F144B7AA-D115-4112-B97E-EF629F49296F}">
           <p14:sldIdLst>
             <p14:sldId id="256"/>
             <p14:sldId id="257"/>
             <p14:sldId id="258"/>
           </p14:sldIdLst>
         </p14:section>
-        <p14:section name="架構與流程" id="{5C2A3032-3D78-4E63-A323-9194F0E7A602}">
+        <p14:section name="架構與流程" id="{D139AEBB-C617-4628-B4C5-9E1C798B553D}">
           <p14:sldIdLst>
             <p14:sldId id="259"/>
             <p14:sldId id="260"/>
             <p14:sldId id="261"/>
           </p14:sldIdLst>
         </p14:section>
-        <p14:section name="資料與介面" id="{558F8AF8-3204-4E6E-8682-F5021B90AE5E}">
+        <p14:section name="資料與介面" id="{191ABC5E-63F8-4F6E-A7BF-5E46CA495297}">
           <p14:sldIdLst>
             <p14:sldId id="262"/>
             <p14:sldId id="263"/>
             <p14:sldId id="264"/>
           </p14:sldIdLst>
         </p14:section>
-        <p14:section name="維運與安全" id="{FB6EDA53-74E1-45AC-8CEF-92687D410019}">
+        <p14:section name="維運與安全" id="{6CF6B327-4153-4358-90C5-A43939661949}">
           <p14:sldIdLst>
             <p14:sldId id="265"/>
             <p14:sldId id="266"/>
@@ -237,7 +237,7 @@
             </a:lvl1pPr>
           </a:lstStyle>
           <a:p>
-            <a:fld id="{4D410D3B-54DC-4EED-8AC6-F3C29C176DE5}" type="datetimeFigureOut">
+            <a:fld id="{4379D9F8-A42F-41FD-83FC-C9FC5A863576}" type="datetimeFigureOut">
               <a:rPr lang="zh-TW" altLang="en-US" smtClean="0"/>
               <a:t>2026/10/13</a:t>
             </a:fld>
@@ -395,7 +395,7 @@
             </a:lvl1pPr>
           </a:lstStyle>
           <a:p>
-            <a:fld id="{1CB205EA-7ED8-4333-98B6-70F1E28EA644}" type="slidenum">
+            <a:fld id="{7868407B-261F-4A0F-996B-62EFCF2DC9C8}" type="slidenum">
               <a:rPr lang="zh-TW" altLang="en-US" smtClean="0"/>
               <a:t>‹#›</a:t>
             </a:fld>
@@ -406,7 +406,7 @@
     </p:spTree>
     <p:extLst>
       <p:ext uri="{BB962C8B-B14F-4D97-AF65-F5344CB8AC3E}">
-        <p14:creationId xmlns:p14="http://schemas.microsoft.com/office/powerpoint/2010/main" val="879277726"/>
+        <p14:creationId xmlns:p14="http://schemas.microsoft.com/office/powerpoint/2010/main" val="141645847"/>
       </p:ext>
     </p:extLst>
   </p:cSld>
@@ -572,7 +572,7 @@
           <a:bodyPr/>
           <a:lstStyle/>
           <a:p>
-            <a:fld id="{1CB205EA-7ED8-4333-98B6-70F1E28EA644}" type="slidenum">
+            <a:fld id="{7868407B-261F-4A0F-996B-62EFCF2DC9C8}" type="slidenum">
               <a:rPr lang="zh-TW" altLang="en-US" smtClean="0"/>
               <a:t>1</a:t>
             </a:fld>
@@ -583,7 +583,7 @@
     </p:spTree>
     <p:extLst>
       <p:ext uri="{BB962C8B-B14F-4D97-AF65-F5344CB8AC3E}">
-        <p14:creationId xmlns:p14="http://schemas.microsoft.com/office/powerpoint/2010/main" val="1372933673"/>
+        <p14:creationId xmlns:p14="http://schemas.microsoft.com/office/powerpoint/2010/main" val="2392730489"/>
       </p:ext>
     </p:extLst>
   </p:cSld>
@@ -691,7 +691,7 @@
           <a:bodyPr/>
           <a:lstStyle/>
           <a:p>
-            <a:fld id="{1CB205EA-7ED8-4333-98B6-70F1E28EA644}" type="slidenum">
+            <a:fld id="{7868407B-261F-4A0F-996B-62EFCF2DC9C8}" type="slidenum">
               <a:rPr lang="zh-TW" altLang="en-US" smtClean="0"/>
               <a:t>10</a:t>
             </a:fld>
@@ -702,7 +702,7 @@
     </p:spTree>
     <p:extLst>
       <p:ext uri="{BB962C8B-B14F-4D97-AF65-F5344CB8AC3E}">
-        <p14:creationId xmlns:p14="http://schemas.microsoft.com/office/powerpoint/2010/main" val="3113634866"/>
+        <p14:creationId xmlns:p14="http://schemas.microsoft.com/office/powerpoint/2010/main" val="2202341874"/>
       </p:ext>
     </p:extLst>
   </p:cSld>
@@ -802,7 +802,7 @@
           <a:bodyPr/>
           <a:lstStyle/>
           <a:p>
-            <a:fld id="{1CB205EA-7ED8-4333-98B6-70F1E28EA644}" type="slidenum">
+            <a:fld id="{7868407B-261F-4A0F-996B-62EFCF2DC9C8}" type="slidenum">
               <a:rPr lang="zh-TW" altLang="en-US" smtClean="0"/>
               <a:t>11</a:t>
             </a:fld>
@@ -813,7 +813,7 @@
     </p:spTree>
     <p:extLst>
       <p:ext uri="{BB962C8B-B14F-4D97-AF65-F5344CB8AC3E}">
-        <p14:creationId xmlns:p14="http://schemas.microsoft.com/office/powerpoint/2010/main" val="696542241"/>
+        <p14:creationId xmlns:p14="http://schemas.microsoft.com/office/powerpoint/2010/main" val="3615921426"/>
       </p:ext>
     </p:extLst>
   </p:cSld>
@@ -881,7 +881,15 @@
             </a:r>
             <a:r>
               <a:rPr lang="zh-TW" altLang="en-US"/>
-              <a:t>。管理功能用管理者金鑰保護；一般使用者看不到別人的 </a:t>
+              <a:t>。管理功能用 </a:t>
+            </a:r>
+            <a:r>
+              <a:rPr lang="en-US" altLang="zh-TW"/>
+              <a:t>8 </a:t>
+            </a:r>
+            <a:r>
+              <a:rPr lang="zh-TW" altLang="en-US"/>
+              <a:t>碼管理者密碼保護；一般使用者看不到別人的 </a:t>
             </a:r>
             <a:r>
               <a:rPr lang="en-US" altLang="zh-TW"/>
@@ -909,7 +917,7 @@
           <a:bodyPr/>
           <a:lstStyle/>
           <a:p>
-            <a:fld id="{1CB205EA-7ED8-4333-98B6-70F1E28EA644}" type="slidenum">
+            <a:fld id="{7868407B-261F-4A0F-996B-62EFCF2DC9C8}" type="slidenum">
               <a:rPr lang="zh-TW" altLang="en-US" smtClean="0"/>
               <a:t>12</a:t>
             </a:fld>
@@ -920,7 +928,7 @@
     </p:spTree>
     <p:extLst>
       <p:ext uri="{BB962C8B-B14F-4D97-AF65-F5344CB8AC3E}">
-        <p14:creationId xmlns:p14="http://schemas.microsoft.com/office/powerpoint/2010/main" val="2849302617"/>
+        <p14:creationId xmlns:p14="http://schemas.microsoft.com/office/powerpoint/2010/main" val="4012722688"/>
       </p:ext>
     </p:extLst>
   </p:cSld>
@@ -1004,7 +1012,7 @@
           <a:bodyPr/>
           <a:lstStyle/>
           <a:p>
-            <a:fld id="{1CB205EA-7ED8-4333-98B6-70F1E28EA644}" type="slidenum">
+            <a:fld id="{7868407B-261F-4A0F-996B-62EFCF2DC9C8}" type="slidenum">
               <a:rPr lang="zh-TW" altLang="en-US" smtClean="0"/>
               <a:t>13</a:t>
             </a:fld>
@@ -1015,7 +1023,7 @@
     </p:spTree>
     <p:extLst>
       <p:ext uri="{BB962C8B-B14F-4D97-AF65-F5344CB8AC3E}">
-        <p14:creationId xmlns:p14="http://schemas.microsoft.com/office/powerpoint/2010/main" val="4119574408"/>
+        <p14:creationId xmlns:p14="http://schemas.microsoft.com/office/powerpoint/2010/main" val="705971875"/>
       </p:ext>
     </p:extLst>
   </p:cSld>
@@ -1099,7 +1107,7 @@
           <a:bodyPr/>
           <a:lstStyle/>
           <a:p>
-            <a:fld id="{1CB205EA-7ED8-4333-98B6-70F1E28EA644}" type="slidenum">
+            <a:fld id="{7868407B-261F-4A0F-996B-62EFCF2DC9C8}" type="slidenum">
               <a:rPr lang="zh-TW" altLang="en-US" smtClean="0"/>
               <a:t>2</a:t>
             </a:fld>
@@ -1110,7 +1118,7 @@
     </p:spTree>
     <p:extLst>
       <p:ext uri="{BB962C8B-B14F-4D97-AF65-F5344CB8AC3E}">
-        <p14:creationId xmlns:p14="http://schemas.microsoft.com/office/powerpoint/2010/main" val="901648496"/>
+        <p14:creationId xmlns:p14="http://schemas.microsoft.com/office/powerpoint/2010/main" val="1207391811"/>
       </p:ext>
     </p:extLst>
   </p:cSld>
@@ -1186,7 +1194,7 @@
           <a:bodyPr/>
           <a:lstStyle/>
           <a:p>
-            <a:fld id="{1CB205EA-7ED8-4333-98B6-70F1E28EA644}" type="slidenum">
+            <a:fld id="{7868407B-261F-4A0F-996B-62EFCF2DC9C8}" type="slidenum">
               <a:rPr lang="zh-TW" altLang="en-US" smtClean="0"/>
               <a:t>3</a:t>
             </a:fld>
@@ -1197,7 +1205,7 @@
     </p:spTree>
     <p:extLst>
       <p:ext uri="{BB962C8B-B14F-4D97-AF65-F5344CB8AC3E}">
-        <p14:creationId xmlns:p14="http://schemas.microsoft.com/office/powerpoint/2010/main" val="1785567271"/>
+        <p14:creationId xmlns:p14="http://schemas.microsoft.com/office/powerpoint/2010/main" val="4056295297"/>
       </p:ext>
     </p:extLst>
   </p:cSld>
@@ -1321,7 +1329,7 @@
           <a:bodyPr/>
           <a:lstStyle/>
           <a:p>
-            <a:fld id="{1CB205EA-7ED8-4333-98B6-70F1E28EA644}" type="slidenum">
+            <a:fld id="{7868407B-261F-4A0F-996B-62EFCF2DC9C8}" type="slidenum">
               <a:rPr lang="zh-TW" altLang="en-US" smtClean="0"/>
               <a:t>4</a:t>
             </a:fld>
@@ -1332,7 +1340,7 @@
     </p:spTree>
     <p:extLst>
       <p:ext uri="{BB962C8B-B14F-4D97-AF65-F5344CB8AC3E}">
-        <p14:creationId xmlns:p14="http://schemas.microsoft.com/office/powerpoint/2010/main" val="2048618031"/>
+        <p14:creationId xmlns:p14="http://schemas.microsoft.com/office/powerpoint/2010/main" val="1514015936"/>
       </p:ext>
     </p:extLst>
   </p:cSld>
@@ -1424,7 +1432,7 @@
           <a:bodyPr/>
           <a:lstStyle/>
           <a:p>
-            <a:fld id="{1CB205EA-7ED8-4333-98B6-70F1E28EA644}" type="slidenum">
+            <a:fld id="{7868407B-261F-4A0F-996B-62EFCF2DC9C8}" type="slidenum">
               <a:rPr lang="zh-TW" altLang="en-US" smtClean="0"/>
               <a:t>5</a:t>
             </a:fld>
@@ -1435,7 +1443,7 @@
     </p:spTree>
     <p:extLst>
       <p:ext uri="{BB962C8B-B14F-4D97-AF65-F5344CB8AC3E}">
-        <p14:creationId xmlns:p14="http://schemas.microsoft.com/office/powerpoint/2010/main" val="2684987301"/>
+        <p14:creationId xmlns:p14="http://schemas.microsoft.com/office/powerpoint/2010/main" val="4170186478"/>
       </p:ext>
     </p:extLst>
   </p:cSld>
@@ -1511,7 +1519,7 @@
           <a:bodyPr/>
           <a:lstStyle/>
           <a:p>
-            <a:fld id="{1CB205EA-7ED8-4333-98B6-70F1E28EA644}" type="slidenum">
+            <a:fld id="{7868407B-261F-4A0F-996B-62EFCF2DC9C8}" type="slidenum">
               <a:rPr lang="zh-TW" altLang="en-US" smtClean="0"/>
               <a:t>6</a:t>
             </a:fld>
@@ -1522,7 +1530,7 @@
     </p:spTree>
     <p:extLst>
       <p:ext uri="{BB962C8B-B14F-4D97-AF65-F5344CB8AC3E}">
-        <p14:creationId xmlns:p14="http://schemas.microsoft.com/office/powerpoint/2010/main" val="798088954"/>
+        <p14:creationId xmlns:p14="http://schemas.microsoft.com/office/powerpoint/2010/main" val="4124361557"/>
       </p:ext>
     </p:extLst>
   </p:cSld>
@@ -1642,7 +1650,7 @@
           <a:bodyPr/>
           <a:lstStyle/>
           <a:p>
-            <a:fld id="{1CB205EA-7ED8-4333-98B6-70F1E28EA644}" type="slidenum">
+            <a:fld id="{7868407B-261F-4A0F-996B-62EFCF2DC9C8}" type="slidenum">
               <a:rPr lang="zh-TW" altLang="en-US" smtClean="0"/>
               <a:t>7</a:t>
             </a:fld>
@@ -1653,7 +1661,7 @@
     </p:spTree>
     <p:extLst>
       <p:ext uri="{BB962C8B-B14F-4D97-AF65-F5344CB8AC3E}">
-        <p14:creationId xmlns:p14="http://schemas.microsoft.com/office/powerpoint/2010/main" val="4244092006"/>
+        <p14:creationId xmlns:p14="http://schemas.microsoft.com/office/powerpoint/2010/main" val="559476991"/>
       </p:ext>
     </p:extLst>
   </p:cSld>
@@ -1737,7 +1745,7 @@
           <a:bodyPr/>
           <a:lstStyle/>
           <a:p>
-            <a:fld id="{1CB205EA-7ED8-4333-98B6-70F1E28EA644}" type="slidenum">
+            <a:fld id="{7868407B-261F-4A0F-996B-62EFCF2DC9C8}" type="slidenum">
               <a:rPr lang="zh-TW" altLang="en-US" smtClean="0"/>
               <a:t>8</a:t>
             </a:fld>
@@ -1748,7 +1756,7 @@
     </p:spTree>
     <p:extLst>
       <p:ext uri="{BB962C8B-B14F-4D97-AF65-F5344CB8AC3E}">
-        <p14:creationId xmlns:p14="http://schemas.microsoft.com/office/powerpoint/2010/main" val="1046104951"/>
+        <p14:creationId xmlns:p14="http://schemas.microsoft.com/office/powerpoint/2010/main" val="3856830265"/>
       </p:ext>
     </p:extLst>
   </p:cSld>
@@ -1820,7 +1828,15 @@
             </a:r>
             <a:r>
               <a:rPr lang="zh-TW" altLang="en-US"/>
-              <a:t>欄位決定要做什麼。左邊是借用者可用的功能，不需登入；右邊是管理功能，每次呼叫都會檢查管理者金鑰。</a:t>
+              <a:t>欄位決定要做什麼。左邊是借用者可用的功能，不需登入；右邊是管理功能，每次呼叫都會檢查 </a:t>
+            </a:r>
+            <a:r>
+              <a:rPr lang="en-US" altLang="zh-TW"/>
+              <a:t>8 </a:t>
+            </a:r>
+            <a:r>
+              <a:rPr lang="zh-TW" altLang="en-US"/>
+              <a:t>碼管理者密碼。</a:t>
             </a:r>
           </a:p>
         </p:txBody>
@@ -1840,7 +1856,7 @@
           <a:bodyPr/>
           <a:lstStyle/>
           <a:p>
-            <a:fld id="{1CB205EA-7ED8-4333-98B6-70F1E28EA644}" type="slidenum">
+            <a:fld id="{7868407B-261F-4A0F-996B-62EFCF2DC9C8}" type="slidenum">
               <a:rPr lang="zh-TW" altLang="en-US" smtClean="0"/>
               <a:t>9</a:t>
             </a:fld>
@@ -1851,7 +1867,7 @@
     </p:spTree>
     <p:extLst>
       <p:ext uri="{BB962C8B-B14F-4D97-AF65-F5344CB8AC3E}">
-        <p14:creationId xmlns:p14="http://schemas.microsoft.com/office/powerpoint/2010/main" val="1833826659"/>
+        <p14:creationId xmlns:p14="http://schemas.microsoft.com/office/powerpoint/2010/main" val="3849051306"/>
       </p:ext>
     </p:extLst>
   </p:cSld>
@@ -1883,7 +1899,7 @@
           <p:cNvPr id="2" name="標題 1">
             <a:extLst>
               <a:ext uri="{FF2B5EF4-FFF2-40B4-BE49-F238E27FC236}">
-                <a16:creationId xmlns:a16="http://schemas.microsoft.com/office/drawing/2014/main" id="{B226A048-B34D-FFF4-9698-FFBF97650FBC}"/>
+                <a16:creationId xmlns:a16="http://schemas.microsoft.com/office/drawing/2014/main" id="{5A483A02-E42C-11A6-F552-6EFF5CCF5614}"/>
               </a:ext>
             </a:extLst>
           </p:cNvPr>
@@ -1920,7 +1936,7 @@
           <p:cNvPr id="3" name="副標題 2">
             <a:extLst>
               <a:ext uri="{FF2B5EF4-FFF2-40B4-BE49-F238E27FC236}">
-                <a16:creationId xmlns:a16="http://schemas.microsoft.com/office/drawing/2014/main" id="{6A221946-5E58-0737-B752-6647D2DDC195}"/>
+                <a16:creationId xmlns:a16="http://schemas.microsoft.com/office/drawing/2014/main" id="{70E041BB-7C39-3FD9-2AD2-F89331F86453}"/>
               </a:ext>
             </a:extLst>
           </p:cNvPr>
@@ -1990,7 +2006,7 @@
           <p:cNvPr id="4" name="日期版面配置區 3">
             <a:extLst>
               <a:ext uri="{FF2B5EF4-FFF2-40B4-BE49-F238E27FC236}">
-                <a16:creationId xmlns:a16="http://schemas.microsoft.com/office/drawing/2014/main" id="{53325F4B-C2D9-ED59-8265-086459ECD3A0}"/>
+                <a16:creationId xmlns:a16="http://schemas.microsoft.com/office/drawing/2014/main" id="{2316D70C-B037-7A3F-8C8D-9DEB30781821}"/>
               </a:ext>
             </a:extLst>
           </p:cNvPr>
@@ -2006,7 +2022,7 @@
           <a:bodyPr/>
           <a:lstStyle/>
           <a:p>
-            <a:fld id="{412FF54C-54C0-4360-8CC3-BD8DF4F850B5}" type="datetimeFigureOut">
+            <a:fld id="{907350CA-04E8-4F74-B15E-BA0B970B6785}" type="datetimeFigureOut">
               <a:rPr lang="zh-TW" altLang="en-US" smtClean="0"/>
               <a:t>2026/10/13</a:t>
             </a:fld>
@@ -2019,7 +2035,7 @@
           <p:cNvPr id="5" name="頁尾版面配置區 4">
             <a:extLst>
               <a:ext uri="{FF2B5EF4-FFF2-40B4-BE49-F238E27FC236}">
-                <a16:creationId xmlns:a16="http://schemas.microsoft.com/office/drawing/2014/main" id="{2D12BC59-C764-4DC7-5D6F-685A59E95AF0}"/>
+                <a16:creationId xmlns:a16="http://schemas.microsoft.com/office/drawing/2014/main" id="{EBA1EBA6-18FD-3B2F-1839-4705AC4AE429}"/>
               </a:ext>
             </a:extLst>
           </p:cNvPr>
@@ -2044,7 +2060,7 @@
           <p:cNvPr id="6" name="投影片編號版面配置區 5">
             <a:extLst>
               <a:ext uri="{FF2B5EF4-FFF2-40B4-BE49-F238E27FC236}">
-                <a16:creationId xmlns:a16="http://schemas.microsoft.com/office/drawing/2014/main" id="{5F2CBA1B-9F77-85F9-2414-DB2B8B0A57EB}"/>
+                <a16:creationId xmlns:a16="http://schemas.microsoft.com/office/drawing/2014/main" id="{5F9586CF-4264-9F28-0904-87D101B3092D}"/>
               </a:ext>
             </a:extLst>
           </p:cNvPr>
@@ -2060,7 +2076,7 @@
           <a:bodyPr/>
           <a:lstStyle/>
           <a:p>
-            <a:fld id="{82E2CFFA-BCF7-4941-9F1D-DE24BA5E8539}" type="slidenum">
+            <a:fld id="{62F1B366-B12D-4E81-AEC3-117FBF7F511D}" type="slidenum">
               <a:rPr lang="zh-TW" altLang="en-US" smtClean="0"/>
               <a:t>‹#›</a:t>
             </a:fld>
@@ -2071,7 +2087,7 @@
     </p:spTree>
     <p:extLst>
       <p:ext uri="{BB962C8B-B14F-4D97-AF65-F5344CB8AC3E}">
-        <p14:creationId xmlns:p14="http://schemas.microsoft.com/office/powerpoint/2010/main" val="1620213203"/>
+        <p14:creationId xmlns:p14="http://schemas.microsoft.com/office/powerpoint/2010/main" val="119970719"/>
       </p:ext>
     </p:extLst>
   </p:cSld>
@@ -2103,7 +2119,7 @@
           <p:cNvPr id="2" name="標題 1">
             <a:extLst>
               <a:ext uri="{FF2B5EF4-FFF2-40B4-BE49-F238E27FC236}">
-                <a16:creationId xmlns:a16="http://schemas.microsoft.com/office/drawing/2014/main" id="{631911BB-220F-A4AC-E24E-F1EB36AA6145}"/>
+                <a16:creationId xmlns:a16="http://schemas.microsoft.com/office/drawing/2014/main" id="{FA2191F6-7ADE-A1E0-D4CC-711FCF30ADF0}"/>
               </a:ext>
             </a:extLst>
           </p:cNvPr>
@@ -2131,7 +2147,7 @@
           <p:cNvPr id="3" name="直排文字版面配置區 2">
             <a:extLst>
               <a:ext uri="{FF2B5EF4-FFF2-40B4-BE49-F238E27FC236}">
-                <a16:creationId xmlns:a16="http://schemas.microsoft.com/office/drawing/2014/main" id="{FB3C74EA-FA48-B2C1-E03C-723BA3E83575}"/>
+                <a16:creationId xmlns:a16="http://schemas.microsoft.com/office/drawing/2014/main" id="{281DDC64-A03E-578C-5FB1-7368288D9959}"/>
               </a:ext>
             </a:extLst>
           </p:cNvPr>
@@ -2188,7 +2204,7 @@
           <p:cNvPr id="4" name="日期版面配置區 3">
             <a:extLst>
               <a:ext uri="{FF2B5EF4-FFF2-40B4-BE49-F238E27FC236}">
-                <a16:creationId xmlns:a16="http://schemas.microsoft.com/office/drawing/2014/main" id="{6FBB27D0-0D85-1DFF-C015-03D5F5BCCFF0}"/>
+                <a16:creationId xmlns:a16="http://schemas.microsoft.com/office/drawing/2014/main" id="{C56F5CA8-F641-72E3-22C3-CB2B3E324A27}"/>
               </a:ext>
             </a:extLst>
           </p:cNvPr>
@@ -2204,7 +2220,7 @@
           <a:bodyPr/>
           <a:lstStyle/>
           <a:p>
-            <a:fld id="{412FF54C-54C0-4360-8CC3-BD8DF4F850B5}" type="datetimeFigureOut">
+            <a:fld id="{907350CA-04E8-4F74-B15E-BA0B970B6785}" type="datetimeFigureOut">
               <a:rPr lang="zh-TW" altLang="en-US" smtClean="0"/>
               <a:t>2026/10/13</a:t>
             </a:fld>
@@ -2217,7 +2233,7 @@
           <p:cNvPr id="5" name="頁尾版面配置區 4">
             <a:extLst>
               <a:ext uri="{FF2B5EF4-FFF2-40B4-BE49-F238E27FC236}">
-                <a16:creationId xmlns:a16="http://schemas.microsoft.com/office/drawing/2014/main" id="{526C5CCB-636D-A03E-9953-7865FAEBA49B}"/>
+                <a16:creationId xmlns:a16="http://schemas.microsoft.com/office/drawing/2014/main" id="{FDC0D3E1-8413-98DF-CBEF-E40361F3EB1B}"/>
               </a:ext>
             </a:extLst>
           </p:cNvPr>
@@ -2242,7 +2258,7 @@
           <p:cNvPr id="6" name="投影片編號版面配置區 5">
             <a:extLst>
               <a:ext uri="{FF2B5EF4-FFF2-40B4-BE49-F238E27FC236}">
-                <a16:creationId xmlns:a16="http://schemas.microsoft.com/office/drawing/2014/main" id="{7A962F65-7312-71B2-00CD-D0F92220B830}"/>
+                <a16:creationId xmlns:a16="http://schemas.microsoft.com/office/drawing/2014/main" id="{11735A46-FD32-FB4D-9D27-49379BB3AB1C}"/>
               </a:ext>
             </a:extLst>
           </p:cNvPr>
@@ -2258,7 +2274,7 @@
           <a:bodyPr/>
           <a:lstStyle/>
           <a:p>
-            <a:fld id="{82E2CFFA-BCF7-4941-9F1D-DE24BA5E8539}" type="slidenum">
+            <a:fld id="{62F1B366-B12D-4E81-AEC3-117FBF7F511D}" type="slidenum">
               <a:rPr lang="zh-TW" altLang="en-US" smtClean="0"/>
               <a:t>‹#›</a:t>
             </a:fld>
@@ -2269,7 +2285,7 @@
     </p:spTree>
     <p:extLst>
       <p:ext uri="{BB962C8B-B14F-4D97-AF65-F5344CB8AC3E}">
-        <p14:creationId xmlns:p14="http://schemas.microsoft.com/office/powerpoint/2010/main" val="2486645135"/>
+        <p14:creationId xmlns:p14="http://schemas.microsoft.com/office/powerpoint/2010/main" val="1739089622"/>
       </p:ext>
     </p:extLst>
   </p:cSld>
@@ -2301,7 +2317,7 @@
           <p:cNvPr id="2" name="直排標題 1">
             <a:extLst>
               <a:ext uri="{FF2B5EF4-FFF2-40B4-BE49-F238E27FC236}">
-                <a16:creationId xmlns:a16="http://schemas.microsoft.com/office/drawing/2014/main" id="{5F99D726-A423-1A37-D59D-B7E905F01D2D}"/>
+                <a16:creationId xmlns:a16="http://schemas.microsoft.com/office/drawing/2014/main" id="{709B941B-6DA8-FF6D-1F26-5DDE90BAE9F5}"/>
               </a:ext>
             </a:extLst>
           </p:cNvPr>
@@ -2334,7 +2350,7 @@
           <p:cNvPr id="3" name="直排文字版面配置區 2">
             <a:extLst>
               <a:ext uri="{FF2B5EF4-FFF2-40B4-BE49-F238E27FC236}">
-                <a16:creationId xmlns:a16="http://schemas.microsoft.com/office/drawing/2014/main" id="{27112C2E-785F-5F2E-7010-95B76B3AB538}"/>
+                <a16:creationId xmlns:a16="http://schemas.microsoft.com/office/drawing/2014/main" id="{C956D6DA-ED84-D4C6-2A6A-1CAC67BB4A27}"/>
               </a:ext>
             </a:extLst>
           </p:cNvPr>
@@ -2396,7 +2412,7 @@
           <p:cNvPr id="4" name="日期版面配置區 3">
             <a:extLst>
               <a:ext uri="{FF2B5EF4-FFF2-40B4-BE49-F238E27FC236}">
-                <a16:creationId xmlns:a16="http://schemas.microsoft.com/office/drawing/2014/main" id="{9BDA9945-78DE-9143-981B-26DDEDA04D80}"/>
+                <a16:creationId xmlns:a16="http://schemas.microsoft.com/office/drawing/2014/main" id="{DC07204A-807F-6C28-5F82-C4C375F5DEB4}"/>
               </a:ext>
             </a:extLst>
           </p:cNvPr>
@@ -2412,7 +2428,7 @@
           <a:bodyPr/>
           <a:lstStyle/>
           <a:p>
-            <a:fld id="{412FF54C-54C0-4360-8CC3-BD8DF4F850B5}" type="datetimeFigureOut">
+            <a:fld id="{907350CA-04E8-4F74-B15E-BA0B970B6785}" type="datetimeFigureOut">
               <a:rPr lang="zh-TW" altLang="en-US" smtClean="0"/>
               <a:t>2026/10/13</a:t>
             </a:fld>
@@ -2425,7 +2441,7 @@
           <p:cNvPr id="5" name="頁尾版面配置區 4">
             <a:extLst>
               <a:ext uri="{FF2B5EF4-FFF2-40B4-BE49-F238E27FC236}">
-                <a16:creationId xmlns:a16="http://schemas.microsoft.com/office/drawing/2014/main" id="{86063E64-C9C5-6739-7712-787AF72ABD54}"/>
+                <a16:creationId xmlns:a16="http://schemas.microsoft.com/office/drawing/2014/main" id="{41ADD467-0A8F-009B-93BC-D31BC5B4C83D}"/>
               </a:ext>
             </a:extLst>
           </p:cNvPr>
@@ -2450,7 +2466,7 @@
           <p:cNvPr id="6" name="投影片編號版面配置區 5">
             <a:extLst>
               <a:ext uri="{FF2B5EF4-FFF2-40B4-BE49-F238E27FC236}">
-                <a16:creationId xmlns:a16="http://schemas.microsoft.com/office/drawing/2014/main" id="{BB95705F-B3A5-2035-69B5-55C1F35417C0}"/>
+                <a16:creationId xmlns:a16="http://schemas.microsoft.com/office/drawing/2014/main" id="{BDC0FF44-80C7-DE67-91AD-DE2DF105700A}"/>
               </a:ext>
             </a:extLst>
           </p:cNvPr>
@@ -2466,7 +2482,7 @@
           <a:bodyPr/>
           <a:lstStyle/>
           <a:p>
-            <a:fld id="{82E2CFFA-BCF7-4941-9F1D-DE24BA5E8539}" type="slidenum">
+            <a:fld id="{62F1B366-B12D-4E81-AEC3-117FBF7F511D}" type="slidenum">
               <a:rPr lang="zh-TW" altLang="en-US" smtClean="0"/>
               <a:t>‹#›</a:t>
             </a:fld>
@@ -2477,7 +2493,7 @@
     </p:spTree>
     <p:extLst>
       <p:ext uri="{BB962C8B-B14F-4D97-AF65-F5344CB8AC3E}">
-        <p14:creationId xmlns:p14="http://schemas.microsoft.com/office/powerpoint/2010/main" val="852607210"/>
+        <p14:creationId xmlns:p14="http://schemas.microsoft.com/office/powerpoint/2010/main" val="3757523629"/>
       </p:ext>
     </p:extLst>
   </p:cSld>
@@ -2509,7 +2525,7 @@
           <p:cNvPr id="2" name="標題 1">
             <a:extLst>
               <a:ext uri="{FF2B5EF4-FFF2-40B4-BE49-F238E27FC236}">
-                <a16:creationId xmlns:a16="http://schemas.microsoft.com/office/drawing/2014/main" id="{725E90B3-8BD2-4B02-3F87-7AF9033EC90D}"/>
+                <a16:creationId xmlns:a16="http://schemas.microsoft.com/office/drawing/2014/main" id="{E170AB50-4FD9-D4F2-8D77-5CC928841F0B}"/>
               </a:ext>
             </a:extLst>
           </p:cNvPr>
@@ -2537,7 +2553,7 @@
           <p:cNvPr id="3" name="內容版面配置區 2">
             <a:extLst>
               <a:ext uri="{FF2B5EF4-FFF2-40B4-BE49-F238E27FC236}">
-                <a16:creationId xmlns:a16="http://schemas.microsoft.com/office/drawing/2014/main" id="{ABEB1092-9D9D-24D8-BCC3-0F371202C60C}"/>
+                <a16:creationId xmlns:a16="http://schemas.microsoft.com/office/drawing/2014/main" id="{86FB23F1-4D29-11B3-B7AB-48226374C0A2}"/>
               </a:ext>
             </a:extLst>
           </p:cNvPr>
@@ -2594,7 +2610,7 @@
           <p:cNvPr id="4" name="日期版面配置區 3">
             <a:extLst>
               <a:ext uri="{FF2B5EF4-FFF2-40B4-BE49-F238E27FC236}">
-                <a16:creationId xmlns:a16="http://schemas.microsoft.com/office/drawing/2014/main" id="{7EE39011-569E-DCAA-9BAC-A1A012DC17A7}"/>
+                <a16:creationId xmlns:a16="http://schemas.microsoft.com/office/drawing/2014/main" id="{C78E1EEE-C64E-4CAE-C7D9-CE6A5186C99B}"/>
               </a:ext>
             </a:extLst>
           </p:cNvPr>
@@ -2610,7 +2626,7 @@
           <a:bodyPr/>
           <a:lstStyle/>
           <a:p>
-            <a:fld id="{412FF54C-54C0-4360-8CC3-BD8DF4F850B5}" type="datetimeFigureOut">
+            <a:fld id="{907350CA-04E8-4F74-B15E-BA0B970B6785}" type="datetimeFigureOut">
               <a:rPr lang="zh-TW" altLang="en-US" smtClean="0"/>
               <a:t>2026/10/13</a:t>
             </a:fld>
@@ -2623,7 +2639,7 @@
           <p:cNvPr id="5" name="頁尾版面配置區 4">
             <a:extLst>
               <a:ext uri="{FF2B5EF4-FFF2-40B4-BE49-F238E27FC236}">
-                <a16:creationId xmlns:a16="http://schemas.microsoft.com/office/drawing/2014/main" id="{52314FCD-D215-2519-8E81-3D2240911742}"/>
+                <a16:creationId xmlns:a16="http://schemas.microsoft.com/office/drawing/2014/main" id="{515E1782-2F0D-17DC-5880-1DC75D62D381}"/>
               </a:ext>
             </a:extLst>
           </p:cNvPr>
@@ -2648,7 +2664,7 @@
           <p:cNvPr id="6" name="投影片編號版面配置區 5">
             <a:extLst>
               <a:ext uri="{FF2B5EF4-FFF2-40B4-BE49-F238E27FC236}">
-                <a16:creationId xmlns:a16="http://schemas.microsoft.com/office/drawing/2014/main" id="{3B279A00-8517-9979-58F2-642937AD572E}"/>
+                <a16:creationId xmlns:a16="http://schemas.microsoft.com/office/drawing/2014/main" id="{6B747D74-3294-11C0-CBDE-91F35BB24B00}"/>
               </a:ext>
             </a:extLst>
           </p:cNvPr>
@@ -2664,7 +2680,7 @@
           <a:bodyPr/>
           <a:lstStyle/>
           <a:p>
-            <a:fld id="{82E2CFFA-BCF7-4941-9F1D-DE24BA5E8539}" type="slidenum">
+            <a:fld id="{62F1B366-B12D-4E81-AEC3-117FBF7F511D}" type="slidenum">
               <a:rPr lang="zh-TW" altLang="en-US" smtClean="0"/>
               <a:t>‹#›</a:t>
             </a:fld>
@@ -2675,7 +2691,7 @@
     </p:spTree>
     <p:extLst>
       <p:ext uri="{BB962C8B-B14F-4D97-AF65-F5344CB8AC3E}">
-        <p14:creationId xmlns:p14="http://schemas.microsoft.com/office/powerpoint/2010/main" val="3089031489"/>
+        <p14:creationId xmlns:p14="http://schemas.microsoft.com/office/powerpoint/2010/main" val="3826448144"/>
       </p:ext>
     </p:extLst>
   </p:cSld>
@@ -2707,7 +2723,7 @@
           <p:cNvPr id="2" name="標題 1">
             <a:extLst>
               <a:ext uri="{FF2B5EF4-FFF2-40B4-BE49-F238E27FC236}">
-                <a16:creationId xmlns:a16="http://schemas.microsoft.com/office/drawing/2014/main" id="{788A136A-078A-DB9D-F2BD-2F1DDDC81AF4}"/>
+                <a16:creationId xmlns:a16="http://schemas.microsoft.com/office/drawing/2014/main" id="{CB2AF6C2-0F55-55B8-F658-D248CF1659D1}"/>
               </a:ext>
             </a:extLst>
           </p:cNvPr>
@@ -2744,7 +2760,7 @@
           <p:cNvPr id="3" name="文字版面配置區 2">
             <a:extLst>
               <a:ext uri="{FF2B5EF4-FFF2-40B4-BE49-F238E27FC236}">
-                <a16:creationId xmlns:a16="http://schemas.microsoft.com/office/drawing/2014/main" id="{ACDC8A7A-2676-2B45-7FA6-EDB0895A0465}"/>
+                <a16:creationId xmlns:a16="http://schemas.microsoft.com/office/drawing/2014/main" id="{76989212-88EB-3DCF-D42D-5BE227F4613D}"/>
               </a:ext>
             </a:extLst>
           </p:cNvPr>
@@ -2869,7 +2885,7 @@
           <p:cNvPr id="4" name="日期版面配置區 3">
             <a:extLst>
               <a:ext uri="{FF2B5EF4-FFF2-40B4-BE49-F238E27FC236}">
-                <a16:creationId xmlns:a16="http://schemas.microsoft.com/office/drawing/2014/main" id="{908EAC35-E133-2B34-2575-A3E0DD8C435D}"/>
+                <a16:creationId xmlns:a16="http://schemas.microsoft.com/office/drawing/2014/main" id="{CA0B3D0A-409A-D015-7642-9C3528B3BD18}"/>
               </a:ext>
             </a:extLst>
           </p:cNvPr>
@@ -2885,7 +2901,7 @@
           <a:bodyPr/>
           <a:lstStyle/>
           <a:p>
-            <a:fld id="{412FF54C-54C0-4360-8CC3-BD8DF4F850B5}" type="datetimeFigureOut">
+            <a:fld id="{907350CA-04E8-4F74-B15E-BA0B970B6785}" type="datetimeFigureOut">
               <a:rPr lang="zh-TW" altLang="en-US" smtClean="0"/>
               <a:t>2026/10/13</a:t>
             </a:fld>
@@ -2898,7 +2914,7 @@
           <p:cNvPr id="5" name="頁尾版面配置區 4">
             <a:extLst>
               <a:ext uri="{FF2B5EF4-FFF2-40B4-BE49-F238E27FC236}">
-                <a16:creationId xmlns:a16="http://schemas.microsoft.com/office/drawing/2014/main" id="{DEFC8446-5373-E46E-07A4-6D4FA4D14B9D}"/>
+                <a16:creationId xmlns:a16="http://schemas.microsoft.com/office/drawing/2014/main" id="{FD48B4AB-96D3-6575-F05D-D727C4AED9BD}"/>
               </a:ext>
             </a:extLst>
           </p:cNvPr>
@@ -2923,7 +2939,7 @@
           <p:cNvPr id="6" name="投影片編號版面配置區 5">
             <a:extLst>
               <a:ext uri="{FF2B5EF4-FFF2-40B4-BE49-F238E27FC236}">
-                <a16:creationId xmlns:a16="http://schemas.microsoft.com/office/drawing/2014/main" id="{3ABBB59C-8883-2672-6442-5AD6A6844B89}"/>
+                <a16:creationId xmlns:a16="http://schemas.microsoft.com/office/drawing/2014/main" id="{E7AF1A67-4361-9D2C-4C31-3428154B1554}"/>
               </a:ext>
             </a:extLst>
           </p:cNvPr>
@@ -2939,7 +2955,7 @@
           <a:bodyPr/>
           <a:lstStyle/>
           <a:p>
-            <a:fld id="{82E2CFFA-BCF7-4941-9F1D-DE24BA5E8539}" type="slidenum">
+            <a:fld id="{62F1B366-B12D-4E81-AEC3-117FBF7F511D}" type="slidenum">
               <a:rPr lang="zh-TW" altLang="en-US" smtClean="0"/>
               <a:t>‹#›</a:t>
             </a:fld>
@@ -2950,7 +2966,7 @@
     </p:spTree>
     <p:extLst>
       <p:ext uri="{BB962C8B-B14F-4D97-AF65-F5344CB8AC3E}">
-        <p14:creationId xmlns:p14="http://schemas.microsoft.com/office/powerpoint/2010/main" val="3535774633"/>
+        <p14:creationId xmlns:p14="http://schemas.microsoft.com/office/powerpoint/2010/main" val="2287937270"/>
       </p:ext>
     </p:extLst>
   </p:cSld>
@@ -2982,7 +2998,7 @@
           <p:cNvPr id="2" name="標題 1">
             <a:extLst>
               <a:ext uri="{FF2B5EF4-FFF2-40B4-BE49-F238E27FC236}">
-                <a16:creationId xmlns:a16="http://schemas.microsoft.com/office/drawing/2014/main" id="{B2B47BE8-3431-3FCC-F73D-61610B8EF005}"/>
+                <a16:creationId xmlns:a16="http://schemas.microsoft.com/office/drawing/2014/main" id="{1489D71D-ADEF-CBDC-7499-3A212E0F197D}"/>
               </a:ext>
             </a:extLst>
           </p:cNvPr>
@@ -3010,7 +3026,7 @@
           <p:cNvPr id="3" name="內容版面配置區 2">
             <a:extLst>
               <a:ext uri="{FF2B5EF4-FFF2-40B4-BE49-F238E27FC236}">
-                <a16:creationId xmlns:a16="http://schemas.microsoft.com/office/drawing/2014/main" id="{D73B319D-B639-0ABD-F6E4-D81000FD0F36}"/>
+                <a16:creationId xmlns:a16="http://schemas.microsoft.com/office/drawing/2014/main" id="{3884630C-D61C-FE18-0A81-108EF4AE1CE4}"/>
               </a:ext>
             </a:extLst>
           </p:cNvPr>
@@ -3072,7 +3088,7 @@
           <p:cNvPr id="4" name="內容版面配置區 3">
             <a:extLst>
               <a:ext uri="{FF2B5EF4-FFF2-40B4-BE49-F238E27FC236}">
-                <a16:creationId xmlns:a16="http://schemas.microsoft.com/office/drawing/2014/main" id="{B06CBE88-B08C-EE81-F07C-AE532C0467BA}"/>
+                <a16:creationId xmlns:a16="http://schemas.microsoft.com/office/drawing/2014/main" id="{E5EC2501-E8C8-D498-0155-1CE039972DCF}"/>
               </a:ext>
             </a:extLst>
           </p:cNvPr>
@@ -3134,7 +3150,7 @@
           <p:cNvPr id="5" name="日期版面配置區 4">
             <a:extLst>
               <a:ext uri="{FF2B5EF4-FFF2-40B4-BE49-F238E27FC236}">
-                <a16:creationId xmlns:a16="http://schemas.microsoft.com/office/drawing/2014/main" id="{7C0061B3-5104-2884-CC0E-FF0463CA7B8F}"/>
+                <a16:creationId xmlns:a16="http://schemas.microsoft.com/office/drawing/2014/main" id="{52E6C7C6-5137-4221-4657-25BE29BD21F4}"/>
               </a:ext>
             </a:extLst>
           </p:cNvPr>
@@ -3150,7 +3166,7 @@
           <a:bodyPr/>
           <a:lstStyle/>
           <a:p>
-            <a:fld id="{412FF54C-54C0-4360-8CC3-BD8DF4F850B5}" type="datetimeFigureOut">
+            <a:fld id="{907350CA-04E8-4F74-B15E-BA0B970B6785}" type="datetimeFigureOut">
               <a:rPr lang="zh-TW" altLang="en-US" smtClean="0"/>
               <a:t>2026/10/13</a:t>
             </a:fld>
@@ -3163,7 +3179,7 @@
           <p:cNvPr id="6" name="頁尾版面配置區 5">
             <a:extLst>
               <a:ext uri="{FF2B5EF4-FFF2-40B4-BE49-F238E27FC236}">
-                <a16:creationId xmlns:a16="http://schemas.microsoft.com/office/drawing/2014/main" id="{F6C738E8-F7CA-28EA-FE15-C62CF2CDED50}"/>
+                <a16:creationId xmlns:a16="http://schemas.microsoft.com/office/drawing/2014/main" id="{223C4EFB-2DFA-A536-8CF5-684D68D1948F}"/>
               </a:ext>
             </a:extLst>
           </p:cNvPr>
@@ -3188,7 +3204,7 @@
           <p:cNvPr id="7" name="投影片編號版面配置區 6">
             <a:extLst>
               <a:ext uri="{FF2B5EF4-FFF2-40B4-BE49-F238E27FC236}">
-                <a16:creationId xmlns:a16="http://schemas.microsoft.com/office/drawing/2014/main" id="{AAF24C80-624A-AD84-92E5-937866BF968A}"/>
+                <a16:creationId xmlns:a16="http://schemas.microsoft.com/office/drawing/2014/main" id="{14728C6E-8CA2-0353-4BDB-B815B6895A21}"/>
               </a:ext>
             </a:extLst>
           </p:cNvPr>
@@ -3204,7 +3220,7 @@
           <a:bodyPr/>
           <a:lstStyle/>
           <a:p>
-            <a:fld id="{82E2CFFA-BCF7-4941-9F1D-DE24BA5E8539}" type="slidenum">
+            <a:fld id="{62F1B366-B12D-4E81-AEC3-117FBF7F511D}" type="slidenum">
               <a:rPr lang="zh-TW" altLang="en-US" smtClean="0"/>
               <a:t>‹#›</a:t>
             </a:fld>
@@ -3215,7 +3231,7 @@
     </p:spTree>
     <p:extLst>
       <p:ext uri="{BB962C8B-B14F-4D97-AF65-F5344CB8AC3E}">
-        <p14:creationId xmlns:p14="http://schemas.microsoft.com/office/powerpoint/2010/main" val="4058649664"/>
+        <p14:creationId xmlns:p14="http://schemas.microsoft.com/office/powerpoint/2010/main" val="31255359"/>
       </p:ext>
     </p:extLst>
   </p:cSld>
@@ -3247,7 +3263,7 @@
           <p:cNvPr id="2" name="標題 1">
             <a:extLst>
               <a:ext uri="{FF2B5EF4-FFF2-40B4-BE49-F238E27FC236}">
-                <a16:creationId xmlns:a16="http://schemas.microsoft.com/office/drawing/2014/main" id="{999DA2F5-6A98-7E6D-A612-B90EC3CA1108}"/>
+                <a16:creationId xmlns:a16="http://schemas.microsoft.com/office/drawing/2014/main" id="{C274F51E-43A9-8B38-E359-1876B7DF0FAE}"/>
               </a:ext>
             </a:extLst>
           </p:cNvPr>
@@ -3280,7 +3296,7 @@
           <p:cNvPr id="3" name="文字版面配置區 2">
             <a:extLst>
               <a:ext uri="{FF2B5EF4-FFF2-40B4-BE49-F238E27FC236}">
-                <a16:creationId xmlns:a16="http://schemas.microsoft.com/office/drawing/2014/main" id="{732FA3F2-608C-519C-8BAC-D8A23D1F1AB7}"/>
+                <a16:creationId xmlns:a16="http://schemas.microsoft.com/office/drawing/2014/main" id="{07EEFE1F-E678-24B6-077F-024DD0BF6D10}"/>
               </a:ext>
             </a:extLst>
           </p:cNvPr>
@@ -3351,7 +3367,7 @@
           <p:cNvPr id="4" name="內容版面配置區 3">
             <a:extLst>
               <a:ext uri="{FF2B5EF4-FFF2-40B4-BE49-F238E27FC236}">
-                <a16:creationId xmlns:a16="http://schemas.microsoft.com/office/drawing/2014/main" id="{198DFD60-82FA-370B-C531-0A14635F77F9}"/>
+                <a16:creationId xmlns:a16="http://schemas.microsoft.com/office/drawing/2014/main" id="{E26CF1A2-4F0B-D028-92A5-DB2F618E69E6}"/>
               </a:ext>
             </a:extLst>
           </p:cNvPr>
@@ -3413,7 +3429,7 @@
           <p:cNvPr id="5" name="文字版面配置區 4">
             <a:extLst>
               <a:ext uri="{FF2B5EF4-FFF2-40B4-BE49-F238E27FC236}">
-                <a16:creationId xmlns:a16="http://schemas.microsoft.com/office/drawing/2014/main" id="{94D6887A-E9C0-1CB7-246E-799C411F9E80}"/>
+                <a16:creationId xmlns:a16="http://schemas.microsoft.com/office/drawing/2014/main" id="{31F84A37-689E-E84D-A87A-05E9F1D43E3D}"/>
               </a:ext>
             </a:extLst>
           </p:cNvPr>
@@ -3484,7 +3500,7 @@
           <p:cNvPr id="6" name="內容版面配置區 5">
             <a:extLst>
               <a:ext uri="{FF2B5EF4-FFF2-40B4-BE49-F238E27FC236}">
-                <a16:creationId xmlns:a16="http://schemas.microsoft.com/office/drawing/2014/main" id="{4B37E763-B19B-83A3-3B42-52DF5DD19F18}"/>
+                <a16:creationId xmlns:a16="http://schemas.microsoft.com/office/drawing/2014/main" id="{E1F208AE-A344-644E-FAF6-CA6286E5BCC1}"/>
               </a:ext>
             </a:extLst>
           </p:cNvPr>
@@ -3546,7 +3562,7 @@
           <p:cNvPr id="7" name="日期版面配置區 6">
             <a:extLst>
               <a:ext uri="{FF2B5EF4-FFF2-40B4-BE49-F238E27FC236}">
-                <a16:creationId xmlns:a16="http://schemas.microsoft.com/office/drawing/2014/main" id="{B9C51103-1E9B-37CB-C315-D359B187C687}"/>
+                <a16:creationId xmlns:a16="http://schemas.microsoft.com/office/drawing/2014/main" id="{9FFBE9F6-E09D-171E-6E2C-1A7342A513EC}"/>
               </a:ext>
             </a:extLst>
           </p:cNvPr>
@@ -3562,7 +3578,7 @@
           <a:bodyPr/>
           <a:lstStyle/>
           <a:p>
-            <a:fld id="{412FF54C-54C0-4360-8CC3-BD8DF4F850B5}" type="datetimeFigureOut">
+            <a:fld id="{907350CA-04E8-4F74-B15E-BA0B970B6785}" type="datetimeFigureOut">
               <a:rPr lang="zh-TW" altLang="en-US" smtClean="0"/>
               <a:t>2026/10/13</a:t>
             </a:fld>
@@ -3575,7 +3591,7 @@
           <p:cNvPr id="8" name="頁尾版面配置區 7">
             <a:extLst>
               <a:ext uri="{FF2B5EF4-FFF2-40B4-BE49-F238E27FC236}">
-                <a16:creationId xmlns:a16="http://schemas.microsoft.com/office/drawing/2014/main" id="{74603360-498C-D362-FF21-41E2324797B7}"/>
+                <a16:creationId xmlns:a16="http://schemas.microsoft.com/office/drawing/2014/main" id="{B5CC722C-73B9-32B0-BCA1-27C97E7575F8}"/>
               </a:ext>
             </a:extLst>
           </p:cNvPr>
@@ -3600,7 +3616,7 @@
           <p:cNvPr id="9" name="投影片編號版面配置區 8">
             <a:extLst>
               <a:ext uri="{FF2B5EF4-FFF2-40B4-BE49-F238E27FC236}">
-                <a16:creationId xmlns:a16="http://schemas.microsoft.com/office/drawing/2014/main" id="{3FDFCB55-27F7-DEA9-16A3-973B22DDCD60}"/>
+                <a16:creationId xmlns:a16="http://schemas.microsoft.com/office/drawing/2014/main" id="{5AD3018C-3D0C-297E-E4CC-4C7B2E8E100E}"/>
               </a:ext>
             </a:extLst>
           </p:cNvPr>
@@ -3616,7 +3632,7 @@
           <a:bodyPr/>
           <a:lstStyle/>
           <a:p>
-            <a:fld id="{82E2CFFA-BCF7-4941-9F1D-DE24BA5E8539}" type="slidenum">
+            <a:fld id="{62F1B366-B12D-4E81-AEC3-117FBF7F511D}" type="slidenum">
               <a:rPr lang="zh-TW" altLang="en-US" smtClean="0"/>
               <a:t>‹#›</a:t>
             </a:fld>
@@ -3627,7 +3643,7 @@
     </p:spTree>
     <p:extLst>
       <p:ext uri="{BB962C8B-B14F-4D97-AF65-F5344CB8AC3E}">
-        <p14:creationId xmlns:p14="http://schemas.microsoft.com/office/powerpoint/2010/main" val="4176663348"/>
+        <p14:creationId xmlns:p14="http://schemas.microsoft.com/office/powerpoint/2010/main" val="1380321446"/>
       </p:ext>
     </p:extLst>
   </p:cSld>
@@ -3659,7 +3675,7 @@
           <p:cNvPr id="2" name="標題 1">
             <a:extLst>
               <a:ext uri="{FF2B5EF4-FFF2-40B4-BE49-F238E27FC236}">
-                <a16:creationId xmlns:a16="http://schemas.microsoft.com/office/drawing/2014/main" id="{472888F3-FBE2-8F5C-B58B-4165BC8D911B}"/>
+                <a16:creationId xmlns:a16="http://schemas.microsoft.com/office/drawing/2014/main" id="{29C4963B-F3CF-2F23-99AF-11C2591E4A64}"/>
               </a:ext>
             </a:extLst>
           </p:cNvPr>
@@ -3687,7 +3703,7 @@
           <p:cNvPr id="3" name="日期版面配置區 2">
             <a:extLst>
               <a:ext uri="{FF2B5EF4-FFF2-40B4-BE49-F238E27FC236}">
-                <a16:creationId xmlns:a16="http://schemas.microsoft.com/office/drawing/2014/main" id="{D1821398-D967-D8BD-E771-B84ED96E41D6}"/>
+                <a16:creationId xmlns:a16="http://schemas.microsoft.com/office/drawing/2014/main" id="{2B2A2DB0-508E-2E68-BE40-833CED708F98}"/>
               </a:ext>
             </a:extLst>
           </p:cNvPr>
@@ -3703,7 +3719,7 @@
           <a:bodyPr/>
           <a:lstStyle/>
           <a:p>
-            <a:fld id="{412FF54C-54C0-4360-8CC3-BD8DF4F850B5}" type="datetimeFigureOut">
+            <a:fld id="{907350CA-04E8-4F74-B15E-BA0B970B6785}" type="datetimeFigureOut">
               <a:rPr lang="zh-TW" altLang="en-US" smtClean="0"/>
               <a:t>2026/10/13</a:t>
             </a:fld>
@@ -3716,7 +3732,7 @@
           <p:cNvPr id="4" name="頁尾版面配置區 3">
             <a:extLst>
               <a:ext uri="{FF2B5EF4-FFF2-40B4-BE49-F238E27FC236}">
-                <a16:creationId xmlns:a16="http://schemas.microsoft.com/office/drawing/2014/main" id="{29DDD1D2-2CD2-E1E7-4DB3-FF0DCA731194}"/>
+                <a16:creationId xmlns:a16="http://schemas.microsoft.com/office/drawing/2014/main" id="{DB057971-F358-1FE7-DDA7-957189A525E0}"/>
               </a:ext>
             </a:extLst>
           </p:cNvPr>
@@ -3741,7 +3757,7 @@
           <p:cNvPr id="5" name="投影片編號版面配置區 4">
             <a:extLst>
               <a:ext uri="{FF2B5EF4-FFF2-40B4-BE49-F238E27FC236}">
-                <a16:creationId xmlns:a16="http://schemas.microsoft.com/office/drawing/2014/main" id="{ECB8AAFE-B983-A0B2-B4AE-4825B593532C}"/>
+                <a16:creationId xmlns:a16="http://schemas.microsoft.com/office/drawing/2014/main" id="{2F83CC0D-6590-62A6-9AC0-161A0B14435B}"/>
               </a:ext>
             </a:extLst>
           </p:cNvPr>
@@ -3757,7 +3773,7 @@
           <a:bodyPr/>
           <a:lstStyle/>
           <a:p>
-            <a:fld id="{82E2CFFA-BCF7-4941-9F1D-DE24BA5E8539}" type="slidenum">
+            <a:fld id="{62F1B366-B12D-4E81-AEC3-117FBF7F511D}" type="slidenum">
               <a:rPr lang="zh-TW" altLang="en-US" smtClean="0"/>
               <a:t>‹#›</a:t>
             </a:fld>
@@ -3768,7 +3784,7 @@
     </p:spTree>
     <p:extLst>
       <p:ext uri="{BB962C8B-B14F-4D97-AF65-F5344CB8AC3E}">
-        <p14:creationId xmlns:p14="http://schemas.microsoft.com/office/powerpoint/2010/main" val="3243943343"/>
+        <p14:creationId xmlns:p14="http://schemas.microsoft.com/office/powerpoint/2010/main" val="2854568454"/>
       </p:ext>
     </p:extLst>
   </p:cSld>
@@ -3800,7 +3816,7 @@
           <p:cNvPr id="2" name="日期版面配置區 1">
             <a:extLst>
               <a:ext uri="{FF2B5EF4-FFF2-40B4-BE49-F238E27FC236}">
-                <a16:creationId xmlns:a16="http://schemas.microsoft.com/office/drawing/2014/main" id="{AC092C40-5A27-EF4A-5F95-4B2ACE4DACA5}"/>
+                <a16:creationId xmlns:a16="http://schemas.microsoft.com/office/drawing/2014/main" id="{3AD3E67A-E057-B0B4-85EB-DFFDAF5465DF}"/>
               </a:ext>
             </a:extLst>
           </p:cNvPr>
@@ -3816,7 +3832,7 @@
           <a:bodyPr/>
           <a:lstStyle/>
           <a:p>
-            <a:fld id="{412FF54C-54C0-4360-8CC3-BD8DF4F850B5}" type="datetimeFigureOut">
+            <a:fld id="{907350CA-04E8-4F74-B15E-BA0B970B6785}" type="datetimeFigureOut">
               <a:rPr lang="zh-TW" altLang="en-US" smtClean="0"/>
               <a:t>2026/10/13</a:t>
             </a:fld>
@@ -3829,7 +3845,7 @@
           <p:cNvPr id="3" name="頁尾版面配置區 2">
             <a:extLst>
               <a:ext uri="{FF2B5EF4-FFF2-40B4-BE49-F238E27FC236}">
-                <a16:creationId xmlns:a16="http://schemas.microsoft.com/office/drawing/2014/main" id="{BB468CA9-3D0C-0E61-2CFD-6DFDF1CDDBE9}"/>
+                <a16:creationId xmlns:a16="http://schemas.microsoft.com/office/drawing/2014/main" id="{5C7FBE46-E168-AC84-A9A0-44BC270BD061}"/>
               </a:ext>
             </a:extLst>
           </p:cNvPr>
@@ -3854,7 +3870,7 @@
           <p:cNvPr id="4" name="投影片編號版面配置區 3">
             <a:extLst>
               <a:ext uri="{FF2B5EF4-FFF2-40B4-BE49-F238E27FC236}">
-                <a16:creationId xmlns:a16="http://schemas.microsoft.com/office/drawing/2014/main" id="{84800F85-01EF-F63A-AA0A-2FC58D271B27}"/>
+                <a16:creationId xmlns:a16="http://schemas.microsoft.com/office/drawing/2014/main" id="{A7DD4043-2FBA-C9CA-F984-46BA2EC7D40B}"/>
               </a:ext>
             </a:extLst>
           </p:cNvPr>
@@ -3870,7 +3886,7 @@
           <a:bodyPr/>
           <a:lstStyle/>
           <a:p>
-            <a:fld id="{82E2CFFA-BCF7-4941-9F1D-DE24BA5E8539}" type="slidenum">
+            <a:fld id="{62F1B366-B12D-4E81-AEC3-117FBF7F511D}" type="slidenum">
               <a:rPr lang="zh-TW" altLang="en-US" smtClean="0"/>
               <a:t>‹#›</a:t>
             </a:fld>
@@ -3881,7 +3897,7 @@
     </p:spTree>
     <p:extLst>
       <p:ext uri="{BB962C8B-B14F-4D97-AF65-F5344CB8AC3E}">
-        <p14:creationId xmlns:p14="http://schemas.microsoft.com/office/powerpoint/2010/main" val="4283013541"/>
+        <p14:creationId xmlns:p14="http://schemas.microsoft.com/office/powerpoint/2010/main" val="2241721207"/>
       </p:ext>
     </p:extLst>
   </p:cSld>
@@ -3913,7 +3929,7 @@
           <p:cNvPr id="2" name="標題 1">
             <a:extLst>
               <a:ext uri="{FF2B5EF4-FFF2-40B4-BE49-F238E27FC236}">
-                <a16:creationId xmlns:a16="http://schemas.microsoft.com/office/drawing/2014/main" id="{ABEAF966-94FA-06EE-6E3D-7FF301A1087C}"/>
+                <a16:creationId xmlns:a16="http://schemas.microsoft.com/office/drawing/2014/main" id="{A6089DD5-9068-E575-3081-03249DDB92A4}"/>
               </a:ext>
             </a:extLst>
           </p:cNvPr>
@@ -3950,7 +3966,7 @@
           <p:cNvPr id="3" name="內容版面配置區 2">
             <a:extLst>
               <a:ext uri="{FF2B5EF4-FFF2-40B4-BE49-F238E27FC236}">
-                <a16:creationId xmlns:a16="http://schemas.microsoft.com/office/drawing/2014/main" id="{B0CD62E2-B4CD-31EE-58F6-6BE76CB28CEA}"/>
+                <a16:creationId xmlns:a16="http://schemas.microsoft.com/office/drawing/2014/main" id="{A3B2FEC8-FEE7-1129-2DA2-05C754258E83}"/>
               </a:ext>
             </a:extLst>
           </p:cNvPr>
@@ -4040,7 +4056,7 @@
           <p:cNvPr id="4" name="文字版面配置區 3">
             <a:extLst>
               <a:ext uri="{FF2B5EF4-FFF2-40B4-BE49-F238E27FC236}">
-                <a16:creationId xmlns:a16="http://schemas.microsoft.com/office/drawing/2014/main" id="{A7AA6AFB-37F5-DCFF-6696-B8BF525CD87B}"/>
+                <a16:creationId xmlns:a16="http://schemas.microsoft.com/office/drawing/2014/main" id="{E753DB1D-0B0E-C410-DAA3-FFF37059386C}"/>
               </a:ext>
             </a:extLst>
           </p:cNvPr>
@@ -4111,7 +4127,7 @@
           <p:cNvPr id="5" name="日期版面配置區 4">
             <a:extLst>
               <a:ext uri="{FF2B5EF4-FFF2-40B4-BE49-F238E27FC236}">
-                <a16:creationId xmlns:a16="http://schemas.microsoft.com/office/drawing/2014/main" id="{3AE1FADB-02A4-4AFD-0EA7-04E4A0F449E5}"/>
+                <a16:creationId xmlns:a16="http://schemas.microsoft.com/office/drawing/2014/main" id="{18DA12BE-DE1A-F4FA-B261-F03443798775}"/>
               </a:ext>
             </a:extLst>
           </p:cNvPr>
@@ -4127,7 +4143,7 @@
           <a:bodyPr/>
           <a:lstStyle/>
           <a:p>
-            <a:fld id="{412FF54C-54C0-4360-8CC3-BD8DF4F850B5}" type="datetimeFigureOut">
+            <a:fld id="{907350CA-04E8-4F74-B15E-BA0B970B6785}" type="datetimeFigureOut">
               <a:rPr lang="zh-TW" altLang="en-US" smtClean="0"/>
               <a:t>2026/10/13</a:t>
             </a:fld>
@@ -4140,7 +4156,7 @@
           <p:cNvPr id="6" name="頁尾版面配置區 5">
             <a:extLst>
               <a:ext uri="{FF2B5EF4-FFF2-40B4-BE49-F238E27FC236}">
-                <a16:creationId xmlns:a16="http://schemas.microsoft.com/office/drawing/2014/main" id="{63B1C4A0-83AA-1A30-7E0E-749181053448}"/>
+                <a16:creationId xmlns:a16="http://schemas.microsoft.com/office/drawing/2014/main" id="{51355E57-D92A-ED70-7E60-3651E9011C1C}"/>
               </a:ext>
             </a:extLst>
           </p:cNvPr>
@@ -4165,7 +4181,7 @@
           <p:cNvPr id="7" name="投影片編號版面配置區 6">
             <a:extLst>
               <a:ext uri="{FF2B5EF4-FFF2-40B4-BE49-F238E27FC236}">
-                <a16:creationId xmlns:a16="http://schemas.microsoft.com/office/drawing/2014/main" id="{C9D07372-7672-58ED-6F1A-C1ABE08D3AD0}"/>
+                <a16:creationId xmlns:a16="http://schemas.microsoft.com/office/drawing/2014/main" id="{BFFC9D2D-E7AD-5116-C1B4-50BBC8FA729F}"/>
               </a:ext>
             </a:extLst>
           </p:cNvPr>
@@ -4181,7 +4197,7 @@
           <a:bodyPr/>
           <a:lstStyle/>
           <a:p>
-            <a:fld id="{82E2CFFA-BCF7-4941-9F1D-DE24BA5E8539}" type="slidenum">
+            <a:fld id="{62F1B366-B12D-4E81-AEC3-117FBF7F511D}" type="slidenum">
               <a:rPr lang="zh-TW" altLang="en-US" smtClean="0"/>
               <a:t>‹#›</a:t>
             </a:fld>
@@ -4192,7 +4208,7 @@
     </p:spTree>
     <p:extLst>
       <p:ext uri="{BB962C8B-B14F-4D97-AF65-F5344CB8AC3E}">
-        <p14:creationId xmlns:p14="http://schemas.microsoft.com/office/powerpoint/2010/main" val="3762157465"/>
+        <p14:creationId xmlns:p14="http://schemas.microsoft.com/office/powerpoint/2010/main" val="3336076642"/>
       </p:ext>
     </p:extLst>
   </p:cSld>
@@ -4224,7 +4240,7 @@
           <p:cNvPr id="2" name="標題 1">
             <a:extLst>
               <a:ext uri="{FF2B5EF4-FFF2-40B4-BE49-F238E27FC236}">
-                <a16:creationId xmlns:a16="http://schemas.microsoft.com/office/drawing/2014/main" id="{3EE7AF2A-709E-6F61-C0BE-E705C9BF5EE5}"/>
+                <a16:creationId xmlns:a16="http://schemas.microsoft.com/office/drawing/2014/main" id="{67D6F5DC-C3B3-5A5D-1FAD-097F9ECF7C21}"/>
               </a:ext>
             </a:extLst>
           </p:cNvPr>
@@ -4261,7 +4277,7 @@
           <p:cNvPr id="3" name="圖片版面配置區 2">
             <a:extLst>
               <a:ext uri="{FF2B5EF4-FFF2-40B4-BE49-F238E27FC236}">
-                <a16:creationId xmlns:a16="http://schemas.microsoft.com/office/drawing/2014/main" id="{192AD057-C83E-0A62-66A7-C29D5A824753}"/>
+                <a16:creationId xmlns:a16="http://schemas.microsoft.com/office/drawing/2014/main" id="{5D864430-66B8-D871-EB2B-BC14063963F4}"/>
               </a:ext>
             </a:extLst>
           </p:cNvPr>
@@ -4328,7 +4344,7 @@
           <p:cNvPr id="4" name="文字版面配置區 3">
             <a:extLst>
               <a:ext uri="{FF2B5EF4-FFF2-40B4-BE49-F238E27FC236}">
-                <a16:creationId xmlns:a16="http://schemas.microsoft.com/office/drawing/2014/main" id="{DA003BC1-49FC-C5ED-19D8-AC7CF419D030}"/>
+                <a16:creationId xmlns:a16="http://schemas.microsoft.com/office/drawing/2014/main" id="{314A9B03-4E5C-55D0-89CA-26489DFD586B}"/>
               </a:ext>
             </a:extLst>
           </p:cNvPr>
@@ -4399,7 +4415,7 @@
           <p:cNvPr id="5" name="日期版面配置區 4">
             <a:extLst>
               <a:ext uri="{FF2B5EF4-FFF2-40B4-BE49-F238E27FC236}">
-                <a16:creationId xmlns:a16="http://schemas.microsoft.com/office/drawing/2014/main" id="{57447FF8-2CCA-8032-0FF9-B0F7FFB4A31E}"/>
+                <a16:creationId xmlns:a16="http://schemas.microsoft.com/office/drawing/2014/main" id="{0DCC6C79-CDB0-0AE1-8171-4DF80448655A}"/>
               </a:ext>
             </a:extLst>
           </p:cNvPr>
@@ -4415,7 +4431,7 @@
           <a:bodyPr/>
           <a:lstStyle/>
           <a:p>
-            <a:fld id="{412FF54C-54C0-4360-8CC3-BD8DF4F850B5}" type="datetimeFigureOut">
+            <a:fld id="{907350CA-04E8-4F74-B15E-BA0B970B6785}" type="datetimeFigureOut">
               <a:rPr lang="zh-TW" altLang="en-US" smtClean="0"/>
               <a:t>2026/10/13</a:t>
             </a:fld>
@@ -4428,7 +4444,7 @@
           <p:cNvPr id="6" name="頁尾版面配置區 5">
             <a:extLst>
               <a:ext uri="{FF2B5EF4-FFF2-40B4-BE49-F238E27FC236}">
-                <a16:creationId xmlns:a16="http://schemas.microsoft.com/office/drawing/2014/main" id="{4A804B9C-F538-BC1E-9CF0-F6D52E4A9137}"/>
+                <a16:creationId xmlns:a16="http://schemas.microsoft.com/office/drawing/2014/main" id="{CFB91F97-2F96-CA93-D046-B4C751BB4FAA}"/>
               </a:ext>
             </a:extLst>
           </p:cNvPr>
@@ -4453,7 +4469,7 @@
           <p:cNvPr id="7" name="投影片編號版面配置區 6">
             <a:extLst>
               <a:ext uri="{FF2B5EF4-FFF2-40B4-BE49-F238E27FC236}">
-                <a16:creationId xmlns:a16="http://schemas.microsoft.com/office/drawing/2014/main" id="{0B8B54D3-3C57-8C0F-725B-BA2109A40A98}"/>
+                <a16:creationId xmlns:a16="http://schemas.microsoft.com/office/drawing/2014/main" id="{67AE12A6-A51F-2B7D-1ED1-72BC5A83AFF0}"/>
               </a:ext>
             </a:extLst>
           </p:cNvPr>
@@ -4469,7 +4485,7 @@
           <a:bodyPr/>
           <a:lstStyle/>
           <a:p>
-            <a:fld id="{82E2CFFA-BCF7-4941-9F1D-DE24BA5E8539}" type="slidenum">
+            <a:fld id="{62F1B366-B12D-4E81-AEC3-117FBF7F511D}" type="slidenum">
               <a:rPr lang="zh-TW" altLang="en-US" smtClean="0"/>
               <a:t>‹#›</a:t>
             </a:fld>
@@ -4480,7 +4496,7 @@
     </p:spTree>
     <p:extLst>
       <p:ext uri="{BB962C8B-B14F-4D97-AF65-F5344CB8AC3E}">
-        <p14:creationId xmlns:p14="http://schemas.microsoft.com/office/powerpoint/2010/main" val="3418028992"/>
+        <p14:creationId xmlns:p14="http://schemas.microsoft.com/office/powerpoint/2010/main" val="491501093"/>
       </p:ext>
     </p:extLst>
   </p:cSld>
@@ -4517,7 +4533,7 @@
           <p:cNvPr id="2" name="標題版面配置區 1">
             <a:extLst>
               <a:ext uri="{FF2B5EF4-FFF2-40B4-BE49-F238E27FC236}">
-                <a16:creationId xmlns:a16="http://schemas.microsoft.com/office/drawing/2014/main" id="{C2082E9B-3EB3-A415-C67A-E8841D08E174}"/>
+                <a16:creationId xmlns:a16="http://schemas.microsoft.com/office/drawing/2014/main" id="{C3789258-E94D-1111-9263-40B38AA95E45}"/>
               </a:ext>
             </a:extLst>
           </p:cNvPr>
@@ -4555,7 +4571,7 @@
           <p:cNvPr id="3" name="文字版面配置區 2">
             <a:extLst>
               <a:ext uri="{FF2B5EF4-FFF2-40B4-BE49-F238E27FC236}">
-                <a16:creationId xmlns:a16="http://schemas.microsoft.com/office/drawing/2014/main" id="{398AB26A-2B7E-38A9-BBAE-F51067E35F03}"/>
+                <a16:creationId xmlns:a16="http://schemas.microsoft.com/office/drawing/2014/main" id="{55212C35-6FBB-7BA5-0CA8-B2A79FE31DB9}"/>
               </a:ext>
             </a:extLst>
           </p:cNvPr>
@@ -4622,7 +4638,7 @@
           <p:cNvPr id="4" name="日期版面配置區 3">
             <a:extLst>
               <a:ext uri="{FF2B5EF4-FFF2-40B4-BE49-F238E27FC236}">
-                <a16:creationId xmlns:a16="http://schemas.microsoft.com/office/drawing/2014/main" id="{95E6A7AA-F990-948F-F349-9F50E8EB1F06}"/>
+                <a16:creationId xmlns:a16="http://schemas.microsoft.com/office/drawing/2014/main" id="{DD2ACE6C-3811-A12F-CFD3-0363B2B68339}"/>
               </a:ext>
             </a:extLst>
           </p:cNvPr>
@@ -4656,7 +4672,7 @@
             </a:lvl1pPr>
           </a:lstStyle>
           <a:p>
-            <a:fld id="{412FF54C-54C0-4360-8CC3-BD8DF4F850B5}" type="datetimeFigureOut">
+            <a:fld id="{907350CA-04E8-4F74-B15E-BA0B970B6785}" type="datetimeFigureOut">
               <a:rPr lang="zh-TW" altLang="en-US" smtClean="0"/>
               <a:t>2026/10/13</a:t>
             </a:fld>
@@ -4669,7 +4685,7 @@
           <p:cNvPr id="5" name="頁尾版面配置區 4">
             <a:extLst>
               <a:ext uri="{FF2B5EF4-FFF2-40B4-BE49-F238E27FC236}">
-                <a16:creationId xmlns:a16="http://schemas.microsoft.com/office/drawing/2014/main" id="{1C0B3FBE-C324-F10E-86C0-E95718B23FA7}"/>
+                <a16:creationId xmlns:a16="http://schemas.microsoft.com/office/drawing/2014/main" id="{E80A1D26-BDCD-4AB9-11E1-415F0946FC4B}"/>
               </a:ext>
             </a:extLst>
           </p:cNvPr>
@@ -4712,7 +4728,7 @@
           <p:cNvPr id="6" name="投影片編號版面配置區 5">
             <a:extLst>
               <a:ext uri="{FF2B5EF4-FFF2-40B4-BE49-F238E27FC236}">
-                <a16:creationId xmlns:a16="http://schemas.microsoft.com/office/drawing/2014/main" id="{52F4C82D-A878-F7DA-9924-AC482C821ED4}"/>
+                <a16:creationId xmlns:a16="http://schemas.microsoft.com/office/drawing/2014/main" id="{51AB2DD1-FE2C-1191-8D33-3504BB63F8B4}"/>
               </a:ext>
             </a:extLst>
           </p:cNvPr>
@@ -4746,7 +4762,7 @@
             </a:lvl1pPr>
           </a:lstStyle>
           <a:p>
-            <a:fld id="{82E2CFFA-BCF7-4941-9F1D-DE24BA5E8539}" type="slidenum">
+            <a:fld id="{62F1B366-B12D-4E81-AEC3-117FBF7F511D}" type="slidenum">
               <a:rPr lang="zh-TW" altLang="en-US" smtClean="0"/>
               <a:t>‹#›</a:t>
             </a:fld>
@@ -4757,7 +4773,7 @@
     </p:spTree>
     <p:extLst>
       <p:ext uri="{BB962C8B-B14F-4D97-AF65-F5344CB8AC3E}">
-        <p14:creationId xmlns:p14="http://schemas.microsoft.com/office/powerpoint/2010/main" val="2952641552"/>
+        <p14:creationId xmlns:p14="http://schemas.microsoft.com/office/powerpoint/2010/main" val="3686277055"/>
       </p:ext>
     </p:extLst>
   </p:cSld>
@@ -5088,7 +5104,7 @@
           <p:cNvPr id="2" name="標題 1">
             <a:extLst>
               <a:ext uri="{FF2B5EF4-FFF2-40B4-BE49-F238E27FC236}">
-                <a16:creationId xmlns:a16="http://schemas.microsoft.com/office/drawing/2014/main" id="{EED0CF28-549A-71BC-A35C-748BF6DF5FD3}"/>
+                <a16:creationId xmlns:a16="http://schemas.microsoft.com/office/drawing/2014/main" id="{6C6697CF-3A36-B059-81AF-47E15FF4EDBC}"/>
               </a:ext>
             </a:extLst>
           </p:cNvPr>
@@ -5131,7 +5147,7 @@
           <p:cNvPr id="3" name="副標題 2">
             <a:extLst>
               <a:ext uri="{FF2B5EF4-FFF2-40B4-BE49-F238E27FC236}">
-                <a16:creationId xmlns:a16="http://schemas.microsoft.com/office/drawing/2014/main" id="{B1FDAD4B-D4C1-4079-6F2A-C0BF5109F5AA}"/>
+                <a16:creationId xmlns:a16="http://schemas.microsoft.com/office/drawing/2014/main" id="{D294E6BC-1934-3A77-AAB9-2E2F575A339C}"/>
               </a:ext>
             </a:extLst>
           </p:cNvPr>
@@ -5229,7 +5245,7 @@
           <p:cNvPr id="4" name="文字方塊 3">
             <a:extLst>
               <a:ext uri="{FF2B5EF4-FFF2-40B4-BE49-F238E27FC236}">
-                <a16:creationId xmlns:a16="http://schemas.microsoft.com/office/drawing/2014/main" id="{84DF8BC9-2157-C8C8-8432-1A0A318585C8}"/>
+                <a16:creationId xmlns:a16="http://schemas.microsoft.com/office/drawing/2014/main" id="{4EF9D55B-8174-C9AB-3EAC-07DF39A8BBD3}"/>
               </a:ext>
             </a:extLst>
           </p:cNvPr>
@@ -5271,7 +5287,7 @@
           <p:cNvPr id="5" name="文字方塊 4">
             <a:extLst>
               <a:ext uri="{FF2B5EF4-FFF2-40B4-BE49-F238E27FC236}">
-                <a16:creationId xmlns:a16="http://schemas.microsoft.com/office/drawing/2014/main" id="{BBE7EE83-D8B5-B054-9270-9B0D4D379487}"/>
+                <a16:creationId xmlns:a16="http://schemas.microsoft.com/office/drawing/2014/main" id="{6CB6E723-FEDA-F135-41A3-9425BA0BDA9A}"/>
               </a:ext>
             </a:extLst>
           </p:cNvPr>
@@ -5368,7 +5384,7 @@
           <p:cNvPr id="6" name="矩形: 圓角 5">
             <a:extLst>
               <a:ext uri="{FF2B5EF4-FFF2-40B4-BE49-F238E27FC236}">
-                <a16:creationId xmlns:a16="http://schemas.microsoft.com/office/drawing/2014/main" id="{6D5D5EFB-BDD5-DD4E-67FF-EF0F1D2D5759}"/>
+                <a16:creationId xmlns:a16="http://schemas.microsoft.com/office/drawing/2014/main" id="{A674DBB3-3C23-00CA-272A-F7DD1A57B33F}"/>
               </a:ext>
             </a:extLst>
           </p:cNvPr>
@@ -5438,7 +5454,7 @@
           <p:cNvPr id="7" name="矩形 6">
             <a:extLst>
               <a:ext uri="{FF2B5EF4-FFF2-40B4-BE49-F238E27FC236}">
-                <a16:creationId xmlns:a16="http://schemas.microsoft.com/office/drawing/2014/main" id="{FC4D962C-7D18-38D5-C5EB-87974133D7C6}"/>
+                <a16:creationId xmlns:a16="http://schemas.microsoft.com/office/drawing/2014/main" id="{A1EBF303-428C-E005-6552-6043CB6D524A}"/>
               </a:ext>
             </a:extLst>
           </p:cNvPr>
@@ -5506,7 +5522,7 @@
           <p:cNvPr id="8" name="矩形 7">
             <a:extLst>
               <a:ext uri="{FF2B5EF4-FFF2-40B4-BE49-F238E27FC236}">
-                <a16:creationId xmlns:a16="http://schemas.microsoft.com/office/drawing/2014/main" id="{C988D50F-2972-0AAA-998A-B96D99389C0A}"/>
+                <a16:creationId xmlns:a16="http://schemas.microsoft.com/office/drawing/2014/main" id="{D99F516E-8B45-1ED9-903D-AF981EF9E8B0}"/>
               </a:ext>
             </a:extLst>
           </p:cNvPr>
@@ -5574,7 +5590,7 @@
           <p:cNvPr id="9" name="矩形 8">
             <a:extLst>
               <a:ext uri="{FF2B5EF4-FFF2-40B4-BE49-F238E27FC236}">
-                <a16:creationId xmlns:a16="http://schemas.microsoft.com/office/drawing/2014/main" id="{41888ABE-E2F6-D7D4-3422-31846A8FE0EC}"/>
+                <a16:creationId xmlns:a16="http://schemas.microsoft.com/office/drawing/2014/main" id="{981567B6-ABE4-4FD8-C231-059C5A938E56}"/>
               </a:ext>
             </a:extLst>
           </p:cNvPr>
@@ -5642,7 +5658,7 @@
           <p:cNvPr id="10" name="矩形 9">
             <a:extLst>
               <a:ext uri="{FF2B5EF4-FFF2-40B4-BE49-F238E27FC236}">
-                <a16:creationId xmlns:a16="http://schemas.microsoft.com/office/drawing/2014/main" id="{08F99171-58B0-3FB9-821F-8EBCFC43A57A}"/>
+                <a16:creationId xmlns:a16="http://schemas.microsoft.com/office/drawing/2014/main" id="{796AF58C-1FAD-A95D-7174-5EAE5A818FBB}"/>
               </a:ext>
             </a:extLst>
           </p:cNvPr>
@@ -5710,7 +5726,7 @@
           <p:cNvPr id="11" name="矩形 10">
             <a:extLst>
               <a:ext uri="{FF2B5EF4-FFF2-40B4-BE49-F238E27FC236}">
-                <a16:creationId xmlns:a16="http://schemas.microsoft.com/office/drawing/2014/main" id="{20979052-14BD-2130-FC86-AE363921C5B6}"/>
+                <a16:creationId xmlns:a16="http://schemas.microsoft.com/office/drawing/2014/main" id="{E82D5D05-897C-B660-7BE5-D4894B28AFF8}"/>
               </a:ext>
             </a:extLst>
           </p:cNvPr>
@@ -5778,7 +5794,7 @@
           <p:cNvPr id="12" name="矩形 11">
             <a:extLst>
               <a:ext uri="{FF2B5EF4-FFF2-40B4-BE49-F238E27FC236}">
-                <a16:creationId xmlns:a16="http://schemas.microsoft.com/office/drawing/2014/main" id="{26D81AA9-4566-1D1F-A1BB-BB86A195ACFF}"/>
+                <a16:creationId xmlns:a16="http://schemas.microsoft.com/office/drawing/2014/main" id="{58BC1C10-EC7C-C339-36F4-32AEA2E438F3}"/>
               </a:ext>
             </a:extLst>
           </p:cNvPr>
@@ -5846,7 +5862,7 @@
           <p:cNvPr id="13" name="矩形 12">
             <a:extLst>
               <a:ext uri="{FF2B5EF4-FFF2-40B4-BE49-F238E27FC236}">
-                <a16:creationId xmlns:a16="http://schemas.microsoft.com/office/drawing/2014/main" id="{9DBF63E3-417C-2E3A-ED81-8437813FAA77}"/>
+                <a16:creationId xmlns:a16="http://schemas.microsoft.com/office/drawing/2014/main" id="{30E93658-9017-B223-77AE-123AED0B2DA2}"/>
               </a:ext>
             </a:extLst>
           </p:cNvPr>
@@ -5914,7 +5930,7 @@
           <p:cNvPr id="14" name="矩形 13">
             <a:extLst>
               <a:ext uri="{FF2B5EF4-FFF2-40B4-BE49-F238E27FC236}">
-                <a16:creationId xmlns:a16="http://schemas.microsoft.com/office/drawing/2014/main" id="{89BFFF1B-F14C-1D3A-0303-0159DCA30687}"/>
+                <a16:creationId xmlns:a16="http://schemas.microsoft.com/office/drawing/2014/main" id="{76D4257E-31AE-7186-6AC0-E34E474906B9}"/>
               </a:ext>
             </a:extLst>
           </p:cNvPr>
@@ -5982,7 +5998,7 @@
           <p:cNvPr id="15" name="矩形 14">
             <a:extLst>
               <a:ext uri="{FF2B5EF4-FFF2-40B4-BE49-F238E27FC236}">
-                <a16:creationId xmlns:a16="http://schemas.microsoft.com/office/drawing/2014/main" id="{3C89DA3F-1B60-2FE3-0721-C39C6A161CCA}"/>
+                <a16:creationId xmlns:a16="http://schemas.microsoft.com/office/drawing/2014/main" id="{0DC32206-FCDA-F8E6-BA13-B3E4E042B64D}"/>
               </a:ext>
             </a:extLst>
           </p:cNvPr>
@@ -6050,7 +6066,7 @@
           <p:cNvPr id="16" name="矩形 15">
             <a:extLst>
               <a:ext uri="{FF2B5EF4-FFF2-40B4-BE49-F238E27FC236}">
-                <a16:creationId xmlns:a16="http://schemas.microsoft.com/office/drawing/2014/main" id="{11108090-DD7D-1725-B309-5FBFE29C5ACA}"/>
+                <a16:creationId xmlns:a16="http://schemas.microsoft.com/office/drawing/2014/main" id="{212B4F9B-FA3F-C1F3-3023-125E24640612}"/>
               </a:ext>
             </a:extLst>
           </p:cNvPr>
@@ -6118,7 +6134,7 @@
           <p:cNvPr id="17" name="矩形 16">
             <a:extLst>
               <a:ext uri="{FF2B5EF4-FFF2-40B4-BE49-F238E27FC236}">
-                <a16:creationId xmlns:a16="http://schemas.microsoft.com/office/drawing/2014/main" id="{B543F487-DEF4-6ACB-0149-9BE92FA78A7D}"/>
+                <a16:creationId xmlns:a16="http://schemas.microsoft.com/office/drawing/2014/main" id="{63F1440C-7A6E-22E3-7A8E-E248D0131797}"/>
               </a:ext>
             </a:extLst>
           </p:cNvPr>
@@ -6186,7 +6202,7 @@
           <p:cNvPr id="18" name="矩形 17">
             <a:extLst>
               <a:ext uri="{FF2B5EF4-FFF2-40B4-BE49-F238E27FC236}">
-                <a16:creationId xmlns:a16="http://schemas.microsoft.com/office/drawing/2014/main" id="{59547F60-A87F-07B4-7CDE-E280E941040B}"/>
+                <a16:creationId xmlns:a16="http://schemas.microsoft.com/office/drawing/2014/main" id="{0700E7F5-46D5-3600-9012-9354FCAFF3F0}"/>
               </a:ext>
             </a:extLst>
           </p:cNvPr>
@@ -6254,7 +6270,7 @@
           <p:cNvPr id="19" name="矩形 18">
             <a:extLst>
               <a:ext uri="{FF2B5EF4-FFF2-40B4-BE49-F238E27FC236}">
-                <a16:creationId xmlns:a16="http://schemas.microsoft.com/office/drawing/2014/main" id="{9F9C632B-6DBD-2014-04DF-FEA025DB3068}"/>
+                <a16:creationId xmlns:a16="http://schemas.microsoft.com/office/drawing/2014/main" id="{B78BB036-0C2C-51E2-2CF1-AB6CC55DC7BA}"/>
               </a:ext>
             </a:extLst>
           </p:cNvPr>
@@ -6322,7 +6338,7 @@
           <p:cNvPr id="20" name="矩形 19">
             <a:extLst>
               <a:ext uri="{FF2B5EF4-FFF2-40B4-BE49-F238E27FC236}">
-                <a16:creationId xmlns:a16="http://schemas.microsoft.com/office/drawing/2014/main" id="{168F0A11-B33C-6F9E-70FF-04DE6439F246}"/>
+                <a16:creationId xmlns:a16="http://schemas.microsoft.com/office/drawing/2014/main" id="{2E309BA5-ECEA-3392-FD01-3FFA7E165CAC}"/>
               </a:ext>
             </a:extLst>
           </p:cNvPr>
@@ -6390,7 +6406,7 @@
           <p:cNvPr id="21" name="矩形 20">
             <a:extLst>
               <a:ext uri="{FF2B5EF4-FFF2-40B4-BE49-F238E27FC236}">
-                <a16:creationId xmlns:a16="http://schemas.microsoft.com/office/drawing/2014/main" id="{63E02381-57FF-D607-F569-3924BEE6A8CF}"/>
+                <a16:creationId xmlns:a16="http://schemas.microsoft.com/office/drawing/2014/main" id="{6D2C26EC-F63E-BFAC-3CAA-7BEA23E2293C}"/>
               </a:ext>
             </a:extLst>
           </p:cNvPr>
@@ -6458,7 +6474,7 @@
           <p:cNvPr id="22" name="矩形 21">
             <a:extLst>
               <a:ext uri="{FF2B5EF4-FFF2-40B4-BE49-F238E27FC236}">
-                <a16:creationId xmlns:a16="http://schemas.microsoft.com/office/drawing/2014/main" id="{A0B5CFAD-B0DB-ADBE-4433-3E2AEF1CECA6}"/>
+                <a16:creationId xmlns:a16="http://schemas.microsoft.com/office/drawing/2014/main" id="{622737E2-420D-4671-80C6-9811429B4BE6}"/>
               </a:ext>
             </a:extLst>
           </p:cNvPr>
@@ -6526,7 +6542,7 @@
           <p:cNvPr id="23" name="矩形 22">
             <a:extLst>
               <a:ext uri="{FF2B5EF4-FFF2-40B4-BE49-F238E27FC236}">
-                <a16:creationId xmlns:a16="http://schemas.microsoft.com/office/drawing/2014/main" id="{BA04820C-DC09-1591-1FB6-3E3A0724CCF2}"/>
+                <a16:creationId xmlns:a16="http://schemas.microsoft.com/office/drawing/2014/main" id="{55617794-94C1-10A7-5EE4-587C741CA3BD}"/>
               </a:ext>
             </a:extLst>
           </p:cNvPr>
@@ -6594,7 +6610,7 @@
           <p:cNvPr id="24" name="矩形 23">
             <a:extLst>
               <a:ext uri="{FF2B5EF4-FFF2-40B4-BE49-F238E27FC236}">
-                <a16:creationId xmlns:a16="http://schemas.microsoft.com/office/drawing/2014/main" id="{343FF7A8-0980-1647-2C36-521A843A84B9}"/>
+                <a16:creationId xmlns:a16="http://schemas.microsoft.com/office/drawing/2014/main" id="{86E800F9-A390-289D-0C61-922763C79AAD}"/>
               </a:ext>
             </a:extLst>
           </p:cNvPr>
@@ -6662,7 +6678,7 @@
           <p:cNvPr id="25" name="矩形 24">
             <a:extLst>
               <a:ext uri="{FF2B5EF4-FFF2-40B4-BE49-F238E27FC236}">
-                <a16:creationId xmlns:a16="http://schemas.microsoft.com/office/drawing/2014/main" id="{6D0014E4-379C-DF49-E342-80B8E887124E}"/>
+                <a16:creationId xmlns:a16="http://schemas.microsoft.com/office/drawing/2014/main" id="{9CF2643B-8139-34DF-8E2B-4B3D336E89CE}"/>
               </a:ext>
             </a:extLst>
           </p:cNvPr>
@@ -6730,7 +6746,7 @@
           <p:cNvPr id="26" name="矩形 25">
             <a:extLst>
               <a:ext uri="{FF2B5EF4-FFF2-40B4-BE49-F238E27FC236}">
-                <a16:creationId xmlns:a16="http://schemas.microsoft.com/office/drawing/2014/main" id="{B8AC6290-64D5-E236-8C64-1AC109FEF0F3}"/>
+                <a16:creationId xmlns:a16="http://schemas.microsoft.com/office/drawing/2014/main" id="{E19C8FB3-6C76-5A44-A9A5-1A651EDEF9A5}"/>
               </a:ext>
             </a:extLst>
           </p:cNvPr>
@@ -6798,7 +6814,7 @@
           <p:cNvPr id="27" name="矩形 26">
             <a:extLst>
               <a:ext uri="{FF2B5EF4-FFF2-40B4-BE49-F238E27FC236}">
-                <a16:creationId xmlns:a16="http://schemas.microsoft.com/office/drawing/2014/main" id="{7AD38B86-4358-F19D-DC78-48B0A3114938}"/>
+                <a16:creationId xmlns:a16="http://schemas.microsoft.com/office/drawing/2014/main" id="{59D06E8D-321B-13DA-F9BD-364D9286046F}"/>
               </a:ext>
             </a:extLst>
           </p:cNvPr>
@@ -6866,7 +6882,7 @@
           <p:cNvPr id="28" name="矩形 27">
             <a:extLst>
               <a:ext uri="{FF2B5EF4-FFF2-40B4-BE49-F238E27FC236}">
-                <a16:creationId xmlns:a16="http://schemas.microsoft.com/office/drawing/2014/main" id="{F745A8F8-898B-FA8F-6407-35B811E234B5}"/>
+                <a16:creationId xmlns:a16="http://schemas.microsoft.com/office/drawing/2014/main" id="{DB3AC7A0-24DB-D4B1-9389-03E9A9120E20}"/>
               </a:ext>
             </a:extLst>
           </p:cNvPr>
@@ -6934,7 +6950,7 @@
           <p:cNvPr id="29" name="矩形 28">
             <a:extLst>
               <a:ext uri="{FF2B5EF4-FFF2-40B4-BE49-F238E27FC236}">
-                <a16:creationId xmlns:a16="http://schemas.microsoft.com/office/drawing/2014/main" id="{9B66B104-4C81-6DCC-978C-22EA061D5A62}"/>
+                <a16:creationId xmlns:a16="http://schemas.microsoft.com/office/drawing/2014/main" id="{C75A327E-91B4-7AE4-FEE5-38322C3B5E4F}"/>
               </a:ext>
             </a:extLst>
           </p:cNvPr>
@@ -7002,7 +7018,7 @@
           <p:cNvPr id="30" name="矩形 29">
             <a:extLst>
               <a:ext uri="{FF2B5EF4-FFF2-40B4-BE49-F238E27FC236}">
-                <a16:creationId xmlns:a16="http://schemas.microsoft.com/office/drawing/2014/main" id="{99D51051-C5F4-298B-9A87-6FFF60398DC4}"/>
+                <a16:creationId xmlns:a16="http://schemas.microsoft.com/office/drawing/2014/main" id="{0891CC1A-9336-1628-036B-A288870E14A3}"/>
               </a:ext>
             </a:extLst>
           </p:cNvPr>
@@ -7070,7 +7086,7 @@
           <p:cNvPr id="31" name="矩形 30">
             <a:extLst>
               <a:ext uri="{FF2B5EF4-FFF2-40B4-BE49-F238E27FC236}">
-                <a16:creationId xmlns:a16="http://schemas.microsoft.com/office/drawing/2014/main" id="{AFE35FF0-84D8-8AB5-CCA7-8EC76A5A3983}"/>
+                <a16:creationId xmlns:a16="http://schemas.microsoft.com/office/drawing/2014/main" id="{DDEAE5FF-A5F0-21E0-33AB-29344BA3D399}"/>
               </a:ext>
             </a:extLst>
           </p:cNvPr>
@@ -7138,7 +7154,7 @@
           <p:cNvPr id="32" name="矩形 31">
             <a:extLst>
               <a:ext uri="{FF2B5EF4-FFF2-40B4-BE49-F238E27FC236}">
-                <a16:creationId xmlns:a16="http://schemas.microsoft.com/office/drawing/2014/main" id="{DC201618-592E-7079-A578-FFB1830374EE}"/>
+                <a16:creationId xmlns:a16="http://schemas.microsoft.com/office/drawing/2014/main" id="{009F9B3E-FBED-470C-37CB-4266B42601A5}"/>
               </a:ext>
             </a:extLst>
           </p:cNvPr>
@@ -7206,7 +7222,7 @@
           <p:cNvPr id="33" name="矩形 32">
             <a:extLst>
               <a:ext uri="{FF2B5EF4-FFF2-40B4-BE49-F238E27FC236}">
-                <a16:creationId xmlns:a16="http://schemas.microsoft.com/office/drawing/2014/main" id="{92FFB23D-BB80-054F-60C3-EA36F86CE6E3}"/>
+                <a16:creationId xmlns:a16="http://schemas.microsoft.com/office/drawing/2014/main" id="{A2122DD8-5018-AFD7-D526-AD6500835600}"/>
               </a:ext>
             </a:extLst>
           </p:cNvPr>
@@ -7274,7 +7290,7 @@
           <p:cNvPr id="34" name="矩形 33">
             <a:extLst>
               <a:ext uri="{FF2B5EF4-FFF2-40B4-BE49-F238E27FC236}">
-                <a16:creationId xmlns:a16="http://schemas.microsoft.com/office/drawing/2014/main" id="{0ECA47E4-D25B-BEB9-7DD7-E2387125738B}"/>
+                <a16:creationId xmlns:a16="http://schemas.microsoft.com/office/drawing/2014/main" id="{F5EAC040-573E-675C-CDE6-647D625E5220}"/>
               </a:ext>
             </a:extLst>
           </p:cNvPr>
@@ -7342,7 +7358,7 @@
           <p:cNvPr id="35" name="矩形 34">
             <a:extLst>
               <a:ext uri="{FF2B5EF4-FFF2-40B4-BE49-F238E27FC236}">
-                <a16:creationId xmlns:a16="http://schemas.microsoft.com/office/drawing/2014/main" id="{3789FF22-3C2A-210D-A0FB-7FEC8F4CA3B6}"/>
+                <a16:creationId xmlns:a16="http://schemas.microsoft.com/office/drawing/2014/main" id="{3C78ABF4-B0B5-0582-9889-ABEF789D7F7F}"/>
               </a:ext>
             </a:extLst>
           </p:cNvPr>
@@ -7410,7 +7426,7 @@
           <p:cNvPr id="36" name="矩形 35">
             <a:extLst>
               <a:ext uri="{FF2B5EF4-FFF2-40B4-BE49-F238E27FC236}">
-                <a16:creationId xmlns:a16="http://schemas.microsoft.com/office/drawing/2014/main" id="{91855BCD-E42F-E77C-F73C-4325B57E5421}"/>
+                <a16:creationId xmlns:a16="http://schemas.microsoft.com/office/drawing/2014/main" id="{FB67C6A5-FD7B-F17C-26E8-57F013A34B74}"/>
               </a:ext>
             </a:extLst>
           </p:cNvPr>
@@ -7478,7 +7494,7 @@
           <p:cNvPr id="37" name="矩形 36">
             <a:extLst>
               <a:ext uri="{FF2B5EF4-FFF2-40B4-BE49-F238E27FC236}">
-                <a16:creationId xmlns:a16="http://schemas.microsoft.com/office/drawing/2014/main" id="{9686726C-E373-3CAD-7780-4A60E2DE78B0}"/>
+                <a16:creationId xmlns:a16="http://schemas.microsoft.com/office/drawing/2014/main" id="{0DD63FF9-CEFD-BB10-922F-9BF8A6403E58}"/>
               </a:ext>
             </a:extLst>
           </p:cNvPr>
@@ -7546,7 +7562,7 @@
           <p:cNvPr id="38" name="矩形 37">
             <a:extLst>
               <a:ext uri="{FF2B5EF4-FFF2-40B4-BE49-F238E27FC236}">
-                <a16:creationId xmlns:a16="http://schemas.microsoft.com/office/drawing/2014/main" id="{4A7AD53F-68D2-1425-E28D-B1064D63EB32}"/>
+                <a16:creationId xmlns:a16="http://schemas.microsoft.com/office/drawing/2014/main" id="{E6A49ECD-A3C7-9900-5B09-8A77AF3B8EFC}"/>
               </a:ext>
             </a:extLst>
           </p:cNvPr>
@@ -7614,7 +7630,7 @@
           <p:cNvPr id="39" name="矩形 38">
             <a:extLst>
               <a:ext uri="{FF2B5EF4-FFF2-40B4-BE49-F238E27FC236}">
-                <a16:creationId xmlns:a16="http://schemas.microsoft.com/office/drawing/2014/main" id="{A2B0F52D-4AA7-F135-33CA-F837787B1E85}"/>
+                <a16:creationId xmlns:a16="http://schemas.microsoft.com/office/drawing/2014/main" id="{A3964052-A231-8A3D-0405-33093C16DE63}"/>
               </a:ext>
             </a:extLst>
           </p:cNvPr>
@@ -7682,7 +7698,7 @@
           <p:cNvPr id="40" name="矩形 39">
             <a:extLst>
               <a:ext uri="{FF2B5EF4-FFF2-40B4-BE49-F238E27FC236}">
-                <a16:creationId xmlns:a16="http://schemas.microsoft.com/office/drawing/2014/main" id="{7E8B4D04-17C0-EC0B-6510-31AD9C7A5A92}"/>
+                <a16:creationId xmlns:a16="http://schemas.microsoft.com/office/drawing/2014/main" id="{6214B8DB-FB68-F0F3-30DD-C180896773D6}"/>
               </a:ext>
             </a:extLst>
           </p:cNvPr>
@@ -7750,7 +7766,7 @@
           <p:cNvPr id="41" name="矩形 40">
             <a:extLst>
               <a:ext uri="{FF2B5EF4-FFF2-40B4-BE49-F238E27FC236}">
-                <a16:creationId xmlns:a16="http://schemas.microsoft.com/office/drawing/2014/main" id="{7E7CBEB4-1F13-93BD-A138-C3E169A2B4EE}"/>
+                <a16:creationId xmlns:a16="http://schemas.microsoft.com/office/drawing/2014/main" id="{90CDA8B4-5446-041E-E88E-F3BBDEF52FBE}"/>
               </a:ext>
             </a:extLst>
           </p:cNvPr>
@@ -7818,7 +7834,7 @@
           <p:cNvPr id="42" name="矩形 41">
             <a:extLst>
               <a:ext uri="{FF2B5EF4-FFF2-40B4-BE49-F238E27FC236}">
-                <a16:creationId xmlns:a16="http://schemas.microsoft.com/office/drawing/2014/main" id="{06F9A140-A570-6B82-8D44-0F80D1A650C3}"/>
+                <a16:creationId xmlns:a16="http://schemas.microsoft.com/office/drawing/2014/main" id="{D89A462F-617B-023A-2A97-BD42D0479BE8}"/>
               </a:ext>
             </a:extLst>
           </p:cNvPr>
@@ -7886,7 +7902,7 @@
           <p:cNvPr id="43" name="矩形 42">
             <a:extLst>
               <a:ext uri="{FF2B5EF4-FFF2-40B4-BE49-F238E27FC236}">
-                <a16:creationId xmlns:a16="http://schemas.microsoft.com/office/drawing/2014/main" id="{2A53239D-C989-3DEA-E4EC-2E6B0F73A1A7}"/>
+                <a16:creationId xmlns:a16="http://schemas.microsoft.com/office/drawing/2014/main" id="{7B9F2DB1-EA87-A115-CA6C-3CCDB28F725F}"/>
               </a:ext>
             </a:extLst>
           </p:cNvPr>
@@ -7954,7 +7970,7 @@
           <p:cNvPr id="44" name="矩形 43">
             <a:extLst>
               <a:ext uri="{FF2B5EF4-FFF2-40B4-BE49-F238E27FC236}">
-                <a16:creationId xmlns:a16="http://schemas.microsoft.com/office/drawing/2014/main" id="{D4C8EAE2-0051-0833-4B69-BD567B71B1FF}"/>
+                <a16:creationId xmlns:a16="http://schemas.microsoft.com/office/drawing/2014/main" id="{31865D17-1A28-6986-E684-159B7C4A0D92}"/>
               </a:ext>
             </a:extLst>
           </p:cNvPr>
@@ -8022,7 +8038,7 @@
           <p:cNvPr id="45" name="矩形 44">
             <a:extLst>
               <a:ext uri="{FF2B5EF4-FFF2-40B4-BE49-F238E27FC236}">
-                <a16:creationId xmlns:a16="http://schemas.microsoft.com/office/drawing/2014/main" id="{FEB151E6-A10B-3A0A-7127-4EF8DC0E292C}"/>
+                <a16:creationId xmlns:a16="http://schemas.microsoft.com/office/drawing/2014/main" id="{FB638697-85B3-001E-0AED-343B6A58D5BB}"/>
               </a:ext>
             </a:extLst>
           </p:cNvPr>
@@ -8090,7 +8106,7 @@
           <p:cNvPr id="46" name="矩形 45">
             <a:extLst>
               <a:ext uri="{FF2B5EF4-FFF2-40B4-BE49-F238E27FC236}">
-                <a16:creationId xmlns:a16="http://schemas.microsoft.com/office/drawing/2014/main" id="{98D5EB28-B272-5E27-B690-03798BD23E88}"/>
+                <a16:creationId xmlns:a16="http://schemas.microsoft.com/office/drawing/2014/main" id="{2B447331-67C5-57C6-C06C-AEE77EAF3DDD}"/>
               </a:ext>
             </a:extLst>
           </p:cNvPr>
@@ -8158,7 +8174,7 @@
           <p:cNvPr id="47" name="矩形 46">
             <a:extLst>
               <a:ext uri="{FF2B5EF4-FFF2-40B4-BE49-F238E27FC236}">
-                <a16:creationId xmlns:a16="http://schemas.microsoft.com/office/drawing/2014/main" id="{221E43B5-C10E-654F-166B-94635B4104A2}"/>
+                <a16:creationId xmlns:a16="http://schemas.microsoft.com/office/drawing/2014/main" id="{4276B800-D7E7-0226-F351-81010A0D078C}"/>
               </a:ext>
             </a:extLst>
           </p:cNvPr>
@@ -8226,7 +8242,7 @@
           <p:cNvPr id="48" name="矩形 47">
             <a:extLst>
               <a:ext uri="{FF2B5EF4-FFF2-40B4-BE49-F238E27FC236}">
-                <a16:creationId xmlns:a16="http://schemas.microsoft.com/office/drawing/2014/main" id="{18618EBE-F56F-A028-5CB9-F0E43F9FEC74}"/>
+                <a16:creationId xmlns:a16="http://schemas.microsoft.com/office/drawing/2014/main" id="{52957D5F-3089-AF44-43E7-2A57E2E1BCF7}"/>
               </a:ext>
             </a:extLst>
           </p:cNvPr>
@@ -8294,7 +8310,7 @@
           <p:cNvPr id="49" name="矩形 48">
             <a:extLst>
               <a:ext uri="{FF2B5EF4-FFF2-40B4-BE49-F238E27FC236}">
-                <a16:creationId xmlns:a16="http://schemas.microsoft.com/office/drawing/2014/main" id="{0AF50398-15F1-E901-EBCE-F50983307798}"/>
+                <a16:creationId xmlns:a16="http://schemas.microsoft.com/office/drawing/2014/main" id="{FC05605D-D2E2-FAE0-3584-71BD33389779}"/>
               </a:ext>
             </a:extLst>
           </p:cNvPr>
@@ -8362,7 +8378,7 @@
           <p:cNvPr id="50" name="矩形 49">
             <a:extLst>
               <a:ext uri="{FF2B5EF4-FFF2-40B4-BE49-F238E27FC236}">
-                <a16:creationId xmlns:a16="http://schemas.microsoft.com/office/drawing/2014/main" id="{3C666C00-E4E1-2C59-5CD1-489CC86CEC87}"/>
+                <a16:creationId xmlns:a16="http://schemas.microsoft.com/office/drawing/2014/main" id="{DB664739-6063-6C82-B695-7924EDC63A03}"/>
               </a:ext>
             </a:extLst>
           </p:cNvPr>
@@ -8430,7 +8446,7 @@
           <p:cNvPr id="51" name="矩形 50">
             <a:extLst>
               <a:ext uri="{FF2B5EF4-FFF2-40B4-BE49-F238E27FC236}">
-                <a16:creationId xmlns:a16="http://schemas.microsoft.com/office/drawing/2014/main" id="{06978B90-E254-F66A-9008-350BC96E68C7}"/>
+                <a16:creationId xmlns:a16="http://schemas.microsoft.com/office/drawing/2014/main" id="{46E72134-504C-0BD0-FBD7-BCD6EF0089AB}"/>
               </a:ext>
             </a:extLst>
           </p:cNvPr>
@@ -8498,7 +8514,7 @@
           <p:cNvPr id="52" name="矩形 51">
             <a:extLst>
               <a:ext uri="{FF2B5EF4-FFF2-40B4-BE49-F238E27FC236}">
-                <a16:creationId xmlns:a16="http://schemas.microsoft.com/office/drawing/2014/main" id="{0D51D63A-2065-DAF7-E5C0-9F4C061B5F23}"/>
+                <a16:creationId xmlns:a16="http://schemas.microsoft.com/office/drawing/2014/main" id="{22EC13C8-0685-6FD3-6B03-42AD1752F007}"/>
               </a:ext>
             </a:extLst>
           </p:cNvPr>
@@ -8566,7 +8582,7 @@
           <p:cNvPr id="53" name="矩形 52">
             <a:extLst>
               <a:ext uri="{FF2B5EF4-FFF2-40B4-BE49-F238E27FC236}">
-                <a16:creationId xmlns:a16="http://schemas.microsoft.com/office/drawing/2014/main" id="{CF687F25-17F4-A07B-8E72-C2F4FEBC410F}"/>
+                <a16:creationId xmlns:a16="http://schemas.microsoft.com/office/drawing/2014/main" id="{A654980D-80B9-5871-446E-C7F8869FFCF8}"/>
               </a:ext>
             </a:extLst>
           </p:cNvPr>
@@ -8634,7 +8650,7 @@
           <p:cNvPr id="54" name="矩形 53">
             <a:extLst>
               <a:ext uri="{FF2B5EF4-FFF2-40B4-BE49-F238E27FC236}">
-                <a16:creationId xmlns:a16="http://schemas.microsoft.com/office/drawing/2014/main" id="{BCDF44C3-0926-1AC3-6C34-661643E11552}"/>
+                <a16:creationId xmlns:a16="http://schemas.microsoft.com/office/drawing/2014/main" id="{1D8F7D3D-4D0C-AD41-7795-9C59ACB06CE6}"/>
               </a:ext>
             </a:extLst>
           </p:cNvPr>
@@ -8702,7 +8718,7 @@
           <p:cNvPr id="55" name="文字方塊 54">
             <a:extLst>
               <a:ext uri="{FF2B5EF4-FFF2-40B4-BE49-F238E27FC236}">
-                <a16:creationId xmlns:a16="http://schemas.microsoft.com/office/drawing/2014/main" id="{AEF1920A-4B3F-2754-2F1E-9D20C967F47A}"/>
+                <a16:creationId xmlns:a16="http://schemas.microsoft.com/office/drawing/2014/main" id="{2F783319-8AA6-5DAB-1B74-C8E001C06BB8}"/>
               </a:ext>
             </a:extLst>
           </p:cNvPr>
@@ -8765,7 +8781,7 @@
     </p:spTree>
     <p:extLst>
       <p:ext uri="{BB962C8B-B14F-4D97-AF65-F5344CB8AC3E}">
-        <p14:creationId xmlns:p14="http://schemas.microsoft.com/office/powerpoint/2010/main" val="1141369907"/>
+        <p14:creationId xmlns:p14="http://schemas.microsoft.com/office/powerpoint/2010/main" val="1761528504"/>
       </p:ext>
     </p:extLst>
   </p:cSld>
@@ -8797,7 +8813,7 @@
           <p:cNvPr id="2" name="標題 1">
             <a:extLst>
               <a:ext uri="{FF2B5EF4-FFF2-40B4-BE49-F238E27FC236}">
-                <a16:creationId xmlns:a16="http://schemas.microsoft.com/office/drawing/2014/main" id="{ABED64A7-D993-49E2-BB71-88BA377DA03A}"/>
+                <a16:creationId xmlns:a16="http://schemas.microsoft.com/office/drawing/2014/main" id="{D073962B-3166-0765-E7F6-03CA02ABD779}"/>
               </a:ext>
             </a:extLst>
           </p:cNvPr>
@@ -8861,7 +8877,7 @@
           <p:cNvPr id="3" name="文字方塊 2">
             <a:extLst>
               <a:ext uri="{FF2B5EF4-FFF2-40B4-BE49-F238E27FC236}">
-                <a16:creationId xmlns:a16="http://schemas.microsoft.com/office/drawing/2014/main" id="{E7868E51-8C25-E817-0241-3A39937F818B}"/>
+                <a16:creationId xmlns:a16="http://schemas.microsoft.com/office/drawing/2014/main" id="{3C5A6FB5-EB4A-6B9F-CB3E-65AA80907CBC}"/>
               </a:ext>
             </a:extLst>
           </p:cNvPr>
@@ -8914,7 +8930,7 @@
           <p:cNvPr id="4" name="投影片編號版面配置區 3">
             <a:extLst>
               <a:ext uri="{FF2B5EF4-FFF2-40B4-BE49-F238E27FC236}">
-                <a16:creationId xmlns:a16="http://schemas.microsoft.com/office/drawing/2014/main" id="{459F072C-0E56-1CDA-0D92-6466CA18630B}"/>
+                <a16:creationId xmlns:a16="http://schemas.microsoft.com/office/drawing/2014/main" id="{610BD0FA-9B1C-7792-2566-27A25D3C9B22}"/>
               </a:ext>
             </a:extLst>
           </p:cNvPr>
@@ -8930,7 +8946,7 @@
           <a:bodyPr/>
           <a:lstStyle/>
           <a:p>
-            <a:fld id="{82E2CFFA-BCF7-4941-9F1D-DE24BA5E8539}" type="slidenum">
+            <a:fld id="{62F1B366-B12D-4E81-AEC3-117FBF7F511D}" type="slidenum">
               <a:rPr lang="zh-TW" altLang="en-US" smtClean="0"/>
               <a:t>10</a:t>
             </a:fld>
@@ -8943,7 +8959,7 @@
           <p:cNvPr id="5" name="直線單箭頭接點 4">
             <a:extLst>
               <a:ext uri="{FF2B5EF4-FFF2-40B4-BE49-F238E27FC236}">
-                <a16:creationId xmlns:a16="http://schemas.microsoft.com/office/drawing/2014/main" id="{09467AF2-FC30-6E2C-FD92-DB4D8EAE940C}"/>
+                <a16:creationId xmlns:a16="http://schemas.microsoft.com/office/drawing/2014/main" id="{AF4460C5-BA0A-D6C9-3423-4A5506F5C712}"/>
               </a:ext>
             </a:extLst>
           </p:cNvPr>
@@ -8984,7 +9000,7 @@
           <p:cNvPr id="6" name="橢圓 5">
             <a:extLst>
               <a:ext uri="{FF2B5EF4-FFF2-40B4-BE49-F238E27FC236}">
-                <a16:creationId xmlns:a16="http://schemas.microsoft.com/office/drawing/2014/main" id="{7952ADC2-E438-F6B6-4FCE-6A3EB33297DF}"/>
+                <a16:creationId xmlns:a16="http://schemas.microsoft.com/office/drawing/2014/main" id="{E2E87860-D5EE-D2EE-8B2E-4E41517A21B4}"/>
               </a:ext>
             </a:extLst>
           </p:cNvPr>
@@ -9070,7 +9086,7 @@
           <p:cNvPr id="7" name="文字方塊 6">
             <a:extLst>
               <a:ext uri="{FF2B5EF4-FFF2-40B4-BE49-F238E27FC236}">
-                <a16:creationId xmlns:a16="http://schemas.microsoft.com/office/drawing/2014/main" id="{CA3BA2F9-5683-CF84-2E6F-BF564C166345}"/>
+                <a16:creationId xmlns:a16="http://schemas.microsoft.com/office/drawing/2014/main" id="{6BD11C58-C328-AE97-92FD-91B8E98AF1A1}"/>
               </a:ext>
             </a:extLst>
           </p:cNvPr>
@@ -9156,7 +9172,7 @@
           <p:cNvPr id="8" name="直線單箭頭接點 7">
             <a:extLst>
               <a:ext uri="{FF2B5EF4-FFF2-40B4-BE49-F238E27FC236}">
-                <a16:creationId xmlns:a16="http://schemas.microsoft.com/office/drawing/2014/main" id="{58EEAFA1-7D64-5EAC-F473-48DC70DB21C5}"/>
+                <a16:creationId xmlns:a16="http://schemas.microsoft.com/office/drawing/2014/main" id="{BEFA74AF-4A43-8D70-FAB8-7468E0C561A6}"/>
               </a:ext>
             </a:extLst>
           </p:cNvPr>
@@ -9197,7 +9213,7 @@
           <p:cNvPr id="9" name="橢圓 8">
             <a:extLst>
               <a:ext uri="{FF2B5EF4-FFF2-40B4-BE49-F238E27FC236}">
-                <a16:creationId xmlns:a16="http://schemas.microsoft.com/office/drawing/2014/main" id="{C5C8DA99-FD15-1362-0E2E-60BF9931F47A}"/>
+                <a16:creationId xmlns:a16="http://schemas.microsoft.com/office/drawing/2014/main" id="{3F1D346E-8461-9806-DE65-EA3814AEE5F5}"/>
               </a:ext>
             </a:extLst>
           </p:cNvPr>
@@ -9283,7 +9299,7 @@
           <p:cNvPr id="10" name="文字方塊 9">
             <a:extLst>
               <a:ext uri="{FF2B5EF4-FFF2-40B4-BE49-F238E27FC236}">
-                <a16:creationId xmlns:a16="http://schemas.microsoft.com/office/drawing/2014/main" id="{88B00AB1-3781-9907-475C-B5E12BB27D63}"/>
+                <a16:creationId xmlns:a16="http://schemas.microsoft.com/office/drawing/2014/main" id="{6431F20A-7601-D33B-B880-B0FEA92AF4ED}"/>
               </a:ext>
             </a:extLst>
           </p:cNvPr>
@@ -9325,7 +9341,7 @@
           <p:cNvPr id="11" name="直線單箭頭接點 10">
             <a:extLst>
               <a:ext uri="{FF2B5EF4-FFF2-40B4-BE49-F238E27FC236}">
-                <a16:creationId xmlns:a16="http://schemas.microsoft.com/office/drawing/2014/main" id="{81AB9046-5737-AC93-8CB4-E0E96C6439D4}"/>
+                <a16:creationId xmlns:a16="http://schemas.microsoft.com/office/drawing/2014/main" id="{C7E6E51B-14E7-4B13-FDE7-A338E813E388}"/>
               </a:ext>
             </a:extLst>
           </p:cNvPr>
@@ -9366,7 +9382,7 @@
           <p:cNvPr id="12" name="橢圓 11">
             <a:extLst>
               <a:ext uri="{FF2B5EF4-FFF2-40B4-BE49-F238E27FC236}">
-                <a16:creationId xmlns:a16="http://schemas.microsoft.com/office/drawing/2014/main" id="{1ADEDA93-1B6F-4AEB-A6F8-3E56919D438E}"/>
+                <a16:creationId xmlns:a16="http://schemas.microsoft.com/office/drawing/2014/main" id="{DC44C75D-DD84-9698-E92A-2E95FD13D711}"/>
               </a:ext>
             </a:extLst>
           </p:cNvPr>
@@ -9452,7 +9468,7 @@
           <p:cNvPr id="13" name="文字方塊 12">
             <a:extLst>
               <a:ext uri="{FF2B5EF4-FFF2-40B4-BE49-F238E27FC236}">
-                <a16:creationId xmlns:a16="http://schemas.microsoft.com/office/drawing/2014/main" id="{A9551228-EF0C-EE9C-3576-05E04506875A}"/>
+                <a16:creationId xmlns:a16="http://schemas.microsoft.com/office/drawing/2014/main" id="{BBF2956D-B02C-8B89-F063-F8961212CC31}"/>
               </a:ext>
             </a:extLst>
           </p:cNvPr>
@@ -9494,7 +9510,7 @@
           <p:cNvPr id="14" name="直線單箭頭接點 13">
             <a:extLst>
               <a:ext uri="{FF2B5EF4-FFF2-40B4-BE49-F238E27FC236}">
-                <a16:creationId xmlns:a16="http://schemas.microsoft.com/office/drawing/2014/main" id="{7BDC8D73-B148-CFFA-045A-9D0BC7787E51}"/>
+                <a16:creationId xmlns:a16="http://schemas.microsoft.com/office/drawing/2014/main" id="{BEBB1090-B3B8-1D07-2432-0ADA1F217DF3}"/>
               </a:ext>
             </a:extLst>
           </p:cNvPr>
@@ -9535,7 +9551,7 @@
           <p:cNvPr id="15" name="橢圓 14">
             <a:extLst>
               <a:ext uri="{FF2B5EF4-FFF2-40B4-BE49-F238E27FC236}">
-                <a16:creationId xmlns:a16="http://schemas.microsoft.com/office/drawing/2014/main" id="{526355C9-43B6-C4B1-B0B1-7399652CAC2F}"/>
+                <a16:creationId xmlns:a16="http://schemas.microsoft.com/office/drawing/2014/main" id="{2C54416E-51FA-9BE6-0DB7-85373F8D7894}"/>
               </a:ext>
             </a:extLst>
           </p:cNvPr>
@@ -9621,7 +9637,7 @@
           <p:cNvPr id="16" name="文字方塊 15">
             <a:extLst>
               <a:ext uri="{FF2B5EF4-FFF2-40B4-BE49-F238E27FC236}">
-                <a16:creationId xmlns:a16="http://schemas.microsoft.com/office/drawing/2014/main" id="{F202C0D1-F5BA-D6AB-74CF-A42BF2E91403}"/>
+                <a16:creationId xmlns:a16="http://schemas.microsoft.com/office/drawing/2014/main" id="{DA939358-4F32-8693-A50B-5045C6B9BC9A}"/>
               </a:ext>
             </a:extLst>
           </p:cNvPr>
@@ -9704,7 +9720,7 @@
           <p:cNvPr id="17" name="橢圓 16">
             <a:extLst>
               <a:ext uri="{FF2B5EF4-FFF2-40B4-BE49-F238E27FC236}">
-                <a16:creationId xmlns:a16="http://schemas.microsoft.com/office/drawing/2014/main" id="{EAB78770-EDF4-F17D-12CC-5FF636DBE01F}"/>
+                <a16:creationId xmlns:a16="http://schemas.microsoft.com/office/drawing/2014/main" id="{62EBFB49-BD40-1F67-8FD5-7F86E27E5C69}"/>
               </a:ext>
             </a:extLst>
           </p:cNvPr>
@@ -9790,7 +9806,7 @@
           <p:cNvPr id="18" name="文字方塊 17">
             <a:extLst>
               <a:ext uri="{FF2B5EF4-FFF2-40B4-BE49-F238E27FC236}">
-                <a16:creationId xmlns:a16="http://schemas.microsoft.com/office/drawing/2014/main" id="{39C8293A-79E8-6A5A-9176-35E514B11419}"/>
+                <a16:creationId xmlns:a16="http://schemas.microsoft.com/office/drawing/2014/main" id="{DF2443CF-C36D-331A-01F2-69872CF21669}"/>
               </a:ext>
             </a:extLst>
           </p:cNvPr>
@@ -9854,7 +9870,7 @@
           <p:cNvPr id="19" name="矩形: 圓角 18">
             <a:extLst>
               <a:ext uri="{FF2B5EF4-FFF2-40B4-BE49-F238E27FC236}">
-                <a16:creationId xmlns:a16="http://schemas.microsoft.com/office/drawing/2014/main" id="{9E8340F4-2300-3E6A-1FE0-A4CE60DDD6B5}"/>
+                <a16:creationId xmlns:a16="http://schemas.microsoft.com/office/drawing/2014/main" id="{69E3F86A-6D9E-2758-924A-1216CD95244B}"/>
               </a:ext>
             </a:extLst>
           </p:cNvPr>
@@ -9910,7 +9926,7 @@
           <p:cNvPr id="20" name="文字方塊 19">
             <a:extLst>
               <a:ext uri="{FF2B5EF4-FFF2-40B4-BE49-F238E27FC236}">
-                <a16:creationId xmlns:a16="http://schemas.microsoft.com/office/drawing/2014/main" id="{1A35805A-2509-2704-3917-31CAE1F8C088}"/>
+                <a16:creationId xmlns:a16="http://schemas.microsoft.com/office/drawing/2014/main" id="{488E473D-0C99-AC93-9AFC-CB40B4251741}"/>
               </a:ext>
             </a:extLst>
           </p:cNvPr>
@@ -9952,7 +9968,7 @@
           <p:cNvPr id="21" name="文字方塊 20">
             <a:extLst>
               <a:ext uri="{FF2B5EF4-FFF2-40B4-BE49-F238E27FC236}">
-                <a16:creationId xmlns:a16="http://schemas.microsoft.com/office/drawing/2014/main" id="{92CD9996-2979-D1CE-17A1-F4A4F18DC834}"/>
+                <a16:creationId xmlns:a16="http://schemas.microsoft.com/office/drawing/2014/main" id="{EC744765-DA11-6277-1705-6BF39CCB37D1}"/>
               </a:ext>
             </a:extLst>
           </p:cNvPr>
@@ -10049,7 +10065,7 @@
           <p:cNvPr id="22" name="文字方塊 21">
             <a:extLst>
               <a:ext uri="{FF2B5EF4-FFF2-40B4-BE49-F238E27FC236}">
-                <a16:creationId xmlns:a16="http://schemas.microsoft.com/office/drawing/2014/main" id="{0CE4A3DF-BFFD-1B60-DD6C-A3F2B0AECD31}"/>
+                <a16:creationId xmlns:a16="http://schemas.microsoft.com/office/drawing/2014/main" id="{FF8894FC-77FA-886B-7118-976B28492630}"/>
               </a:ext>
             </a:extLst>
           </p:cNvPr>
@@ -10102,7 +10118,7 @@
           <p:cNvPr id="23" name="表格 22">
             <a:extLst>
               <a:ext uri="{FF2B5EF4-FFF2-40B4-BE49-F238E27FC236}">
-                <a16:creationId xmlns:a16="http://schemas.microsoft.com/office/drawing/2014/main" id="{B74C0650-AA77-FCBE-EE13-AF25D0EE7309}"/>
+                <a16:creationId xmlns:a16="http://schemas.microsoft.com/office/drawing/2014/main" id="{F6874958-9112-0AB7-53E1-602489543268}"/>
               </a:ext>
             </a:extLst>
           </p:cNvPr>
@@ -10112,7 +10128,7 @@
           <p:nvPr>
             <p:extLst>
               <p:ext uri="{D42A27DB-BD31-4B8C-83A1-F6EECF244321}">
-                <p14:modId xmlns:p14="http://schemas.microsoft.com/office/powerpoint/2010/main" val="2110371866"/>
+                <p14:modId xmlns:p14="http://schemas.microsoft.com/office/powerpoint/2010/main" val="3056420769"/>
               </p:ext>
             </p:extLst>
           </p:nvPr>
@@ -10131,28 +10147,28 @@
                 <a:gridCol w="711200">
                   <a:extLst>
                     <a:ext uri="{9D8B030D-6E8A-4147-A177-3AD203B41FA5}">
-                      <a16:colId xmlns:a16="http://schemas.microsoft.com/office/drawing/2014/main" val="2220101021"/>
+                      <a16:colId xmlns:a16="http://schemas.microsoft.com/office/drawing/2014/main" val="633488303"/>
                     </a:ext>
                   </a:extLst>
                 </a:gridCol>
                 <a:gridCol w="1905000">
                   <a:extLst>
                     <a:ext uri="{9D8B030D-6E8A-4147-A177-3AD203B41FA5}">
-                      <a16:colId xmlns:a16="http://schemas.microsoft.com/office/drawing/2014/main" val="4026022884"/>
+                      <a16:colId xmlns:a16="http://schemas.microsoft.com/office/drawing/2014/main" val="4072263107"/>
                     </a:ext>
                   </a:extLst>
                 </a:gridCol>
                 <a:gridCol w="1270000">
                   <a:extLst>
                     <a:ext uri="{9D8B030D-6E8A-4147-A177-3AD203B41FA5}">
-                      <a16:colId xmlns:a16="http://schemas.microsoft.com/office/drawing/2014/main" val="1752957488"/>
+                      <a16:colId xmlns:a16="http://schemas.microsoft.com/office/drawing/2014/main" val="3911749659"/>
                     </a:ext>
                   </a:extLst>
                 </a:gridCol>
                 <a:gridCol w="838200">
                   <a:extLst>
                     <a:ext uri="{9D8B030D-6E8A-4147-A177-3AD203B41FA5}">
-                      <a16:colId xmlns:a16="http://schemas.microsoft.com/office/drawing/2014/main" val="3392093857"/>
+                      <a16:colId xmlns:a16="http://schemas.microsoft.com/office/drawing/2014/main" val="2084786967"/>
                     </a:ext>
                   </a:extLst>
                 </a:gridCol>
@@ -10256,7 +10272,7 @@
                 </a:tc>
                 <a:extLst>
                   <a:ext uri="{0D108BD9-81ED-4DB2-BD59-A6C34878D82A}">
-                    <a16:rowId xmlns:a16="http://schemas.microsoft.com/office/drawing/2014/main" val="1921182210"/>
+                    <a16:rowId xmlns:a16="http://schemas.microsoft.com/office/drawing/2014/main" val="3723169291"/>
                   </a:ext>
                 </a:extLst>
               </a:tr>
@@ -10397,7 +10413,7 @@
                 </a:tc>
                 <a:extLst>
                   <a:ext uri="{0D108BD9-81ED-4DB2-BD59-A6C34878D82A}">
-                    <a16:rowId xmlns:a16="http://schemas.microsoft.com/office/drawing/2014/main" val="504514556"/>
+                    <a16:rowId xmlns:a16="http://schemas.microsoft.com/office/drawing/2014/main" val="3370922928"/>
                   </a:ext>
                 </a:extLst>
               </a:tr>
@@ -10527,7 +10543,7 @@
                 </a:tc>
                 <a:extLst>
                   <a:ext uri="{0D108BD9-81ED-4DB2-BD59-A6C34878D82A}">
-                    <a16:rowId xmlns:a16="http://schemas.microsoft.com/office/drawing/2014/main" val="1669464679"/>
+                    <a16:rowId xmlns:a16="http://schemas.microsoft.com/office/drawing/2014/main" val="2296547038"/>
                   </a:ext>
                 </a:extLst>
               </a:tr>
@@ -10540,7 +10556,7 @@
           <p:cNvPr id="24" name="矩形: 圓角 23">
             <a:extLst>
               <a:ext uri="{FF2B5EF4-FFF2-40B4-BE49-F238E27FC236}">
-                <a16:creationId xmlns:a16="http://schemas.microsoft.com/office/drawing/2014/main" id="{9D250332-7071-E339-8537-C808CCBF1249}"/>
+                <a16:creationId xmlns:a16="http://schemas.microsoft.com/office/drawing/2014/main" id="{B11F9DB2-71AC-D714-A679-1213182C7FB2}"/>
               </a:ext>
             </a:extLst>
           </p:cNvPr>
@@ -10645,7 +10661,7 @@
           <p:cNvPr id="25" name="矩形: 圓角 24">
             <a:extLst>
               <a:ext uri="{FF2B5EF4-FFF2-40B4-BE49-F238E27FC236}">
-                <a16:creationId xmlns:a16="http://schemas.microsoft.com/office/drawing/2014/main" id="{1E8813F6-688C-A340-93E6-254BBCAFA3DC}"/>
+                <a16:creationId xmlns:a16="http://schemas.microsoft.com/office/drawing/2014/main" id="{EFDCBFE5-187D-A78B-77D4-31D22242FC62}"/>
               </a:ext>
             </a:extLst>
           </p:cNvPr>
@@ -10781,7 +10797,7 @@
     </p:spTree>
     <p:extLst>
       <p:ext uri="{BB962C8B-B14F-4D97-AF65-F5344CB8AC3E}">
-        <p14:creationId xmlns:p14="http://schemas.microsoft.com/office/powerpoint/2010/main" val="4022540733"/>
+        <p14:creationId xmlns:p14="http://schemas.microsoft.com/office/powerpoint/2010/main" val="797446283"/>
       </p:ext>
     </p:extLst>
   </p:cSld>
@@ -10813,7 +10829,7 @@
           <p:cNvPr id="2" name="標題 1">
             <a:extLst>
               <a:ext uri="{FF2B5EF4-FFF2-40B4-BE49-F238E27FC236}">
-                <a16:creationId xmlns:a16="http://schemas.microsoft.com/office/drawing/2014/main" id="{861CE8C1-21EE-6F07-895B-52A8018A530F}"/>
+                <a16:creationId xmlns:a16="http://schemas.microsoft.com/office/drawing/2014/main" id="{B8104860-B2BA-FCF9-5750-07F7EBB816D7}"/>
               </a:ext>
             </a:extLst>
           </p:cNvPr>
@@ -10855,7 +10871,7 @@
           <p:cNvPr id="3" name="文字方塊 2">
             <a:extLst>
               <a:ext uri="{FF2B5EF4-FFF2-40B4-BE49-F238E27FC236}">
-                <a16:creationId xmlns:a16="http://schemas.microsoft.com/office/drawing/2014/main" id="{FC179E0C-D885-C866-62E6-80535B625EBE}"/>
+                <a16:creationId xmlns:a16="http://schemas.microsoft.com/office/drawing/2014/main" id="{14931229-D628-583F-D8A6-44F6B2B6C244}"/>
               </a:ext>
             </a:extLst>
           </p:cNvPr>
@@ -10908,7 +10924,7 @@
           <p:cNvPr id="4" name="投影片編號版面配置區 3">
             <a:extLst>
               <a:ext uri="{FF2B5EF4-FFF2-40B4-BE49-F238E27FC236}">
-                <a16:creationId xmlns:a16="http://schemas.microsoft.com/office/drawing/2014/main" id="{096B3F9A-192D-A02B-E820-6B78AE18CD62}"/>
+                <a16:creationId xmlns:a16="http://schemas.microsoft.com/office/drawing/2014/main" id="{76D98DE0-1332-8EF5-567E-30BD88C0CE9B}"/>
               </a:ext>
             </a:extLst>
           </p:cNvPr>
@@ -10924,7 +10940,7 @@
           <a:bodyPr/>
           <a:lstStyle/>
           <a:p>
-            <a:fld id="{82E2CFFA-BCF7-4941-9F1D-DE24BA5E8539}" type="slidenum">
+            <a:fld id="{62F1B366-B12D-4E81-AEC3-117FBF7F511D}" type="slidenum">
               <a:rPr lang="zh-TW" altLang="en-US" smtClean="0"/>
               <a:t>11</a:t>
             </a:fld>
@@ -10937,7 +10953,7 @@
           <p:cNvPr id="5" name="矩形: 圓角 4">
             <a:extLst>
               <a:ext uri="{FF2B5EF4-FFF2-40B4-BE49-F238E27FC236}">
-                <a16:creationId xmlns:a16="http://schemas.microsoft.com/office/drawing/2014/main" id="{4A89025C-90EC-0BAA-F5EC-93681C258679}"/>
+                <a16:creationId xmlns:a16="http://schemas.microsoft.com/office/drawing/2014/main" id="{F639C447-263B-3435-DDF9-424E14F76F7A}"/>
               </a:ext>
             </a:extLst>
           </p:cNvPr>
@@ -11007,7 +11023,7 @@
           <p:cNvPr id="6" name="文字方塊 5">
             <a:extLst>
               <a:ext uri="{FF2B5EF4-FFF2-40B4-BE49-F238E27FC236}">
-                <a16:creationId xmlns:a16="http://schemas.microsoft.com/office/drawing/2014/main" id="{AD72AC83-7CDC-49F4-398B-2BD3964506BD}"/>
+                <a16:creationId xmlns:a16="http://schemas.microsoft.com/office/drawing/2014/main" id="{542ACB1F-2F51-B65C-B0B9-A88286689027}"/>
               </a:ext>
             </a:extLst>
           </p:cNvPr>
@@ -11576,7 +11592,7 @@
           <p:cNvPr id="7" name="文字方塊 6">
             <a:extLst>
               <a:ext uri="{FF2B5EF4-FFF2-40B4-BE49-F238E27FC236}">
-                <a16:creationId xmlns:a16="http://schemas.microsoft.com/office/drawing/2014/main" id="{C868C986-9045-4CC8-9DEE-E6DFCB59B7CC}"/>
+                <a16:creationId xmlns:a16="http://schemas.microsoft.com/office/drawing/2014/main" id="{7EF9900B-36E6-EA9D-0CEF-306501F7D5E7}"/>
               </a:ext>
             </a:extLst>
           </p:cNvPr>
@@ -11640,7 +11656,7 @@
           <p:cNvPr id="8" name="箭號: ＞形 7">
             <a:extLst>
               <a:ext uri="{FF2B5EF4-FFF2-40B4-BE49-F238E27FC236}">
-                <a16:creationId xmlns:a16="http://schemas.microsoft.com/office/drawing/2014/main" id="{7DC1EE51-BCEB-0002-1835-887D376C3897}"/>
+                <a16:creationId xmlns:a16="http://schemas.microsoft.com/office/drawing/2014/main" id="{5D2860E3-A2D5-6047-2B6B-351D1993D78F}"/>
               </a:ext>
             </a:extLst>
           </p:cNvPr>
@@ -11737,7 +11753,7 @@
           <p:cNvPr id="9" name="箭號: ＞形 8">
             <a:extLst>
               <a:ext uri="{FF2B5EF4-FFF2-40B4-BE49-F238E27FC236}">
-                <a16:creationId xmlns:a16="http://schemas.microsoft.com/office/drawing/2014/main" id="{748DE849-7CE9-7F6D-04D4-4E6606819D39}"/>
+                <a16:creationId xmlns:a16="http://schemas.microsoft.com/office/drawing/2014/main" id="{B8AAEADD-FC1A-D3DD-C399-812133731C4D}"/>
               </a:ext>
             </a:extLst>
           </p:cNvPr>
@@ -11823,7 +11839,7 @@
           <p:cNvPr id="10" name="箭號: ＞形 9">
             <a:extLst>
               <a:ext uri="{FF2B5EF4-FFF2-40B4-BE49-F238E27FC236}">
-                <a16:creationId xmlns:a16="http://schemas.microsoft.com/office/drawing/2014/main" id="{8CB796B0-B58B-74C3-F817-65C9CB8EAF1E}"/>
+                <a16:creationId xmlns:a16="http://schemas.microsoft.com/office/drawing/2014/main" id="{25F8711E-416D-8165-DD1B-8F29606BA945}"/>
               </a:ext>
             </a:extLst>
           </p:cNvPr>
@@ -11912,7 +11928,7 @@
           <p:cNvPr id="11" name="文字方塊 10">
             <a:extLst>
               <a:ext uri="{FF2B5EF4-FFF2-40B4-BE49-F238E27FC236}">
-                <a16:creationId xmlns:a16="http://schemas.microsoft.com/office/drawing/2014/main" id="{A6506BE3-98F4-7479-25D8-B2B1BE6FEAF7}"/>
+                <a16:creationId xmlns:a16="http://schemas.microsoft.com/office/drawing/2014/main" id="{CB679EBC-A930-F67A-4E73-10602D1C469D}"/>
               </a:ext>
             </a:extLst>
           </p:cNvPr>
@@ -11954,7 +11970,7 @@
           <p:cNvPr id="12" name="箭號: ＞形 11">
             <a:extLst>
               <a:ext uri="{FF2B5EF4-FFF2-40B4-BE49-F238E27FC236}">
-                <a16:creationId xmlns:a16="http://schemas.microsoft.com/office/drawing/2014/main" id="{0D14E5D6-096B-05CD-D934-31210BFAF809}"/>
+                <a16:creationId xmlns:a16="http://schemas.microsoft.com/office/drawing/2014/main" id="{3FC21BE9-FFCC-535C-91D6-CBAE87DD1557}"/>
               </a:ext>
             </a:extLst>
           </p:cNvPr>
@@ -12032,7 +12048,7 @@
           <p:cNvPr id="13" name="箭號: ＞形 12">
             <a:extLst>
               <a:ext uri="{FF2B5EF4-FFF2-40B4-BE49-F238E27FC236}">
-                <a16:creationId xmlns:a16="http://schemas.microsoft.com/office/drawing/2014/main" id="{66E8A6D4-0C54-C7BD-3188-0EDF54CD63CE}"/>
+                <a16:creationId xmlns:a16="http://schemas.microsoft.com/office/drawing/2014/main" id="{56754366-1F69-BCFB-048E-6068DD70B5A0}"/>
               </a:ext>
             </a:extLst>
           </p:cNvPr>
@@ -12129,7 +12145,7 @@
           <p:cNvPr id="14" name="箭號: ＞形 13">
             <a:extLst>
               <a:ext uri="{FF2B5EF4-FFF2-40B4-BE49-F238E27FC236}">
-                <a16:creationId xmlns:a16="http://schemas.microsoft.com/office/drawing/2014/main" id="{A0B81418-0F81-BBF6-29BC-4266186A3414}"/>
+                <a16:creationId xmlns:a16="http://schemas.microsoft.com/office/drawing/2014/main" id="{B420CE28-29AA-A736-052C-CA656B037539}"/>
               </a:ext>
             </a:extLst>
           </p:cNvPr>
@@ -12207,7 +12223,7 @@
           <p:cNvPr id="15" name="矩形: 圓角 14">
             <a:extLst>
               <a:ext uri="{FF2B5EF4-FFF2-40B4-BE49-F238E27FC236}">
-                <a16:creationId xmlns:a16="http://schemas.microsoft.com/office/drawing/2014/main" id="{376D355C-11BD-1AD0-AF5F-2D5CE9FA6A25}"/>
+                <a16:creationId xmlns:a16="http://schemas.microsoft.com/office/drawing/2014/main" id="{5F990287-7006-B749-1882-3C0086C75A5F}"/>
               </a:ext>
             </a:extLst>
           </p:cNvPr>
@@ -12341,7 +12357,7 @@
     </p:spTree>
     <p:extLst>
       <p:ext uri="{BB962C8B-B14F-4D97-AF65-F5344CB8AC3E}">
-        <p14:creationId xmlns:p14="http://schemas.microsoft.com/office/powerpoint/2010/main" val="722897624"/>
+        <p14:creationId xmlns:p14="http://schemas.microsoft.com/office/powerpoint/2010/main" val="3774436760"/>
       </p:ext>
     </p:extLst>
   </p:cSld>
@@ -12373,7 +12389,7 @@
           <p:cNvPr id="2" name="標題 1">
             <a:extLst>
               <a:ext uri="{FF2B5EF4-FFF2-40B4-BE49-F238E27FC236}">
-                <a16:creationId xmlns:a16="http://schemas.microsoft.com/office/drawing/2014/main" id="{0BB704BF-0F70-46E7-88F4-FFED229FFAE6}"/>
+                <a16:creationId xmlns:a16="http://schemas.microsoft.com/office/drawing/2014/main" id="{D79C414E-88F9-F99A-0792-75D56A2C420E}"/>
               </a:ext>
             </a:extLst>
           </p:cNvPr>
@@ -12415,7 +12431,7 @@
           <p:cNvPr id="3" name="文字方塊 2">
             <a:extLst>
               <a:ext uri="{FF2B5EF4-FFF2-40B4-BE49-F238E27FC236}">
-                <a16:creationId xmlns:a16="http://schemas.microsoft.com/office/drawing/2014/main" id="{FCABC8BE-8844-6BBE-0C86-75575704E8CE}"/>
+                <a16:creationId xmlns:a16="http://schemas.microsoft.com/office/drawing/2014/main" id="{4B894E24-B149-232E-BD82-DA5BE6491D5E}"/>
               </a:ext>
             </a:extLst>
           </p:cNvPr>
@@ -12468,7 +12484,7 @@
           <p:cNvPr id="4" name="投影片編號版面配置區 3">
             <a:extLst>
               <a:ext uri="{FF2B5EF4-FFF2-40B4-BE49-F238E27FC236}">
-                <a16:creationId xmlns:a16="http://schemas.microsoft.com/office/drawing/2014/main" id="{C7088AD6-1E8F-D0E2-6D2B-0817A819BDE4}"/>
+                <a16:creationId xmlns:a16="http://schemas.microsoft.com/office/drawing/2014/main" id="{CB526D9E-DFCC-319B-F122-2085EAFE3EF6}"/>
               </a:ext>
             </a:extLst>
           </p:cNvPr>
@@ -12484,7 +12500,7 @@
           <a:bodyPr/>
           <a:lstStyle/>
           <a:p>
-            <a:fld id="{82E2CFFA-BCF7-4941-9F1D-DE24BA5E8539}" type="slidenum">
+            <a:fld id="{62F1B366-B12D-4E81-AEC3-117FBF7F511D}" type="slidenum">
               <a:rPr lang="zh-TW" altLang="en-US" smtClean="0"/>
               <a:t>12</a:t>
             </a:fld>
@@ -12497,7 +12513,7 @@
           <p:cNvPr id="5" name="矩形: 圓角 4">
             <a:extLst>
               <a:ext uri="{FF2B5EF4-FFF2-40B4-BE49-F238E27FC236}">
-                <a16:creationId xmlns:a16="http://schemas.microsoft.com/office/drawing/2014/main" id="{0A27CE94-9745-8296-CE7D-B7E0D1BBF32D}"/>
+                <a16:creationId xmlns:a16="http://schemas.microsoft.com/office/drawing/2014/main" id="{510CA361-0BD1-58CC-083C-A604B33C3B74}"/>
               </a:ext>
             </a:extLst>
           </p:cNvPr>
@@ -12567,7 +12583,7 @@
           <p:cNvPr id="6" name="橢圓 5">
             <a:extLst>
               <a:ext uri="{FF2B5EF4-FFF2-40B4-BE49-F238E27FC236}">
-                <a16:creationId xmlns:a16="http://schemas.microsoft.com/office/drawing/2014/main" id="{58929E89-F2B9-6648-207E-D573DAC7D5C3}"/>
+                <a16:creationId xmlns:a16="http://schemas.microsoft.com/office/drawing/2014/main" id="{3F0A43BC-997D-333D-7798-2D10E3ABC385}"/>
               </a:ext>
             </a:extLst>
           </p:cNvPr>
@@ -12653,7 +12669,7 @@
           <p:cNvPr id="7" name="文字方塊 6">
             <a:extLst>
               <a:ext uri="{FF2B5EF4-FFF2-40B4-BE49-F238E27FC236}">
-                <a16:creationId xmlns:a16="http://schemas.microsoft.com/office/drawing/2014/main" id="{ECD111D7-24E4-1033-F9B6-D2876AC67965}"/>
+                <a16:creationId xmlns:a16="http://schemas.microsoft.com/office/drawing/2014/main" id="{1220BC55-66A5-C99A-6A04-49618A72B382}"/>
               </a:ext>
             </a:extLst>
           </p:cNvPr>
@@ -12717,7 +12733,7 @@
           <p:cNvPr id="8" name="文字方塊 7">
             <a:extLst>
               <a:ext uri="{FF2B5EF4-FFF2-40B4-BE49-F238E27FC236}">
-                <a16:creationId xmlns:a16="http://schemas.microsoft.com/office/drawing/2014/main" id="{6E6AFC6C-A21E-30A7-2827-8F145A600A85}"/>
+                <a16:creationId xmlns:a16="http://schemas.microsoft.com/office/drawing/2014/main" id="{89F1D892-4E46-CC37-07BA-3808C512BE57}"/>
               </a:ext>
             </a:extLst>
           </p:cNvPr>
@@ -12749,7 +12765,7 @@
                 <a:ea typeface="Microsoft JhengHei" panose="020B0604030504040204" pitchFamily="34" charset="-120"/>
                 <a:sym typeface="Microsoft JhengHei" panose="020B0604030504040204" pitchFamily="34" charset="-120"/>
               </a:rPr>
-              <a:t>管理者金鑰存在 </a:t>
+              <a:t>管理者密碼存在 </a:t>
             </a:r>
             <a:r>
               <a:rPr lang="en-US" altLang="zh-TW" sz="1400">
@@ -12771,7 +12787,7 @@
                 <a:ea typeface="Microsoft JhengHei" panose="020B0604030504040204" pitchFamily="34" charset="-120"/>
                 <a:sym typeface="Microsoft JhengHei" panose="020B0604030504040204" pitchFamily="34" charset="-120"/>
               </a:rPr>
-              <a:t>的指令碼屬性，密碼與帳號資料都不進 </a:t>
+              <a:t>的指令碼屬性，帳號資料也都不進 </a:t>
             </a:r>
             <a:r>
               <a:rPr lang="en-US" altLang="zh-TW" sz="1400">
@@ -12847,7 +12863,7 @@
           <p:cNvPr id="9" name="矩形: 圓角 8">
             <a:extLst>
               <a:ext uri="{FF2B5EF4-FFF2-40B4-BE49-F238E27FC236}">
-                <a16:creationId xmlns:a16="http://schemas.microsoft.com/office/drawing/2014/main" id="{56D9348F-5BBB-0634-821E-16C2B1159E2E}"/>
+                <a16:creationId xmlns:a16="http://schemas.microsoft.com/office/drawing/2014/main" id="{138DCC75-89C0-10E9-146B-77954578EA34}"/>
               </a:ext>
             </a:extLst>
           </p:cNvPr>
@@ -12917,7 +12933,7 @@
           <p:cNvPr id="10" name="橢圓 9">
             <a:extLst>
               <a:ext uri="{FF2B5EF4-FFF2-40B4-BE49-F238E27FC236}">
-                <a16:creationId xmlns:a16="http://schemas.microsoft.com/office/drawing/2014/main" id="{F0ECEA4B-96FE-DE3A-B104-22804682BD85}"/>
+                <a16:creationId xmlns:a16="http://schemas.microsoft.com/office/drawing/2014/main" id="{88CFEE70-D561-1A0E-DC65-5C51274E78E2}"/>
               </a:ext>
             </a:extLst>
           </p:cNvPr>
@@ -13003,7 +13019,7 @@
           <p:cNvPr id="11" name="文字方塊 10">
             <a:extLst>
               <a:ext uri="{FF2B5EF4-FFF2-40B4-BE49-F238E27FC236}">
-                <a16:creationId xmlns:a16="http://schemas.microsoft.com/office/drawing/2014/main" id="{E4CBBE75-ED66-342C-2525-660F50A0AAD4}"/>
+                <a16:creationId xmlns:a16="http://schemas.microsoft.com/office/drawing/2014/main" id="{5AF309EB-4B9D-B4DA-CE32-E8E5B4E88FC0}"/>
               </a:ext>
             </a:extLst>
           </p:cNvPr>
@@ -13035,7 +13051,7 @@
                 <a:ea typeface="Microsoft JhengHei" panose="020B0604030504040204" pitchFamily="34" charset="-120"/>
                 <a:sym typeface="Microsoft JhengHei" panose="020B0604030504040204" pitchFamily="34" charset="-120"/>
               </a:rPr>
-              <a:t>管理功能需要金鑰</a:t>
+              <a:t>管理功能需要密碼</a:t>
             </a:r>
           </a:p>
         </p:txBody>
@@ -13045,7 +13061,7 @@
           <p:cNvPr id="12" name="文字方塊 11">
             <a:extLst>
               <a:ext uri="{FF2B5EF4-FFF2-40B4-BE49-F238E27FC236}">
-                <a16:creationId xmlns:a16="http://schemas.microsoft.com/office/drawing/2014/main" id="{99B0261F-8C1D-E25F-89AE-97A6A9F4BC01}"/>
+                <a16:creationId xmlns:a16="http://schemas.microsoft.com/office/drawing/2014/main" id="{3E6776FE-6CA5-BCD5-16C4-BAD61CB1E6BF}"/>
               </a:ext>
             </a:extLst>
           </p:cNvPr>
@@ -13077,7 +13093,7 @@
                 <a:ea typeface="Microsoft JhengHei" panose="020B0604030504040204" pitchFamily="34" charset="-120"/>
                 <a:sym typeface="Microsoft JhengHei" panose="020B0604030504040204" pitchFamily="34" charset="-120"/>
               </a:rPr>
-              <a:t>新增展品、變更狀態、移轉、查履歷、寄催還信都會檢查金鑰；外流時執行 </a:t>
+              <a:t>新增或刪除展品、變更狀態、移轉、查履歷、寄催還信都要 </a:t>
             </a:r>
             <a:r>
               <a:rPr lang="en-US" altLang="zh-TW" sz="1400">
@@ -13088,6 +13104,28 @@
                 <a:ea typeface="Microsoft JhengHei" panose="020B0604030504040204" pitchFamily="34" charset="-120"/>
                 <a:sym typeface="Microsoft JhengHei" panose="020B0604030504040204" pitchFamily="34" charset="-120"/>
               </a:rPr>
+              <a:t>8 </a:t>
+            </a:r>
+            <a:r>
+              <a:rPr lang="zh-TW" altLang="en-US" sz="1400">
+                <a:solidFill>
+                  <a:srgbClr val="1F2A30"/>
+                </a:solidFill>
+                <a:latin typeface="Microsoft JhengHei" panose="020B0604030504040204" pitchFamily="34" charset="-120"/>
+                <a:ea typeface="Microsoft JhengHei" panose="020B0604030504040204" pitchFamily="34" charset="-120"/>
+                <a:sym typeface="Microsoft JhengHei" panose="020B0604030504040204" pitchFamily="34" charset="-120"/>
+              </a:rPr>
+              <a:t>碼管理者密碼；外流時執行 </a:t>
+            </a:r>
+            <a:r>
+              <a:rPr lang="en-US" altLang="zh-TW" sz="1400">
+                <a:solidFill>
+                  <a:srgbClr val="1F2A30"/>
+                </a:solidFill>
+                <a:latin typeface="Microsoft JhengHei" panose="020B0604030504040204" pitchFamily="34" charset="-120"/>
+                <a:ea typeface="Microsoft JhengHei" panose="020B0604030504040204" pitchFamily="34" charset="-120"/>
+                <a:sym typeface="Microsoft JhengHei" panose="020B0604030504040204" pitchFamily="34" charset="-120"/>
+              </a:rPr>
               <a:t>resetAdminKey() </a:t>
             </a:r>
             <a:r>
@@ -13109,7 +13147,7 @@
           <p:cNvPr id="13" name="矩形: 圓角 12">
             <a:extLst>
               <a:ext uri="{FF2B5EF4-FFF2-40B4-BE49-F238E27FC236}">
-                <a16:creationId xmlns:a16="http://schemas.microsoft.com/office/drawing/2014/main" id="{E2EC004C-B6CB-4ADA-BC62-3A5824D9CCE6}"/>
+                <a16:creationId xmlns:a16="http://schemas.microsoft.com/office/drawing/2014/main" id="{218572D2-B01C-201B-1006-A642A01AAF4D}"/>
               </a:ext>
             </a:extLst>
           </p:cNvPr>
@@ -13179,7 +13217,7 @@
           <p:cNvPr id="14" name="橢圓 13">
             <a:extLst>
               <a:ext uri="{FF2B5EF4-FFF2-40B4-BE49-F238E27FC236}">
-                <a16:creationId xmlns:a16="http://schemas.microsoft.com/office/drawing/2014/main" id="{E09CE9E0-995A-0313-E9A9-777CE8C7E92F}"/>
+                <a16:creationId xmlns:a16="http://schemas.microsoft.com/office/drawing/2014/main" id="{90BC7CCC-DBA5-7BE7-292A-6FB527952D80}"/>
               </a:ext>
             </a:extLst>
           </p:cNvPr>
@@ -13265,7 +13303,7 @@
           <p:cNvPr id="15" name="文字方塊 14">
             <a:extLst>
               <a:ext uri="{FF2B5EF4-FFF2-40B4-BE49-F238E27FC236}">
-                <a16:creationId xmlns:a16="http://schemas.microsoft.com/office/drawing/2014/main" id="{739959B7-094B-0AE9-0D51-F8AD6E1AA21C}"/>
+                <a16:creationId xmlns:a16="http://schemas.microsoft.com/office/drawing/2014/main" id="{3FE4EFCD-C0A3-CFC0-8C59-8D517E8A5920}"/>
               </a:ext>
             </a:extLst>
           </p:cNvPr>
@@ -13307,7 +13345,7 @@
           <p:cNvPr id="16" name="文字方塊 15">
             <a:extLst>
               <a:ext uri="{FF2B5EF4-FFF2-40B4-BE49-F238E27FC236}">
-                <a16:creationId xmlns:a16="http://schemas.microsoft.com/office/drawing/2014/main" id="{0177F853-2E55-CEB8-3AFD-58E872082818}"/>
+                <a16:creationId xmlns:a16="http://schemas.microsoft.com/office/drawing/2014/main" id="{7204A7B7-8AEA-6CC4-07C1-0A6F0DF5580B}"/>
               </a:ext>
             </a:extLst>
           </p:cNvPr>
@@ -13371,7 +13409,7 @@
           <p:cNvPr id="17" name="矩形: 圓角 16">
             <a:extLst>
               <a:ext uri="{FF2B5EF4-FFF2-40B4-BE49-F238E27FC236}">
-                <a16:creationId xmlns:a16="http://schemas.microsoft.com/office/drawing/2014/main" id="{D8101F12-1AF3-7A91-A645-9AB0A612E122}"/>
+                <a16:creationId xmlns:a16="http://schemas.microsoft.com/office/drawing/2014/main" id="{73E8DE28-9ED8-BE9B-911F-6CA0A7E3C53D}"/>
               </a:ext>
             </a:extLst>
           </p:cNvPr>
@@ -13441,7 +13479,7 @@
           <p:cNvPr id="18" name="橢圓 17">
             <a:extLst>
               <a:ext uri="{FF2B5EF4-FFF2-40B4-BE49-F238E27FC236}">
-                <a16:creationId xmlns:a16="http://schemas.microsoft.com/office/drawing/2014/main" id="{B8C76CEF-F64C-5BA0-28D0-229AB1C9A3AF}"/>
+                <a16:creationId xmlns:a16="http://schemas.microsoft.com/office/drawing/2014/main" id="{FD8EBC20-6A1C-1615-D785-76CF46F61164}"/>
               </a:ext>
             </a:extLst>
           </p:cNvPr>
@@ -13527,7 +13565,7 @@
           <p:cNvPr id="19" name="文字方塊 18">
             <a:extLst>
               <a:ext uri="{FF2B5EF4-FFF2-40B4-BE49-F238E27FC236}">
-                <a16:creationId xmlns:a16="http://schemas.microsoft.com/office/drawing/2014/main" id="{9A6B2C8E-F954-DF04-F9B1-C7C833023909}"/>
+                <a16:creationId xmlns:a16="http://schemas.microsoft.com/office/drawing/2014/main" id="{379507D5-F1FB-541F-4098-AE9611371AC5}"/>
               </a:ext>
             </a:extLst>
           </p:cNvPr>
@@ -13569,7 +13607,7 @@
           <p:cNvPr id="20" name="文字方塊 19">
             <a:extLst>
               <a:ext uri="{FF2B5EF4-FFF2-40B4-BE49-F238E27FC236}">
-                <a16:creationId xmlns:a16="http://schemas.microsoft.com/office/drawing/2014/main" id="{934F685F-058B-8FAA-BEEC-AD66E88043A2}"/>
+                <a16:creationId xmlns:a16="http://schemas.microsoft.com/office/drawing/2014/main" id="{639F1585-E8A0-0D45-A453-FCFEED7C896C}"/>
               </a:ext>
             </a:extLst>
           </p:cNvPr>
@@ -13609,7 +13647,7 @@
     </p:spTree>
     <p:extLst>
       <p:ext uri="{BB962C8B-B14F-4D97-AF65-F5344CB8AC3E}">
-        <p14:creationId xmlns:p14="http://schemas.microsoft.com/office/powerpoint/2010/main" val="2510205585"/>
+        <p14:creationId xmlns:p14="http://schemas.microsoft.com/office/powerpoint/2010/main" val="3518358221"/>
       </p:ext>
     </p:extLst>
   </p:cSld>
@@ -13649,7 +13687,7 @@
           <p:cNvPr id="2" name="標題 1">
             <a:extLst>
               <a:ext uri="{FF2B5EF4-FFF2-40B4-BE49-F238E27FC236}">
-                <a16:creationId xmlns:a16="http://schemas.microsoft.com/office/drawing/2014/main" id="{69C21667-51FD-DFE2-CB13-E6181146BB68}"/>
+                <a16:creationId xmlns:a16="http://schemas.microsoft.com/office/drawing/2014/main" id="{1B81C3EE-9200-60D5-D927-7AA5734D4790}"/>
               </a:ext>
             </a:extLst>
           </p:cNvPr>
@@ -13691,7 +13729,7 @@
           <p:cNvPr id="3" name="文字方塊 2">
             <a:extLst>
               <a:ext uri="{FF2B5EF4-FFF2-40B4-BE49-F238E27FC236}">
-                <a16:creationId xmlns:a16="http://schemas.microsoft.com/office/drawing/2014/main" id="{DF4C1D25-A7C3-7593-DA07-FB215E6941B1}"/>
+                <a16:creationId xmlns:a16="http://schemas.microsoft.com/office/drawing/2014/main" id="{050261B4-A837-2E67-EB1B-324BF68DBBA3}"/>
               </a:ext>
             </a:extLst>
           </p:cNvPr>
@@ -13733,7 +13771,7 @@
           <p:cNvPr id="4" name="投影片編號版面配置區 3">
             <a:extLst>
               <a:ext uri="{FF2B5EF4-FFF2-40B4-BE49-F238E27FC236}">
-                <a16:creationId xmlns:a16="http://schemas.microsoft.com/office/drawing/2014/main" id="{97279567-EFB4-E391-8B29-41BDDD9A5BC8}"/>
+                <a16:creationId xmlns:a16="http://schemas.microsoft.com/office/drawing/2014/main" id="{61497775-D813-5BDC-80DD-C8703FB9796C}"/>
               </a:ext>
             </a:extLst>
           </p:cNvPr>
@@ -13749,7 +13787,7 @@
           <a:bodyPr/>
           <a:lstStyle/>
           <a:p>
-            <a:fld id="{82E2CFFA-BCF7-4941-9F1D-DE24BA5E8539}" type="slidenum">
+            <a:fld id="{62F1B366-B12D-4E81-AEC3-117FBF7F511D}" type="slidenum">
               <a:rPr lang="zh-TW" altLang="en-US" smtClean="0"/>
               <a:t>13</a:t>
             </a:fld>
@@ -13762,7 +13800,7 @@
           <p:cNvPr id="5" name="矩形: 圓角 4">
             <a:extLst>
               <a:ext uri="{FF2B5EF4-FFF2-40B4-BE49-F238E27FC236}">
-                <a16:creationId xmlns:a16="http://schemas.microsoft.com/office/drawing/2014/main" id="{B93B0BDD-A80F-BDB8-3189-B2EBC66EE4D5}"/>
+                <a16:creationId xmlns:a16="http://schemas.microsoft.com/office/drawing/2014/main" id="{753FC34F-FC99-7131-23C6-0560A7ADFF5E}"/>
               </a:ext>
             </a:extLst>
           </p:cNvPr>
@@ -13832,7 +13870,7 @@
           <p:cNvPr id="6" name="文字方塊 5">
             <a:extLst>
               <a:ext uri="{FF2B5EF4-FFF2-40B4-BE49-F238E27FC236}">
-                <a16:creationId xmlns:a16="http://schemas.microsoft.com/office/drawing/2014/main" id="{3D1E9892-01AA-9A83-4ED4-9AFBF3D168F6}"/>
+                <a16:creationId xmlns:a16="http://schemas.microsoft.com/office/drawing/2014/main" id="{1A1D4F7A-F74D-68F4-9B85-B9D34CCB0EB8}"/>
               </a:ext>
             </a:extLst>
           </p:cNvPr>
@@ -13874,7 +13912,7 @@
           <p:cNvPr id="7" name="文字方塊 6">
             <a:extLst>
               <a:ext uri="{FF2B5EF4-FFF2-40B4-BE49-F238E27FC236}">
-                <a16:creationId xmlns:a16="http://schemas.microsoft.com/office/drawing/2014/main" id="{2DB3731B-36E7-13C3-2F29-4B76B56DBF92}"/>
+                <a16:creationId xmlns:a16="http://schemas.microsoft.com/office/drawing/2014/main" id="{C8CFCA5A-A4A8-1B35-37CE-E344284D1355}"/>
               </a:ext>
             </a:extLst>
           </p:cNvPr>
@@ -14072,7 +14110,7 @@
           <p:cNvPr id="8" name="矩形: 圓角 7">
             <a:extLst>
               <a:ext uri="{FF2B5EF4-FFF2-40B4-BE49-F238E27FC236}">
-                <a16:creationId xmlns:a16="http://schemas.microsoft.com/office/drawing/2014/main" id="{408F0BC1-10FC-3C7C-5338-C88AB6B24CC1}"/>
+                <a16:creationId xmlns:a16="http://schemas.microsoft.com/office/drawing/2014/main" id="{60AA17F3-5B10-2A82-3D52-1CE91326E598}"/>
               </a:ext>
             </a:extLst>
           </p:cNvPr>
@@ -14142,7 +14180,7 @@
           <p:cNvPr id="9" name="文字方塊 8">
             <a:extLst>
               <a:ext uri="{FF2B5EF4-FFF2-40B4-BE49-F238E27FC236}">
-                <a16:creationId xmlns:a16="http://schemas.microsoft.com/office/drawing/2014/main" id="{43D9BC3E-57DE-35D6-EA3A-99855E94FFBD}"/>
+                <a16:creationId xmlns:a16="http://schemas.microsoft.com/office/drawing/2014/main" id="{058C1114-B61F-584A-F924-3722FAC9C706}"/>
               </a:ext>
             </a:extLst>
           </p:cNvPr>
@@ -14184,7 +14222,7 @@
           <p:cNvPr id="10" name="文字方塊 9">
             <a:extLst>
               <a:ext uri="{FF2B5EF4-FFF2-40B4-BE49-F238E27FC236}">
-                <a16:creationId xmlns:a16="http://schemas.microsoft.com/office/drawing/2014/main" id="{96BB2B8C-6F4F-F5B6-49DD-08F90DADCC2B}"/>
+                <a16:creationId xmlns:a16="http://schemas.microsoft.com/office/drawing/2014/main" id="{2F2D03E3-994A-F1A8-2EEA-8577BDA3B330}"/>
               </a:ext>
             </a:extLst>
           </p:cNvPr>
@@ -14426,7 +14464,7 @@
           <p:cNvPr id="11" name="文字方塊 10">
             <a:extLst>
               <a:ext uri="{FF2B5EF4-FFF2-40B4-BE49-F238E27FC236}">
-                <a16:creationId xmlns:a16="http://schemas.microsoft.com/office/drawing/2014/main" id="{0C7BF24C-D98A-7BD6-EC0A-01D40CAE13E3}"/>
+                <a16:creationId xmlns:a16="http://schemas.microsoft.com/office/drawing/2014/main" id="{E0C99E79-E125-7EC8-00DF-14C57992BB8E}"/>
               </a:ext>
             </a:extLst>
           </p:cNvPr>
@@ -14488,7 +14526,7 @@
     </p:spTree>
     <p:extLst>
       <p:ext uri="{BB962C8B-B14F-4D97-AF65-F5344CB8AC3E}">
-        <p14:creationId xmlns:p14="http://schemas.microsoft.com/office/powerpoint/2010/main" val="4189381031"/>
+        <p14:creationId xmlns:p14="http://schemas.microsoft.com/office/powerpoint/2010/main" val="3289147176"/>
       </p:ext>
     </p:extLst>
   </p:cSld>
@@ -14520,7 +14558,7 @@
           <p:cNvPr id="2" name="標題 1">
             <a:extLst>
               <a:ext uri="{FF2B5EF4-FFF2-40B4-BE49-F238E27FC236}">
-                <a16:creationId xmlns:a16="http://schemas.microsoft.com/office/drawing/2014/main" id="{22F0AC90-3B86-B7B8-8CD1-9E5AB907324F}"/>
+                <a16:creationId xmlns:a16="http://schemas.microsoft.com/office/drawing/2014/main" id="{B95E46DC-ACD4-EA5B-1012-BDD2F1FFE3C2}"/>
               </a:ext>
             </a:extLst>
           </p:cNvPr>
@@ -14562,7 +14600,7 @@
           <p:cNvPr id="3" name="文字方塊 2">
             <a:extLst>
               <a:ext uri="{FF2B5EF4-FFF2-40B4-BE49-F238E27FC236}">
-                <a16:creationId xmlns:a16="http://schemas.microsoft.com/office/drawing/2014/main" id="{723A00CF-79A8-74D2-B52D-A78B5B5E9EBD}"/>
+                <a16:creationId xmlns:a16="http://schemas.microsoft.com/office/drawing/2014/main" id="{AB164D2E-4069-9D81-6A01-FCEF09BFB18F}"/>
               </a:ext>
             </a:extLst>
           </p:cNvPr>
@@ -14615,7 +14653,7 @@
           <p:cNvPr id="4" name="投影片編號版面配置區 3">
             <a:extLst>
               <a:ext uri="{FF2B5EF4-FFF2-40B4-BE49-F238E27FC236}">
-                <a16:creationId xmlns:a16="http://schemas.microsoft.com/office/drawing/2014/main" id="{AA20D9B6-8033-EF43-D58E-C4410A8D3CC0}"/>
+                <a16:creationId xmlns:a16="http://schemas.microsoft.com/office/drawing/2014/main" id="{099832D2-6808-AC3F-8256-47FF8E40E608}"/>
               </a:ext>
             </a:extLst>
           </p:cNvPr>
@@ -14631,7 +14669,7 @@
           <a:bodyPr/>
           <a:lstStyle/>
           <a:p>
-            <a:fld id="{82E2CFFA-BCF7-4941-9F1D-DE24BA5E8539}" type="slidenum">
+            <a:fld id="{62F1B366-B12D-4E81-AEC3-117FBF7F511D}" type="slidenum">
               <a:rPr lang="zh-TW" altLang="en-US" smtClean="0"/>
               <a:t>2</a:t>
             </a:fld>
@@ -14644,7 +14682,7 @@
           <p:cNvPr id="5" name="矩形: 圓角 4">
             <a:extLst>
               <a:ext uri="{FF2B5EF4-FFF2-40B4-BE49-F238E27FC236}">
-                <a16:creationId xmlns:a16="http://schemas.microsoft.com/office/drawing/2014/main" id="{5DCC5753-2FD7-DB06-F398-97E1F481B39A}"/>
+                <a16:creationId xmlns:a16="http://schemas.microsoft.com/office/drawing/2014/main" id="{E878BAD2-F332-AE52-3C89-D29837AB6836}"/>
               </a:ext>
             </a:extLst>
           </p:cNvPr>
@@ -14714,7 +14752,7 @@
           <p:cNvPr id="6" name="橢圓 5">
             <a:extLst>
               <a:ext uri="{FF2B5EF4-FFF2-40B4-BE49-F238E27FC236}">
-                <a16:creationId xmlns:a16="http://schemas.microsoft.com/office/drawing/2014/main" id="{950953D1-3E41-CB70-3E7D-826C4B089181}"/>
+                <a16:creationId xmlns:a16="http://schemas.microsoft.com/office/drawing/2014/main" id="{6B03B613-9C7B-2D33-3D40-221B587A4B5D}"/>
               </a:ext>
             </a:extLst>
           </p:cNvPr>
@@ -14800,7 +14838,7 @@
           <p:cNvPr id="7" name="文字方塊 6">
             <a:extLst>
               <a:ext uri="{FF2B5EF4-FFF2-40B4-BE49-F238E27FC236}">
-                <a16:creationId xmlns:a16="http://schemas.microsoft.com/office/drawing/2014/main" id="{B81BEE8D-72A3-C7C5-C224-480F81106DF5}"/>
+                <a16:creationId xmlns:a16="http://schemas.microsoft.com/office/drawing/2014/main" id="{D0D9A03B-EA9B-BDA6-86AA-835A329FD211}"/>
               </a:ext>
             </a:extLst>
           </p:cNvPr>
@@ -14842,7 +14880,7 @@
           <p:cNvPr id="8" name="文字方塊 7">
             <a:extLst>
               <a:ext uri="{FF2B5EF4-FFF2-40B4-BE49-F238E27FC236}">
-                <a16:creationId xmlns:a16="http://schemas.microsoft.com/office/drawing/2014/main" id="{DB32232B-B15B-BDD1-3580-C579E5BD0170}"/>
+                <a16:creationId xmlns:a16="http://schemas.microsoft.com/office/drawing/2014/main" id="{CC94ABFC-4EB6-D396-12EB-67D0D6A090F6}"/>
               </a:ext>
             </a:extLst>
           </p:cNvPr>
@@ -14928,7 +14966,7 @@
           <p:cNvPr id="9" name="矩形: 圓角 8">
             <a:extLst>
               <a:ext uri="{FF2B5EF4-FFF2-40B4-BE49-F238E27FC236}">
-                <a16:creationId xmlns:a16="http://schemas.microsoft.com/office/drawing/2014/main" id="{40A0117C-0BCC-9822-EE2D-B31A638CB836}"/>
+                <a16:creationId xmlns:a16="http://schemas.microsoft.com/office/drawing/2014/main" id="{4ECBB256-ABC4-5956-945D-F99DD429152C}"/>
               </a:ext>
             </a:extLst>
           </p:cNvPr>
@@ -15038,7 +15076,7 @@
           <p:cNvPr id="10" name="矩形: 圓角 9">
             <a:extLst>
               <a:ext uri="{FF2B5EF4-FFF2-40B4-BE49-F238E27FC236}">
-                <a16:creationId xmlns:a16="http://schemas.microsoft.com/office/drawing/2014/main" id="{5FABE9F7-0763-842F-3A28-6CCDBD197C70}"/>
+                <a16:creationId xmlns:a16="http://schemas.microsoft.com/office/drawing/2014/main" id="{DAC93096-C153-868D-80EC-33667E2E0268}"/>
               </a:ext>
             </a:extLst>
           </p:cNvPr>
@@ -15108,7 +15146,7 @@
           <p:cNvPr id="11" name="橢圓 10">
             <a:extLst>
               <a:ext uri="{FF2B5EF4-FFF2-40B4-BE49-F238E27FC236}">
-                <a16:creationId xmlns:a16="http://schemas.microsoft.com/office/drawing/2014/main" id="{C3F6B826-0E81-3547-B302-55F7D46D30DC}"/>
+                <a16:creationId xmlns:a16="http://schemas.microsoft.com/office/drawing/2014/main" id="{AB1F4EFB-0A0D-FB1B-7578-5DEE7901CFE2}"/>
               </a:ext>
             </a:extLst>
           </p:cNvPr>
@@ -15194,7 +15232,7 @@
           <p:cNvPr id="12" name="文字方塊 11">
             <a:extLst>
               <a:ext uri="{FF2B5EF4-FFF2-40B4-BE49-F238E27FC236}">
-                <a16:creationId xmlns:a16="http://schemas.microsoft.com/office/drawing/2014/main" id="{3FDF1D78-1328-9166-D181-ACD63B8C0E68}"/>
+                <a16:creationId xmlns:a16="http://schemas.microsoft.com/office/drawing/2014/main" id="{3445EDD2-D6D4-62C6-5668-F9FA62AA68D5}"/>
               </a:ext>
             </a:extLst>
           </p:cNvPr>
@@ -15247,7 +15285,7 @@
           <p:cNvPr id="13" name="文字方塊 12">
             <a:extLst>
               <a:ext uri="{FF2B5EF4-FFF2-40B4-BE49-F238E27FC236}">
-                <a16:creationId xmlns:a16="http://schemas.microsoft.com/office/drawing/2014/main" id="{96446B22-5602-F621-4F7B-948F94EC6FF5}"/>
+                <a16:creationId xmlns:a16="http://schemas.microsoft.com/office/drawing/2014/main" id="{29700E31-B012-6D8A-9913-15BF5DFB3CBA}"/>
               </a:ext>
             </a:extLst>
           </p:cNvPr>
@@ -15322,7 +15360,7 @@
           <p:cNvPr id="14" name="矩形: 圓角 13">
             <a:extLst>
               <a:ext uri="{FF2B5EF4-FFF2-40B4-BE49-F238E27FC236}">
-                <a16:creationId xmlns:a16="http://schemas.microsoft.com/office/drawing/2014/main" id="{22C6F9A1-527E-9F9B-6B58-19C6ECEFC520}"/>
+                <a16:creationId xmlns:a16="http://schemas.microsoft.com/office/drawing/2014/main" id="{29093E15-AA43-83AA-B144-70A4045900A2}"/>
               </a:ext>
             </a:extLst>
           </p:cNvPr>
@@ -15432,7 +15470,7 @@
           <p:cNvPr id="15" name="矩形: 圓角 14">
             <a:extLst>
               <a:ext uri="{FF2B5EF4-FFF2-40B4-BE49-F238E27FC236}">
-                <a16:creationId xmlns:a16="http://schemas.microsoft.com/office/drawing/2014/main" id="{1150B1AD-0E08-49F8-A172-CC75C843618B}"/>
+                <a16:creationId xmlns:a16="http://schemas.microsoft.com/office/drawing/2014/main" id="{DBAE47D0-BB27-7436-1462-85FDD3F9EC6A}"/>
               </a:ext>
             </a:extLst>
           </p:cNvPr>
@@ -15502,7 +15540,7 @@
           <p:cNvPr id="16" name="橢圓 15">
             <a:extLst>
               <a:ext uri="{FF2B5EF4-FFF2-40B4-BE49-F238E27FC236}">
-                <a16:creationId xmlns:a16="http://schemas.microsoft.com/office/drawing/2014/main" id="{706989BA-0FCF-DD49-ED1A-F4320C4C1CAA}"/>
+                <a16:creationId xmlns:a16="http://schemas.microsoft.com/office/drawing/2014/main" id="{A4CC8E18-EA76-673E-430D-D773222B5D0B}"/>
               </a:ext>
             </a:extLst>
           </p:cNvPr>
@@ -15588,7 +15626,7 @@
           <p:cNvPr id="17" name="文字方塊 16">
             <a:extLst>
               <a:ext uri="{FF2B5EF4-FFF2-40B4-BE49-F238E27FC236}">
-                <a16:creationId xmlns:a16="http://schemas.microsoft.com/office/drawing/2014/main" id="{B282F51F-1CEF-63ED-9E03-BFB9997ACD7C}"/>
+                <a16:creationId xmlns:a16="http://schemas.microsoft.com/office/drawing/2014/main" id="{31AF1B30-CE44-6D34-1425-85669E1AC272}"/>
               </a:ext>
             </a:extLst>
           </p:cNvPr>
@@ -15641,7 +15679,7 @@
           <p:cNvPr id="18" name="文字方塊 17">
             <a:extLst>
               <a:ext uri="{FF2B5EF4-FFF2-40B4-BE49-F238E27FC236}">
-                <a16:creationId xmlns:a16="http://schemas.microsoft.com/office/drawing/2014/main" id="{01236AB8-08B7-64FE-EA9F-69F85C46E4AC}"/>
+                <a16:creationId xmlns:a16="http://schemas.microsoft.com/office/drawing/2014/main" id="{C2773D1A-4CF9-A518-3ACA-A5CDE07E0470}"/>
               </a:ext>
             </a:extLst>
           </p:cNvPr>
@@ -15683,7 +15721,7 @@
           <p:cNvPr id="19" name="矩形: 圓角 18">
             <a:extLst>
               <a:ext uri="{FF2B5EF4-FFF2-40B4-BE49-F238E27FC236}">
-                <a16:creationId xmlns:a16="http://schemas.microsoft.com/office/drawing/2014/main" id="{CC5ECA36-9C8C-63E8-0C64-9DDA23809627}"/>
+                <a16:creationId xmlns:a16="http://schemas.microsoft.com/office/drawing/2014/main" id="{AC416025-1510-87EB-9945-B4020E80E0E7}"/>
               </a:ext>
             </a:extLst>
           </p:cNvPr>
@@ -15785,7 +15823,7 @@
           <p:cNvPr id="20" name="矩形: 圓角 19">
             <a:extLst>
               <a:ext uri="{FF2B5EF4-FFF2-40B4-BE49-F238E27FC236}">
-                <a16:creationId xmlns:a16="http://schemas.microsoft.com/office/drawing/2014/main" id="{4219400A-0DD3-9D4F-08DD-917F3FA61212}"/>
+                <a16:creationId xmlns:a16="http://schemas.microsoft.com/office/drawing/2014/main" id="{5ECC1F0F-B5D9-F899-5CBB-59265AFD5844}"/>
               </a:ext>
             </a:extLst>
           </p:cNvPr>
@@ -15855,7 +15893,7 @@
           <p:cNvPr id="21" name="橢圓 20">
             <a:extLst>
               <a:ext uri="{FF2B5EF4-FFF2-40B4-BE49-F238E27FC236}">
-                <a16:creationId xmlns:a16="http://schemas.microsoft.com/office/drawing/2014/main" id="{F44A2459-7D9D-A651-AD3D-9E135BD6548B}"/>
+                <a16:creationId xmlns:a16="http://schemas.microsoft.com/office/drawing/2014/main" id="{F46433AC-3D07-D19C-5C44-E228A73742B8}"/>
               </a:ext>
             </a:extLst>
           </p:cNvPr>
@@ -15941,7 +15979,7 @@
           <p:cNvPr id="22" name="文字方塊 21">
             <a:extLst>
               <a:ext uri="{FF2B5EF4-FFF2-40B4-BE49-F238E27FC236}">
-                <a16:creationId xmlns:a16="http://schemas.microsoft.com/office/drawing/2014/main" id="{4DBB7C11-C0E3-532D-293E-712FCC0734E8}"/>
+                <a16:creationId xmlns:a16="http://schemas.microsoft.com/office/drawing/2014/main" id="{ACEADEAA-BA2A-C188-9170-5F3C02656CDF}"/>
               </a:ext>
             </a:extLst>
           </p:cNvPr>
@@ -15983,7 +16021,7 @@
           <p:cNvPr id="23" name="文字方塊 22">
             <a:extLst>
               <a:ext uri="{FF2B5EF4-FFF2-40B4-BE49-F238E27FC236}">
-                <a16:creationId xmlns:a16="http://schemas.microsoft.com/office/drawing/2014/main" id="{19119FE8-98ED-5C1C-A9AA-03CF53B1542F}"/>
+                <a16:creationId xmlns:a16="http://schemas.microsoft.com/office/drawing/2014/main" id="{8A6DB086-A6E3-7044-1511-A9AD7AF6678D}"/>
               </a:ext>
             </a:extLst>
           </p:cNvPr>
@@ -16047,7 +16085,7 @@
           <p:cNvPr id="24" name="矩形: 圓角 23">
             <a:extLst>
               <a:ext uri="{FF2B5EF4-FFF2-40B4-BE49-F238E27FC236}">
-                <a16:creationId xmlns:a16="http://schemas.microsoft.com/office/drawing/2014/main" id="{E2076D84-C73D-6CBC-9A04-FE0A4A63E4AB}"/>
+                <a16:creationId xmlns:a16="http://schemas.microsoft.com/office/drawing/2014/main" id="{0B696A05-1992-0AC2-05E3-DA024479A689}"/>
               </a:ext>
             </a:extLst>
           </p:cNvPr>
@@ -16146,7 +16184,7 @@
           <p:cNvPr id="25" name="矩形: 圓角 24">
             <a:extLst>
               <a:ext uri="{FF2B5EF4-FFF2-40B4-BE49-F238E27FC236}">
-                <a16:creationId xmlns:a16="http://schemas.microsoft.com/office/drawing/2014/main" id="{ECF69596-B378-EA33-F866-086AB220D015}"/>
+                <a16:creationId xmlns:a16="http://schemas.microsoft.com/office/drawing/2014/main" id="{1880EA7E-A6A9-03F1-DD42-7761D97FE5B8}"/>
               </a:ext>
             </a:extLst>
           </p:cNvPr>
@@ -16289,7 +16327,7 @@
     </p:spTree>
     <p:extLst>
       <p:ext uri="{BB962C8B-B14F-4D97-AF65-F5344CB8AC3E}">
-        <p14:creationId xmlns:p14="http://schemas.microsoft.com/office/powerpoint/2010/main" val="2403038886"/>
+        <p14:creationId xmlns:p14="http://schemas.microsoft.com/office/powerpoint/2010/main" val="2003052262"/>
       </p:ext>
     </p:extLst>
   </p:cSld>
@@ -16321,7 +16359,7 @@
           <p:cNvPr id="2" name="標題 1">
             <a:extLst>
               <a:ext uri="{FF2B5EF4-FFF2-40B4-BE49-F238E27FC236}">
-                <a16:creationId xmlns:a16="http://schemas.microsoft.com/office/drawing/2014/main" id="{7BDA6321-C4B5-E77A-7E9F-A3F3E6215C09}"/>
+                <a16:creationId xmlns:a16="http://schemas.microsoft.com/office/drawing/2014/main" id="{B4EC6764-97A7-5E8E-772D-FE6CC86D3089}"/>
               </a:ext>
             </a:extLst>
           </p:cNvPr>
@@ -16363,7 +16401,7 @@
           <p:cNvPr id="3" name="文字方塊 2">
             <a:extLst>
               <a:ext uri="{FF2B5EF4-FFF2-40B4-BE49-F238E27FC236}">
-                <a16:creationId xmlns:a16="http://schemas.microsoft.com/office/drawing/2014/main" id="{B7792926-F0BC-890A-FB48-01E1ACB67CC8}"/>
+                <a16:creationId xmlns:a16="http://schemas.microsoft.com/office/drawing/2014/main" id="{6847AE6A-7D17-8B72-192F-D422C824B9A9}"/>
               </a:ext>
             </a:extLst>
           </p:cNvPr>
@@ -16416,7 +16454,7 @@
           <p:cNvPr id="4" name="投影片編號版面配置區 3">
             <a:extLst>
               <a:ext uri="{FF2B5EF4-FFF2-40B4-BE49-F238E27FC236}">
-                <a16:creationId xmlns:a16="http://schemas.microsoft.com/office/drawing/2014/main" id="{05CB9B8A-647B-0FAB-8798-FD660419B0F9}"/>
+                <a16:creationId xmlns:a16="http://schemas.microsoft.com/office/drawing/2014/main" id="{A6AF02D0-36EE-651D-6D99-3351AEB2A900}"/>
               </a:ext>
             </a:extLst>
           </p:cNvPr>
@@ -16432,7 +16470,7 @@
           <a:bodyPr/>
           <a:lstStyle/>
           <a:p>
-            <a:fld id="{82E2CFFA-BCF7-4941-9F1D-DE24BA5E8539}" type="slidenum">
+            <a:fld id="{62F1B366-B12D-4E81-AEC3-117FBF7F511D}" type="slidenum">
               <a:rPr lang="zh-TW" altLang="en-US" smtClean="0"/>
               <a:t>3</a:t>
             </a:fld>
@@ -16445,7 +16483,7 @@
           <p:cNvPr id="5" name="表格 4">
             <a:extLst>
               <a:ext uri="{FF2B5EF4-FFF2-40B4-BE49-F238E27FC236}">
-                <a16:creationId xmlns:a16="http://schemas.microsoft.com/office/drawing/2014/main" id="{B49528A1-9BB5-1253-E251-5BC11CDD9962}"/>
+                <a16:creationId xmlns:a16="http://schemas.microsoft.com/office/drawing/2014/main" id="{DD5EDAFD-A5BD-F646-45FC-9065129A48B2}"/>
               </a:ext>
             </a:extLst>
           </p:cNvPr>
@@ -16455,7 +16493,7 @@
           <p:nvPr>
             <p:extLst>
               <p:ext uri="{D42A27DB-BD31-4B8C-83A1-F6EECF244321}">
-                <p14:modId xmlns:p14="http://schemas.microsoft.com/office/powerpoint/2010/main" val="2299976560"/>
+                <p14:modId xmlns:p14="http://schemas.microsoft.com/office/powerpoint/2010/main" val="530852897"/>
               </p:ext>
             </p:extLst>
           </p:nvPr>
@@ -16474,14 +16512,14 @@
                 <a:gridCol w="2794000">
                   <a:extLst>
                     <a:ext uri="{9D8B030D-6E8A-4147-A177-3AD203B41FA5}">
-                      <a16:colId xmlns:a16="http://schemas.microsoft.com/office/drawing/2014/main" val="2611285982"/>
+                      <a16:colId xmlns:a16="http://schemas.microsoft.com/office/drawing/2014/main" val="2074600069"/>
                     </a:ext>
                   </a:extLst>
                 </a:gridCol>
                 <a:gridCol w="8178800">
                   <a:extLst>
                     <a:ext uri="{9D8B030D-6E8A-4147-A177-3AD203B41FA5}">
-                      <a16:colId xmlns:a16="http://schemas.microsoft.com/office/drawing/2014/main" val="2417048318"/>
+                      <a16:colId xmlns:a16="http://schemas.microsoft.com/office/drawing/2014/main" val="1129972031"/>
                     </a:ext>
                   </a:extLst>
                 </a:gridCol>
@@ -16537,7 +16575,7 @@
                 </a:tc>
                 <a:extLst>
                   <a:ext uri="{0D108BD9-81ED-4DB2-BD59-A6C34878D82A}">
-                    <a16:rowId xmlns:a16="http://schemas.microsoft.com/office/drawing/2014/main" val="3146749295"/>
+                    <a16:rowId xmlns:a16="http://schemas.microsoft.com/office/drawing/2014/main" val="4278969523"/>
                   </a:ext>
                 </a:extLst>
               </a:tr>
@@ -16669,7 +16707,7 @@
                 </a:tc>
                 <a:extLst>
                   <a:ext uri="{0D108BD9-81ED-4DB2-BD59-A6C34878D82A}">
-                    <a16:rowId xmlns:a16="http://schemas.microsoft.com/office/drawing/2014/main" val="4176227572"/>
+                    <a16:rowId xmlns:a16="http://schemas.microsoft.com/office/drawing/2014/main" val="2893917704"/>
                   </a:ext>
                 </a:extLst>
               </a:tr>
@@ -16724,7 +16762,7 @@
                 </a:tc>
                 <a:extLst>
                   <a:ext uri="{0D108BD9-81ED-4DB2-BD59-A6C34878D82A}">
-                    <a16:rowId xmlns:a16="http://schemas.microsoft.com/office/drawing/2014/main" val="3009581627"/>
+                    <a16:rowId xmlns:a16="http://schemas.microsoft.com/office/drawing/2014/main" val="1351061716"/>
                   </a:ext>
                 </a:extLst>
               </a:tr>
@@ -16823,7 +16861,7 @@
                 </a:tc>
                 <a:extLst>
                   <a:ext uri="{0D108BD9-81ED-4DB2-BD59-A6C34878D82A}">
-                    <a16:rowId xmlns:a16="http://schemas.microsoft.com/office/drawing/2014/main" val="1628264053"/>
+                    <a16:rowId xmlns:a16="http://schemas.microsoft.com/office/drawing/2014/main" val="3464238375"/>
                   </a:ext>
                 </a:extLst>
               </a:tr>
@@ -16900,7 +16938,7 @@
                 </a:tc>
                 <a:extLst>
                   <a:ext uri="{0D108BD9-81ED-4DB2-BD59-A6C34878D82A}">
-                    <a16:rowId xmlns:a16="http://schemas.microsoft.com/office/drawing/2014/main" val="2238880675"/>
+                    <a16:rowId xmlns:a16="http://schemas.microsoft.com/office/drawing/2014/main" val="1618408631"/>
                   </a:ext>
                 </a:extLst>
               </a:tr>
@@ -17021,7 +17059,7 @@
                 </a:tc>
                 <a:extLst>
                   <a:ext uri="{0D108BD9-81ED-4DB2-BD59-A6C34878D82A}">
-                    <a16:rowId xmlns:a16="http://schemas.microsoft.com/office/drawing/2014/main" val="440858841"/>
+                    <a16:rowId xmlns:a16="http://schemas.microsoft.com/office/drawing/2014/main" val="1470930808"/>
                   </a:ext>
                 </a:extLst>
               </a:tr>
@@ -17117,7 +17155,7 @@
                 </a:tc>
                 <a:extLst>
                   <a:ext uri="{0D108BD9-81ED-4DB2-BD59-A6C34878D82A}">
-                    <a16:rowId xmlns:a16="http://schemas.microsoft.com/office/drawing/2014/main" val="2997467499"/>
+                    <a16:rowId xmlns:a16="http://schemas.microsoft.com/office/drawing/2014/main" val="1634205251"/>
                   </a:ext>
                 </a:extLst>
               </a:tr>
@@ -17227,7 +17265,7 @@
                 </a:tc>
                 <a:extLst>
                   <a:ext uri="{0D108BD9-81ED-4DB2-BD59-A6C34878D82A}">
-                    <a16:rowId xmlns:a16="http://schemas.microsoft.com/office/drawing/2014/main" val="3277416918"/>
+                    <a16:rowId xmlns:a16="http://schemas.microsoft.com/office/drawing/2014/main" val="4020214585"/>
                   </a:ext>
                 </a:extLst>
               </a:tr>
@@ -17238,7 +17276,7 @@
     </p:spTree>
     <p:extLst>
       <p:ext uri="{BB962C8B-B14F-4D97-AF65-F5344CB8AC3E}">
-        <p14:creationId xmlns:p14="http://schemas.microsoft.com/office/powerpoint/2010/main" val="4230461846"/>
+        <p14:creationId xmlns:p14="http://schemas.microsoft.com/office/powerpoint/2010/main" val="2932845877"/>
       </p:ext>
     </p:extLst>
   </p:cSld>
@@ -17270,7 +17308,7 @@
           <p:cNvPr id="2" name="標題 1">
             <a:extLst>
               <a:ext uri="{FF2B5EF4-FFF2-40B4-BE49-F238E27FC236}">
-                <a16:creationId xmlns:a16="http://schemas.microsoft.com/office/drawing/2014/main" id="{1F2FE1E5-E502-2726-BD80-1CB3EF1DCC9B}"/>
+                <a16:creationId xmlns:a16="http://schemas.microsoft.com/office/drawing/2014/main" id="{3DFA5102-F5D6-9625-A7A9-46EE0665CEA4}"/>
               </a:ext>
             </a:extLst>
           </p:cNvPr>
@@ -17312,7 +17350,7 @@
           <p:cNvPr id="3" name="文字方塊 2">
             <a:extLst>
               <a:ext uri="{FF2B5EF4-FFF2-40B4-BE49-F238E27FC236}">
-                <a16:creationId xmlns:a16="http://schemas.microsoft.com/office/drawing/2014/main" id="{D2520466-D7DE-9A6B-2B1A-122E5996DDA5}"/>
+                <a16:creationId xmlns:a16="http://schemas.microsoft.com/office/drawing/2014/main" id="{3338A7A0-9EA7-AB45-9653-1352603D0A27}"/>
               </a:ext>
             </a:extLst>
           </p:cNvPr>
@@ -17365,7 +17403,7 @@
           <p:cNvPr id="4" name="投影片編號版面配置區 3">
             <a:extLst>
               <a:ext uri="{FF2B5EF4-FFF2-40B4-BE49-F238E27FC236}">
-                <a16:creationId xmlns:a16="http://schemas.microsoft.com/office/drawing/2014/main" id="{2806EE7C-E82F-DD0B-9EE7-A12485158511}"/>
+                <a16:creationId xmlns:a16="http://schemas.microsoft.com/office/drawing/2014/main" id="{1DD3C435-FE93-1ECF-B4FD-F5B70FD5A7D0}"/>
               </a:ext>
             </a:extLst>
           </p:cNvPr>
@@ -17381,7 +17419,7 @@
           <a:bodyPr/>
           <a:lstStyle/>
           <a:p>
-            <a:fld id="{82E2CFFA-BCF7-4941-9F1D-DE24BA5E8539}" type="slidenum">
+            <a:fld id="{62F1B366-B12D-4E81-AEC3-117FBF7F511D}" type="slidenum">
               <a:rPr lang="zh-TW" altLang="en-US" smtClean="0"/>
               <a:t>4</a:t>
             </a:fld>
@@ -17394,7 +17432,7 @@
           <p:cNvPr id="5" name="矩形: 圓角 4">
             <a:extLst>
               <a:ext uri="{FF2B5EF4-FFF2-40B4-BE49-F238E27FC236}">
-                <a16:creationId xmlns:a16="http://schemas.microsoft.com/office/drawing/2014/main" id="{4CF54468-3FA1-8A0D-4D9F-FE8F2B37FBB9}"/>
+                <a16:creationId xmlns:a16="http://schemas.microsoft.com/office/drawing/2014/main" id="{77A58CB4-D2B5-021F-E693-B4CABEE15049}"/>
               </a:ext>
             </a:extLst>
           </p:cNvPr>
@@ -17535,7 +17573,7 @@
           <p:cNvPr id="6" name="矩形: 圓角 5">
             <a:extLst>
               <a:ext uri="{FF2B5EF4-FFF2-40B4-BE49-F238E27FC236}">
-                <a16:creationId xmlns:a16="http://schemas.microsoft.com/office/drawing/2014/main" id="{2762662D-E4AD-3A8A-5BC6-249766E02619}"/>
+                <a16:creationId xmlns:a16="http://schemas.microsoft.com/office/drawing/2014/main" id="{6324D620-B78D-FC75-4F25-625197643E8C}"/>
               </a:ext>
             </a:extLst>
           </p:cNvPr>
@@ -17654,7 +17692,7 @@
           <p:cNvPr id="7" name="矩形: 圓角 6">
             <a:extLst>
               <a:ext uri="{FF2B5EF4-FFF2-40B4-BE49-F238E27FC236}">
-                <a16:creationId xmlns:a16="http://schemas.microsoft.com/office/drawing/2014/main" id="{7B704925-D116-53F3-85D8-A8D8942945A1}"/>
+                <a16:creationId xmlns:a16="http://schemas.microsoft.com/office/drawing/2014/main" id="{AE4BD02E-582C-DB86-10AE-4D50600D5FD4}"/>
               </a:ext>
             </a:extLst>
           </p:cNvPr>
@@ -17847,7 +17885,7 @@
           <p:cNvPr id="8" name="直線單箭頭接點 7">
             <a:extLst>
               <a:ext uri="{FF2B5EF4-FFF2-40B4-BE49-F238E27FC236}">
-                <a16:creationId xmlns:a16="http://schemas.microsoft.com/office/drawing/2014/main" id="{CFE09687-571C-59F5-D3A1-220B9B382FFA}"/>
+                <a16:creationId xmlns:a16="http://schemas.microsoft.com/office/drawing/2014/main" id="{A9CF6242-512B-A708-1F80-3A595A66C810}"/>
               </a:ext>
             </a:extLst>
           </p:cNvPr>
@@ -17889,7 +17927,7 @@
           <p:cNvPr id="9" name="文字方塊 8">
             <a:extLst>
               <a:ext uri="{FF2B5EF4-FFF2-40B4-BE49-F238E27FC236}">
-                <a16:creationId xmlns:a16="http://schemas.microsoft.com/office/drawing/2014/main" id="{9E9B4E0C-4BD2-84C0-35C8-6017A0B80794}"/>
+                <a16:creationId xmlns:a16="http://schemas.microsoft.com/office/drawing/2014/main" id="{23CF4623-6F56-899B-FF7C-43A2F235CD50}"/>
               </a:ext>
             </a:extLst>
           </p:cNvPr>
@@ -17954,7 +17992,7 @@
           <p:cNvPr id="10" name="直線單箭頭接點 9">
             <a:extLst>
               <a:ext uri="{FF2B5EF4-FFF2-40B4-BE49-F238E27FC236}">
-                <a16:creationId xmlns:a16="http://schemas.microsoft.com/office/drawing/2014/main" id="{EBCA3F8D-37DB-4BDB-D926-C44E41E27D8F}"/>
+                <a16:creationId xmlns:a16="http://schemas.microsoft.com/office/drawing/2014/main" id="{6A0D50E1-076E-359C-F03F-66A156DF8446}"/>
               </a:ext>
             </a:extLst>
           </p:cNvPr>
@@ -17997,7 +18035,7 @@
           <p:cNvPr id="11" name="文字方塊 10">
             <a:extLst>
               <a:ext uri="{FF2B5EF4-FFF2-40B4-BE49-F238E27FC236}">
-                <a16:creationId xmlns:a16="http://schemas.microsoft.com/office/drawing/2014/main" id="{C41E2093-1842-D921-7727-D63A7986E310}"/>
+                <a16:creationId xmlns:a16="http://schemas.microsoft.com/office/drawing/2014/main" id="{F8061FAE-D411-195C-7193-520A6406B8D4}"/>
               </a:ext>
             </a:extLst>
           </p:cNvPr>
@@ -18040,7 +18078,7 @@
           <p:cNvPr id="12" name="矩形: 圓角 11">
             <a:extLst>
               <a:ext uri="{FF2B5EF4-FFF2-40B4-BE49-F238E27FC236}">
-                <a16:creationId xmlns:a16="http://schemas.microsoft.com/office/drawing/2014/main" id="{4CB94EF4-DD50-5F2D-34D4-9752B3147CDC}"/>
+                <a16:creationId xmlns:a16="http://schemas.microsoft.com/office/drawing/2014/main" id="{96887A30-F283-9F39-72D6-C1186A48594B}"/>
               </a:ext>
             </a:extLst>
           </p:cNvPr>
@@ -18145,7 +18183,7 @@
           <p:cNvPr id="13" name="矩形: 圓角 12">
             <a:extLst>
               <a:ext uri="{FF2B5EF4-FFF2-40B4-BE49-F238E27FC236}">
-                <a16:creationId xmlns:a16="http://schemas.microsoft.com/office/drawing/2014/main" id="{466711D1-0B16-B3E8-810E-DFC762524399}"/>
+                <a16:creationId xmlns:a16="http://schemas.microsoft.com/office/drawing/2014/main" id="{6D6D0D1A-F566-8E01-3226-799BB0B01D6F}"/>
               </a:ext>
             </a:extLst>
           </p:cNvPr>
@@ -18272,7 +18310,7 @@
           <p:cNvPr id="14" name="矩形: 圓角 13">
             <a:extLst>
               <a:ext uri="{FF2B5EF4-FFF2-40B4-BE49-F238E27FC236}">
-                <a16:creationId xmlns:a16="http://schemas.microsoft.com/office/drawing/2014/main" id="{2A147356-C776-AE36-5A71-BA60917A1F1B}"/>
+                <a16:creationId xmlns:a16="http://schemas.microsoft.com/office/drawing/2014/main" id="{5858D4AD-3AE2-59DE-012B-63057C96BCDD}"/>
               </a:ext>
             </a:extLst>
           </p:cNvPr>
@@ -18377,7 +18415,7 @@
           <p:cNvPr id="15" name="直線單箭頭接點 14">
             <a:extLst>
               <a:ext uri="{FF2B5EF4-FFF2-40B4-BE49-F238E27FC236}">
-                <a16:creationId xmlns:a16="http://schemas.microsoft.com/office/drawing/2014/main" id="{1131F32F-2A4C-821B-C087-102E3ACFBB47}"/>
+                <a16:creationId xmlns:a16="http://schemas.microsoft.com/office/drawing/2014/main" id="{A5E6DE5C-CA3E-C5F1-5390-116984E3C0DE}"/>
               </a:ext>
             </a:extLst>
           </p:cNvPr>
@@ -18419,7 +18457,7 @@
           <p:cNvPr id="16" name="直線單箭頭接點 15">
             <a:extLst>
               <a:ext uri="{FF2B5EF4-FFF2-40B4-BE49-F238E27FC236}">
-                <a16:creationId xmlns:a16="http://schemas.microsoft.com/office/drawing/2014/main" id="{B5A8DC13-E5E7-9F12-D576-6BAD5435970A}"/>
+                <a16:creationId xmlns:a16="http://schemas.microsoft.com/office/drawing/2014/main" id="{9D8B9D5F-EB79-D667-98AB-BD933DA4CDF2}"/>
               </a:ext>
             </a:extLst>
           </p:cNvPr>
@@ -18461,7 +18499,7 @@
           <p:cNvPr id="17" name="直線單箭頭接點 16">
             <a:extLst>
               <a:ext uri="{FF2B5EF4-FFF2-40B4-BE49-F238E27FC236}">
-                <a16:creationId xmlns:a16="http://schemas.microsoft.com/office/drawing/2014/main" id="{E0870CA4-E338-44BB-61E7-D34811136E13}"/>
+                <a16:creationId xmlns:a16="http://schemas.microsoft.com/office/drawing/2014/main" id="{601A646D-2AC9-D3E8-EA37-3162BF4DBD7D}"/>
               </a:ext>
             </a:extLst>
           </p:cNvPr>
@@ -18503,7 +18541,7 @@
           <p:cNvPr id="18" name="文字方塊 17">
             <a:extLst>
               <a:ext uri="{FF2B5EF4-FFF2-40B4-BE49-F238E27FC236}">
-                <a16:creationId xmlns:a16="http://schemas.microsoft.com/office/drawing/2014/main" id="{E5E6B365-D4E7-322F-6EAD-F1B3CC202E0F}"/>
+                <a16:creationId xmlns:a16="http://schemas.microsoft.com/office/drawing/2014/main" id="{E6B3CE2E-3E6F-108C-8411-6E8BECA3744B}"/>
               </a:ext>
             </a:extLst>
           </p:cNvPr>
@@ -18554,7 +18592,7 @@
           <p:cNvPr id="19" name="文字方塊 18">
             <a:extLst>
               <a:ext uri="{FF2B5EF4-FFF2-40B4-BE49-F238E27FC236}">
-                <a16:creationId xmlns:a16="http://schemas.microsoft.com/office/drawing/2014/main" id="{98F9D08C-BAA0-AB84-396D-73E8FDE42CCF}"/>
+                <a16:creationId xmlns:a16="http://schemas.microsoft.com/office/drawing/2014/main" id="{FFDD4A1D-945F-2A9F-CD58-1E8B597C6AEB}"/>
               </a:ext>
             </a:extLst>
           </p:cNvPr>
@@ -18616,7 +18654,7 @@
     </p:spTree>
     <p:extLst>
       <p:ext uri="{BB962C8B-B14F-4D97-AF65-F5344CB8AC3E}">
-        <p14:creationId xmlns:p14="http://schemas.microsoft.com/office/powerpoint/2010/main" val="1857021108"/>
+        <p14:creationId xmlns:p14="http://schemas.microsoft.com/office/powerpoint/2010/main" val="507243631"/>
       </p:ext>
     </p:extLst>
   </p:cSld>
@@ -18648,7 +18686,7 @@
           <p:cNvPr id="2" name="標題 1">
             <a:extLst>
               <a:ext uri="{FF2B5EF4-FFF2-40B4-BE49-F238E27FC236}">
-                <a16:creationId xmlns:a16="http://schemas.microsoft.com/office/drawing/2014/main" id="{ADE245EF-483C-CF3B-A7FA-9B233D1F3459}"/>
+                <a16:creationId xmlns:a16="http://schemas.microsoft.com/office/drawing/2014/main" id="{7DB7CEB5-F17E-CE49-E42A-B479E8409110}"/>
               </a:ext>
             </a:extLst>
           </p:cNvPr>
@@ -18690,7 +18728,7 @@
           <p:cNvPr id="3" name="文字方塊 2">
             <a:extLst>
               <a:ext uri="{FF2B5EF4-FFF2-40B4-BE49-F238E27FC236}">
-                <a16:creationId xmlns:a16="http://schemas.microsoft.com/office/drawing/2014/main" id="{5497368B-414C-5841-DF35-A82D4A20CDB5}"/>
+                <a16:creationId xmlns:a16="http://schemas.microsoft.com/office/drawing/2014/main" id="{15671699-74D1-5BC6-44E0-17CE614FE7D7}"/>
               </a:ext>
             </a:extLst>
           </p:cNvPr>
@@ -18743,7 +18781,7 @@
           <p:cNvPr id="4" name="投影片編號版面配置區 3">
             <a:extLst>
               <a:ext uri="{FF2B5EF4-FFF2-40B4-BE49-F238E27FC236}">
-                <a16:creationId xmlns:a16="http://schemas.microsoft.com/office/drawing/2014/main" id="{CC0A0E0B-15FC-895A-EFE8-72EB87C5AD62}"/>
+                <a16:creationId xmlns:a16="http://schemas.microsoft.com/office/drawing/2014/main" id="{6C0ECE4A-37A9-74D3-AD78-030C10D3C0FA}"/>
               </a:ext>
             </a:extLst>
           </p:cNvPr>
@@ -18759,7 +18797,7 @@
           <a:bodyPr/>
           <a:lstStyle/>
           <a:p>
-            <a:fld id="{82E2CFFA-BCF7-4941-9F1D-DE24BA5E8539}" type="slidenum">
+            <a:fld id="{62F1B366-B12D-4E81-AEC3-117FBF7F511D}" type="slidenum">
               <a:rPr lang="zh-TW" altLang="en-US" smtClean="0"/>
               <a:t>5</a:t>
             </a:fld>
@@ -18772,7 +18810,7 @@
           <p:cNvPr id="5" name="橢圓 4">
             <a:extLst>
               <a:ext uri="{FF2B5EF4-FFF2-40B4-BE49-F238E27FC236}">
-                <a16:creationId xmlns:a16="http://schemas.microsoft.com/office/drawing/2014/main" id="{009C3865-103B-8C36-B8B4-EE6EC27A6F77}"/>
+                <a16:creationId xmlns:a16="http://schemas.microsoft.com/office/drawing/2014/main" id="{1A7BC052-1971-9F7C-8B81-34227DD90BB6}"/>
               </a:ext>
             </a:extLst>
           </p:cNvPr>
@@ -18858,7 +18896,7 @@
           <p:cNvPr id="6" name="直線單箭頭接點 5">
             <a:extLst>
               <a:ext uri="{FF2B5EF4-FFF2-40B4-BE49-F238E27FC236}">
-                <a16:creationId xmlns:a16="http://schemas.microsoft.com/office/drawing/2014/main" id="{FDF7518B-357E-72CA-B9B2-3A5E4A1B7F74}"/>
+                <a16:creationId xmlns:a16="http://schemas.microsoft.com/office/drawing/2014/main" id="{C9260887-F20A-2F9E-22CA-4305B475D0C4}"/>
               </a:ext>
             </a:extLst>
           </p:cNvPr>
@@ -18900,7 +18938,7 @@
           <p:cNvPr id="7" name="矩形: 圓角 6">
             <a:extLst>
               <a:ext uri="{FF2B5EF4-FFF2-40B4-BE49-F238E27FC236}">
-                <a16:creationId xmlns:a16="http://schemas.microsoft.com/office/drawing/2014/main" id="{5C9EF26D-1FBB-40A9-741F-18DC594166BF}"/>
+                <a16:creationId xmlns:a16="http://schemas.microsoft.com/office/drawing/2014/main" id="{EC3D8D63-8B0C-EBC8-4DF7-6B5EC0FAB952}"/>
               </a:ext>
             </a:extLst>
           </p:cNvPr>
@@ -18970,7 +19008,7 @@
           <p:cNvPr id="8" name="文字方塊 7">
             <a:extLst>
               <a:ext uri="{FF2B5EF4-FFF2-40B4-BE49-F238E27FC236}">
-                <a16:creationId xmlns:a16="http://schemas.microsoft.com/office/drawing/2014/main" id="{7BEA3E14-E2DA-ED60-E0EA-64CDCB3D5D08}"/>
+                <a16:creationId xmlns:a16="http://schemas.microsoft.com/office/drawing/2014/main" id="{F9293D8E-5235-F289-AEFE-697013C2456C}"/>
               </a:ext>
             </a:extLst>
           </p:cNvPr>
@@ -19012,7 +19050,7 @@
           <p:cNvPr id="9" name="文字方塊 8">
             <a:extLst>
               <a:ext uri="{FF2B5EF4-FFF2-40B4-BE49-F238E27FC236}">
-                <a16:creationId xmlns:a16="http://schemas.microsoft.com/office/drawing/2014/main" id="{16D62A84-3345-F6E3-7A5A-E18922506493}"/>
+                <a16:creationId xmlns:a16="http://schemas.microsoft.com/office/drawing/2014/main" id="{95A375DB-9E47-1167-8A63-0A2FC9631375}"/>
               </a:ext>
             </a:extLst>
           </p:cNvPr>
@@ -19073,7 +19111,7 @@
           <p:cNvPr id="10" name="橢圓 9">
             <a:extLst>
               <a:ext uri="{FF2B5EF4-FFF2-40B4-BE49-F238E27FC236}">
-                <a16:creationId xmlns:a16="http://schemas.microsoft.com/office/drawing/2014/main" id="{668F1785-1526-4E79-1A93-30562DB4E88D}"/>
+                <a16:creationId xmlns:a16="http://schemas.microsoft.com/office/drawing/2014/main" id="{4D25DEF2-3E1A-76D1-A1DB-C6C3E0E12311}"/>
               </a:ext>
             </a:extLst>
           </p:cNvPr>
@@ -19159,7 +19197,7 @@
           <p:cNvPr id="11" name="直線單箭頭接點 10">
             <a:extLst>
               <a:ext uri="{FF2B5EF4-FFF2-40B4-BE49-F238E27FC236}">
-                <a16:creationId xmlns:a16="http://schemas.microsoft.com/office/drawing/2014/main" id="{DDC4C070-AB51-0CAA-EDBE-089F5AAA836F}"/>
+                <a16:creationId xmlns:a16="http://schemas.microsoft.com/office/drawing/2014/main" id="{B8DE4FEB-43B1-09C8-F134-D434ADA18977}"/>
               </a:ext>
             </a:extLst>
           </p:cNvPr>
@@ -19201,7 +19239,7 @@
           <p:cNvPr id="12" name="矩形: 圓角 11">
             <a:extLst>
               <a:ext uri="{FF2B5EF4-FFF2-40B4-BE49-F238E27FC236}">
-                <a16:creationId xmlns:a16="http://schemas.microsoft.com/office/drawing/2014/main" id="{CE51B3BA-2411-0D3D-9D69-1EC6CA93FC3F}"/>
+                <a16:creationId xmlns:a16="http://schemas.microsoft.com/office/drawing/2014/main" id="{0043B606-D0AD-2386-A9A1-89F77BD65367}"/>
               </a:ext>
             </a:extLst>
           </p:cNvPr>
@@ -19271,7 +19309,7 @@
           <p:cNvPr id="13" name="文字方塊 12">
             <a:extLst>
               <a:ext uri="{FF2B5EF4-FFF2-40B4-BE49-F238E27FC236}">
-                <a16:creationId xmlns:a16="http://schemas.microsoft.com/office/drawing/2014/main" id="{A110D644-D1E8-FF10-ACA3-158F4F111E2C}"/>
+                <a16:creationId xmlns:a16="http://schemas.microsoft.com/office/drawing/2014/main" id="{24B16E5A-574C-00B7-5A59-0E6806B8AC70}"/>
               </a:ext>
             </a:extLst>
           </p:cNvPr>
@@ -19313,7 +19351,7 @@
           <p:cNvPr id="14" name="文字方塊 13">
             <a:extLst>
               <a:ext uri="{FF2B5EF4-FFF2-40B4-BE49-F238E27FC236}">
-                <a16:creationId xmlns:a16="http://schemas.microsoft.com/office/drawing/2014/main" id="{9C2E0DF6-86A3-EDAF-4345-C9541EA39C00}"/>
+                <a16:creationId xmlns:a16="http://schemas.microsoft.com/office/drawing/2014/main" id="{E071DD93-08F7-ACE8-51AD-2EC8CB92886B}"/>
               </a:ext>
             </a:extLst>
           </p:cNvPr>
@@ -19355,7 +19393,7 @@
           <p:cNvPr id="15" name="橢圓 14">
             <a:extLst>
               <a:ext uri="{FF2B5EF4-FFF2-40B4-BE49-F238E27FC236}">
-                <a16:creationId xmlns:a16="http://schemas.microsoft.com/office/drawing/2014/main" id="{650AE0CC-0226-9FF7-0FF2-C38C3EDFD847}"/>
+                <a16:creationId xmlns:a16="http://schemas.microsoft.com/office/drawing/2014/main" id="{9339B722-E1FD-B9B2-CB54-36B7C059EA2B}"/>
               </a:ext>
             </a:extLst>
           </p:cNvPr>
@@ -19441,7 +19479,7 @@
           <p:cNvPr id="16" name="直線單箭頭接點 15">
             <a:extLst>
               <a:ext uri="{FF2B5EF4-FFF2-40B4-BE49-F238E27FC236}">
-                <a16:creationId xmlns:a16="http://schemas.microsoft.com/office/drawing/2014/main" id="{56D4F318-8453-91DF-6278-3A3EDEE6A71D}"/>
+                <a16:creationId xmlns:a16="http://schemas.microsoft.com/office/drawing/2014/main" id="{5FA47E45-F81B-F1BB-FEB5-3D5B801A1F76}"/>
               </a:ext>
             </a:extLst>
           </p:cNvPr>
@@ -19483,7 +19521,7 @@
           <p:cNvPr id="17" name="矩形: 圓角 16">
             <a:extLst>
               <a:ext uri="{FF2B5EF4-FFF2-40B4-BE49-F238E27FC236}">
-                <a16:creationId xmlns:a16="http://schemas.microsoft.com/office/drawing/2014/main" id="{7F299EA2-54CD-EB57-D247-7B9D989D5991}"/>
+                <a16:creationId xmlns:a16="http://schemas.microsoft.com/office/drawing/2014/main" id="{DA4AF945-6D0A-101E-FB04-8AE74A142385}"/>
               </a:ext>
             </a:extLst>
           </p:cNvPr>
@@ -19553,7 +19591,7 @@
           <p:cNvPr id="18" name="文字方塊 17">
             <a:extLst>
               <a:ext uri="{FF2B5EF4-FFF2-40B4-BE49-F238E27FC236}">
-                <a16:creationId xmlns:a16="http://schemas.microsoft.com/office/drawing/2014/main" id="{DD36C167-19AA-F3CA-4E59-78CE20F7F74E}"/>
+                <a16:creationId xmlns:a16="http://schemas.microsoft.com/office/drawing/2014/main" id="{B3D3E7FA-648D-7268-21A7-3A826D9FCA08}"/>
               </a:ext>
             </a:extLst>
           </p:cNvPr>
@@ -19595,7 +19633,7 @@
           <p:cNvPr id="19" name="文字方塊 18">
             <a:extLst>
               <a:ext uri="{FF2B5EF4-FFF2-40B4-BE49-F238E27FC236}">
-                <a16:creationId xmlns:a16="http://schemas.microsoft.com/office/drawing/2014/main" id="{D602AF80-BE08-6EE8-6D63-625F42CF00C2}"/>
+                <a16:creationId xmlns:a16="http://schemas.microsoft.com/office/drawing/2014/main" id="{019DE08F-35B0-FB55-D8DB-90E4EFFB2303}"/>
               </a:ext>
             </a:extLst>
           </p:cNvPr>
@@ -19650,7 +19688,7 @@
           <p:cNvPr id="20" name="橢圓 19">
             <a:extLst>
               <a:ext uri="{FF2B5EF4-FFF2-40B4-BE49-F238E27FC236}">
-                <a16:creationId xmlns:a16="http://schemas.microsoft.com/office/drawing/2014/main" id="{4298EC4A-955A-37D7-9FA6-E8C8A955CB4E}"/>
+                <a16:creationId xmlns:a16="http://schemas.microsoft.com/office/drawing/2014/main" id="{2BBEC8AD-AD5A-EF33-8F42-52E145D65FE9}"/>
               </a:ext>
             </a:extLst>
           </p:cNvPr>
@@ -19736,7 +19774,7 @@
           <p:cNvPr id="21" name="直線單箭頭接點 20">
             <a:extLst>
               <a:ext uri="{FF2B5EF4-FFF2-40B4-BE49-F238E27FC236}">
-                <a16:creationId xmlns:a16="http://schemas.microsoft.com/office/drawing/2014/main" id="{BF684FEE-332D-0C9F-1911-8FE7FB77F3F0}"/>
+                <a16:creationId xmlns:a16="http://schemas.microsoft.com/office/drawing/2014/main" id="{D2B23785-4F6A-9F24-81FE-7BC47CA57B26}"/>
               </a:ext>
             </a:extLst>
           </p:cNvPr>
@@ -19778,7 +19816,7 @@
           <p:cNvPr id="22" name="矩形: 圓角 21">
             <a:extLst>
               <a:ext uri="{FF2B5EF4-FFF2-40B4-BE49-F238E27FC236}">
-                <a16:creationId xmlns:a16="http://schemas.microsoft.com/office/drawing/2014/main" id="{EAD1FF41-832C-1E5C-4FFD-EA42DF86725D}"/>
+                <a16:creationId xmlns:a16="http://schemas.microsoft.com/office/drawing/2014/main" id="{900E841B-533B-C71A-80B8-1316516B9231}"/>
               </a:ext>
             </a:extLst>
           </p:cNvPr>
@@ -19848,7 +19886,7 @@
           <p:cNvPr id="23" name="文字方塊 22">
             <a:extLst>
               <a:ext uri="{FF2B5EF4-FFF2-40B4-BE49-F238E27FC236}">
-                <a16:creationId xmlns:a16="http://schemas.microsoft.com/office/drawing/2014/main" id="{690ADADB-6F4B-4153-A014-DE5B6F117A44}"/>
+                <a16:creationId xmlns:a16="http://schemas.microsoft.com/office/drawing/2014/main" id="{6260EB38-6F41-7FD9-C8FE-BA5C71E7F361}"/>
               </a:ext>
             </a:extLst>
           </p:cNvPr>
@@ -19890,7 +19928,7 @@
           <p:cNvPr id="24" name="文字方塊 23">
             <a:extLst>
               <a:ext uri="{FF2B5EF4-FFF2-40B4-BE49-F238E27FC236}">
-                <a16:creationId xmlns:a16="http://schemas.microsoft.com/office/drawing/2014/main" id="{DA01B9A2-D71E-8E05-3560-37576479B975}"/>
+                <a16:creationId xmlns:a16="http://schemas.microsoft.com/office/drawing/2014/main" id="{AC348950-A82E-651A-2EA2-FB2AE71951E4}"/>
               </a:ext>
             </a:extLst>
           </p:cNvPr>
@@ -19954,7 +19992,7 @@
           <p:cNvPr id="25" name="橢圓 24">
             <a:extLst>
               <a:ext uri="{FF2B5EF4-FFF2-40B4-BE49-F238E27FC236}">
-                <a16:creationId xmlns:a16="http://schemas.microsoft.com/office/drawing/2014/main" id="{502376E2-6892-596A-BE5C-D5F6925BF9A3}"/>
+                <a16:creationId xmlns:a16="http://schemas.microsoft.com/office/drawing/2014/main" id="{2CD25D32-EEE5-2BC0-D329-90A729DF74E8}"/>
               </a:ext>
             </a:extLst>
           </p:cNvPr>
@@ -20040,7 +20078,7 @@
           <p:cNvPr id="26" name="矩形: 圓角 25">
             <a:extLst>
               <a:ext uri="{FF2B5EF4-FFF2-40B4-BE49-F238E27FC236}">
-                <a16:creationId xmlns:a16="http://schemas.microsoft.com/office/drawing/2014/main" id="{43241656-215F-2A2D-4B9C-2A363B725835}"/>
+                <a16:creationId xmlns:a16="http://schemas.microsoft.com/office/drawing/2014/main" id="{25BB4F40-F292-5EFD-9CCB-068C69C4F1AD}"/>
               </a:ext>
             </a:extLst>
           </p:cNvPr>
@@ -20110,7 +20148,7 @@
           <p:cNvPr id="27" name="文字方塊 26">
             <a:extLst>
               <a:ext uri="{FF2B5EF4-FFF2-40B4-BE49-F238E27FC236}">
-                <a16:creationId xmlns:a16="http://schemas.microsoft.com/office/drawing/2014/main" id="{65C9378F-99C4-F64B-678B-308153ED3221}"/>
+                <a16:creationId xmlns:a16="http://schemas.microsoft.com/office/drawing/2014/main" id="{0D1845BF-2305-B829-93A8-5ADB6B9BC567}"/>
               </a:ext>
             </a:extLst>
           </p:cNvPr>
@@ -20152,7 +20190,7 @@
           <p:cNvPr id="28" name="文字方塊 27">
             <a:extLst>
               <a:ext uri="{FF2B5EF4-FFF2-40B4-BE49-F238E27FC236}">
-                <a16:creationId xmlns:a16="http://schemas.microsoft.com/office/drawing/2014/main" id="{611D61B2-3853-7E1E-DA07-91D81960D0AD}"/>
+                <a16:creationId xmlns:a16="http://schemas.microsoft.com/office/drawing/2014/main" id="{45DDCA34-A94A-7CF1-79FB-370B5D696EE4}"/>
               </a:ext>
             </a:extLst>
           </p:cNvPr>
@@ -20227,7 +20265,7 @@
           <p:cNvPr id="29" name="矩形: 圓角 28">
             <a:extLst>
               <a:ext uri="{FF2B5EF4-FFF2-40B4-BE49-F238E27FC236}">
-                <a16:creationId xmlns:a16="http://schemas.microsoft.com/office/drawing/2014/main" id="{FF0164F7-EE00-8556-4592-184A60E5561C}"/>
+                <a16:creationId xmlns:a16="http://schemas.microsoft.com/office/drawing/2014/main" id="{9FA66FBB-D4DC-A733-9632-B159F4E7A562}"/>
               </a:ext>
             </a:extLst>
           </p:cNvPr>
@@ -20319,7 +20357,7 @@
           <p:cNvPr id="30" name="矩形: 圓角 29">
             <a:extLst>
               <a:ext uri="{FF2B5EF4-FFF2-40B4-BE49-F238E27FC236}">
-                <a16:creationId xmlns:a16="http://schemas.microsoft.com/office/drawing/2014/main" id="{2E5B5FEC-BB6E-ABDD-9B69-A5E97498DFAF}"/>
+                <a16:creationId xmlns:a16="http://schemas.microsoft.com/office/drawing/2014/main" id="{9256AF2B-6B44-962E-5DD1-C39F9046252A}"/>
               </a:ext>
             </a:extLst>
           </p:cNvPr>
@@ -20409,7 +20447,7 @@
     </p:spTree>
     <p:extLst>
       <p:ext uri="{BB962C8B-B14F-4D97-AF65-F5344CB8AC3E}">
-        <p14:creationId xmlns:p14="http://schemas.microsoft.com/office/powerpoint/2010/main" val="1514041228"/>
+        <p14:creationId xmlns:p14="http://schemas.microsoft.com/office/powerpoint/2010/main" val="2987759690"/>
       </p:ext>
     </p:extLst>
   </p:cSld>
@@ -20441,7 +20479,7 @@
           <p:cNvPr id="2" name="標題 1">
             <a:extLst>
               <a:ext uri="{FF2B5EF4-FFF2-40B4-BE49-F238E27FC236}">
-                <a16:creationId xmlns:a16="http://schemas.microsoft.com/office/drawing/2014/main" id="{20CD41EF-948B-6929-A662-11E50D18DC5B}"/>
+                <a16:creationId xmlns:a16="http://schemas.microsoft.com/office/drawing/2014/main" id="{6B4F10AA-2117-9B8A-C639-CD2E90F998E5}"/>
               </a:ext>
             </a:extLst>
           </p:cNvPr>
@@ -20527,7 +20565,7 @@
           <p:cNvPr id="3" name="文字方塊 2">
             <a:extLst>
               <a:ext uri="{FF2B5EF4-FFF2-40B4-BE49-F238E27FC236}">
-                <a16:creationId xmlns:a16="http://schemas.microsoft.com/office/drawing/2014/main" id="{54108BC0-227A-2627-F1DF-5B5793C7C4EC}"/>
+                <a16:creationId xmlns:a16="http://schemas.microsoft.com/office/drawing/2014/main" id="{B26ED3EB-96C8-B236-A32D-B76295886591}"/>
               </a:ext>
             </a:extLst>
           </p:cNvPr>
@@ -20580,7 +20618,7 @@
           <p:cNvPr id="4" name="投影片編號版面配置區 3">
             <a:extLst>
               <a:ext uri="{FF2B5EF4-FFF2-40B4-BE49-F238E27FC236}">
-                <a16:creationId xmlns:a16="http://schemas.microsoft.com/office/drawing/2014/main" id="{17A79104-7B9D-C328-20F8-A16E689764A4}"/>
+                <a16:creationId xmlns:a16="http://schemas.microsoft.com/office/drawing/2014/main" id="{AE213B5F-3D22-4982-7E7A-ED77CDAE98BE}"/>
               </a:ext>
             </a:extLst>
           </p:cNvPr>
@@ -20596,7 +20634,7 @@
           <a:bodyPr/>
           <a:lstStyle/>
           <a:p>
-            <a:fld id="{82E2CFFA-BCF7-4941-9F1D-DE24BA5E8539}" type="slidenum">
+            <a:fld id="{62F1B366-B12D-4E81-AEC3-117FBF7F511D}" type="slidenum">
               <a:rPr lang="zh-TW" altLang="en-US" smtClean="0"/>
               <a:t>6</a:t>
             </a:fld>
@@ -20609,7 +20647,7 @@
           <p:cNvPr id="5" name="矩形: 圓角 4">
             <a:extLst>
               <a:ext uri="{FF2B5EF4-FFF2-40B4-BE49-F238E27FC236}">
-                <a16:creationId xmlns:a16="http://schemas.microsoft.com/office/drawing/2014/main" id="{8554873E-5E74-01FF-3CAA-634EC61296A7}"/>
+                <a16:creationId xmlns:a16="http://schemas.microsoft.com/office/drawing/2014/main" id="{74DAA88A-BCF9-268C-A08E-0E25E418E1D3}"/>
               </a:ext>
             </a:extLst>
           </p:cNvPr>
@@ -20711,7 +20749,7 @@
           <p:cNvPr id="6" name="矩形 5">
             <a:extLst>
               <a:ext uri="{FF2B5EF4-FFF2-40B4-BE49-F238E27FC236}">
-                <a16:creationId xmlns:a16="http://schemas.microsoft.com/office/drawing/2014/main" id="{43D9DBEF-4A07-6C28-97D9-DC841F3F5648}"/>
+                <a16:creationId xmlns:a16="http://schemas.microsoft.com/office/drawing/2014/main" id="{C469DD38-F87A-784B-B823-FB393261C105}"/>
               </a:ext>
             </a:extLst>
           </p:cNvPr>
@@ -20779,7 +20817,7 @@
           <p:cNvPr id="7" name="矩形 6">
             <a:extLst>
               <a:ext uri="{FF2B5EF4-FFF2-40B4-BE49-F238E27FC236}">
-                <a16:creationId xmlns:a16="http://schemas.microsoft.com/office/drawing/2014/main" id="{0DC3C2B0-5ECE-3B29-9207-B0540D93EC90}"/>
+                <a16:creationId xmlns:a16="http://schemas.microsoft.com/office/drawing/2014/main" id="{EC5D9766-9342-E32D-63EC-B297296BA3D8}"/>
               </a:ext>
             </a:extLst>
           </p:cNvPr>
@@ -20847,7 +20885,7 @@
           <p:cNvPr id="8" name="矩形 7">
             <a:extLst>
               <a:ext uri="{FF2B5EF4-FFF2-40B4-BE49-F238E27FC236}">
-                <a16:creationId xmlns:a16="http://schemas.microsoft.com/office/drawing/2014/main" id="{E8A94011-2A4B-EC3F-32C4-FA072B03FBD6}"/>
+                <a16:creationId xmlns:a16="http://schemas.microsoft.com/office/drawing/2014/main" id="{BC639D19-C155-565C-65FC-C9864E07DF7D}"/>
               </a:ext>
             </a:extLst>
           </p:cNvPr>
@@ -20915,7 +20953,7 @@
           <p:cNvPr id="9" name="矩形 8">
             <a:extLst>
               <a:ext uri="{FF2B5EF4-FFF2-40B4-BE49-F238E27FC236}">
-                <a16:creationId xmlns:a16="http://schemas.microsoft.com/office/drawing/2014/main" id="{FC90BC14-5841-0FB0-73B4-EF8961771247}"/>
+                <a16:creationId xmlns:a16="http://schemas.microsoft.com/office/drawing/2014/main" id="{01E438AA-F4E5-8C6F-11F3-56FECD701AF4}"/>
               </a:ext>
             </a:extLst>
           </p:cNvPr>
@@ -20983,7 +21021,7 @@
           <p:cNvPr id="10" name="矩形 9">
             <a:extLst>
               <a:ext uri="{FF2B5EF4-FFF2-40B4-BE49-F238E27FC236}">
-                <a16:creationId xmlns:a16="http://schemas.microsoft.com/office/drawing/2014/main" id="{BA8A8AF5-0459-A0B3-F07E-A7D50C972E94}"/>
+                <a16:creationId xmlns:a16="http://schemas.microsoft.com/office/drawing/2014/main" id="{E239C1E9-B721-89FD-7F83-08AFF1552596}"/>
               </a:ext>
             </a:extLst>
           </p:cNvPr>
@@ -21051,7 +21089,7 @@
           <p:cNvPr id="11" name="矩形 10">
             <a:extLst>
               <a:ext uri="{FF2B5EF4-FFF2-40B4-BE49-F238E27FC236}">
-                <a16:creationId xmlns:a16="http://schemas.microsoft.com/office/drawing/2014/main" id="{55DE315E-39BF-2558-DF43-E6E0B17FE0E3}"/>
+                <a16:creationId xmlns:a16="http://schemas.microsoft.com/office/drawing/2014/main" id="{3B2E56DD-C895-F153-852D-4701B549911B}"/>
               </a:ext>
             </a:extLst>
           </p:cNvPr>
@@ -21119,7 +21157,7 @@
           <p:cNvPr id="12" name="矩形 11">
             <a:extLst>
               <a:ext uri="{FF2B5EF4-FFF2-40B4-BE49-F238E27FC236}">
-                <a16:creationId xmlns:a16="http://schemas.microsoft.com/office/drawing/2014/main" id="{2386417A-26D6-B5C1-E057-A8B0120B256E}"/>
+                <a16:creationId xmlns:a16="http://schemas.microsoft.com/office/drawing/2014/main" id="{252CF3D6-C325-E6EA-DD1C-A7F54FCC3959}"/>
               </a:ext>
             </a:extLst>
           </p:cNvPr>
@@ -21187,7 +21225,7 @@
           <p:cNvPr id="13" name="矩形 12">
             <a:extLst>
               <a:ext uri="{FF2B5EF4-FFF2-40B4-BE49-F238E27FC236}">
-                <a16:creationId xmlns:a16="http://schemas.microsoft.com/office/drawing/2014/main" id="{B1416519-280A-464B-0A9B-46AECC21B5DC}"/>
+                <a16:creationId xmlns:a16="http://schemas.microsoft.com/office/drawing/2014/main" id="{A5D9AD41-07E7-C2AB-3B9B-D6C53EAD0876}"/>
               </a:ext>
             </a:extLst>
           </p:cNvPr>
@@ -21255,7 +21293,7 @@
           <p:cNvPr id="14" name="矩形 13">
             <a:extLst>
               <a:ext uri="{FF2B5EF4-FFF2-40B4-BE49-F238E27FC236}">
-                <a16:creationId xmlns:a16="http://schemas.microsoft.com/office/drawing/2014/main" id="{631C999F-BC0C-E756-D8DB-B8B2E6472210}"/>
+                <a16:creationId xmlns:a16="http://schemas.microsoft.com/office/drawing/2014/main" id="{340BA71E-5233-A79A-410D-6F94DB202EFD}"/>
               </a:ext>
             </a:extLst>
           </p:cNvPr>
@@ -21323,7 +21361,7 @@
           <p:cNvPr id="15" name="矩形 14">
             <a:extLst>
               <a:ext uri="{FF2B5EF4-FFF2-40B4-BE49-F238E27FC236}">
-                <a16:creationId xmlns:a16="http://schemas.microsoft.com/office/drawing/2014/main" id="{E6B9560F-1538-1EDF-FAC7-894A240991D7}"/>
+                <a16:creationId xmlns:a16="http://schemas.microsoft.com/office/drawing/2014/main" id="{79599C46-F5A2-68DB-445F-D91E5C5206F4}"/>
               </a:ext>
             </a:extLst>
           </p:cNvPr>
@@ -21391,7 +21429,7 @@
           <p:cNvPr id="16" name="矩形: 圓角 15">
             <a:extLst>
               <a:ext uri="{FF2B5EF4-FFF2-40B4-BE49-F238E27FC236}">
-                <a16:creationId xmlns:a16="http://schemas.microsoft.com/office/drawing/2014/main" id="{9608DA90-2768-30AB-D39B-1151955035C9}"/>
+                <a16:creationId xmlns:a16="http://schemas.microsoft.com/office/drawing/2014/main" id="{A221365A-D6D7-3C66-4ABB-FB7BF05EF774}"/>
               </a:ext>
             </a:extLst>
           </p:cNvPr>
@@ -21461,7 +21499,7 @@
           <p:cNvPr id="17" name="文字方塊 16">
             <a:extLst>
               <a:ext uri="{FF2B5EF4-FFF2-40B4-BE49-F238E27FC236}">
-                <a16:creationId xmlns:a16="http://schemas.microsoft.com/office/drawing/2014/main" id="{10F63FA9-ED39-4C56-6FAC-A98C9E15C77E}"/>
+                <a16:creationId xmlns:a16="http://schemas.microsoft.com/office/drawing/2014/main" id="{C8889136-748F-6D97-F13E-151751864DD0}"/>
               </a:ext>
             </a:extLst>
           </p:cNvPr>
@@ -21547,7 +21585,7 @@
           <p:cNvPr id="18" name="矩形: 圓角 17">
             <a:extLst>
               <a:ext uri="{FF2B5EF4-FFF2-40B4-BE49-F238E27FC236}">
-                <a16:creationId xmlns:a16="http://schemas.microsoft.com/office/drawing/2014/main" id="{344CE225-E4C5-043C-FC15-318CA48F5A8C}"/>
+                <a16:creationId xmlns:a16="http://schemas.microsoft.com/office/drawing/2014/main" id="{E94AC85F-4C33-BBC2-ABBE-7DBBF5299402}"/>
               </a:ext>
             </a:extLst>
           </p:cNvPr>
@@ -21649,7 +21687,7 @@
           <p:cNvPr id="19" name="矩形 18">
             <a:extLst>
               <a:ext uri="{FF2B5EF4-FFF2-40B4-BE49-F238E27FC236}">
-                <a16:creationId xmlns:a16="http://schemas.microsoft.com/office/drawing/2014/main" id="{02B3218A-767D-80C4-A376-36B7C150CA0E}"/>
+                <a16:creationId xmlns:a16="http://schemas.microsoft.com/office/drawing/2014/main" id="{1012E3A4-04D4-DAC1-DEDA-D168DE239FDF}"/>
               </a:ext>
             </a:extLst>
           </p:cNvPr>
@@ -21717,7 +21755,7 @@
           <p:cNvPr id="20" name="矩形 19">
             <a:extLst>
               <a:ext uri="{FF2B5EF4-FFF2-40B4-BE49-F238E27FC236}">
-                <a16:creationId xmlns:a16="http://schemas.microsoft.com/office/drawing/2014/main" id="{6D8D0661-2FCA-8F57-05A2-AD0FEFC1EC5F}"/>
+                <a16:creationId xmlns:a16="http://schemas.microsoft.com/office/drawing/2014/main" id="{4A94FDB6-DFCA-611D-BF52-222C62BC8EFB}"/>
               </a:ext>
             </a:extLst>
           </p:cNvPr>
@@ -21785,7 +21823,7 @@
           <p:cNvPr id="21" name="矩形 20">
             <a:extLst>
               <a:ext uri="{FF2B5EF4-FFF2-40B4-BE49-F238E27FC236}">
-                <a16:creationId xmlns:a16="http://schemas.microsoft.com/office/drawing/2014/main" id="{9258F7A0-F997-DD26-B2A2-CC2CB5C4FD19}"/>
+                <a16:creationId xmlns:a16="http://schemas.microsoft.com/office/drawing/2014/main" id="{7B059DD7-3065-BBC5-5856-260A85E4732B}"/>
               </a:ext>
             </a:extLst>
           </p:cNvPr>
@@ -21853,7 +21891,7 @@
           <p:cNvPr id="22" name="矩形 21">
             <a:extLst>
               <a:ext uri="{FF2B5EF4-FFF2-40B4-BE49-F238E27FC236}">
-                <a16:creationId xmlns:a16="http://schemas.microsoft.com/office/drawing/2014/main" id="{F6CAB65F-DE0C-DCFA-7515-612826A21924}"/>
+                <a16:creationId xmlns:a16="http://schemas.microsoft.com/office/drawing/2014/main" id="{1F0F9E9F-BD48-444B-3134-CA0654DFE10B}"/>
               </a:ext>
             </a:extLst>
           </p:cNvPr>
@@ -21921,7 +21959,7 @@
           <p:cNvPr id="23" name="矩形 22">
             <a:extLst>
               <a:ext uri="{FF2B5EF4-FFF2-40B4-BE49-F238E27FC236}">
-                <a16:creationId xmlns:a16="http://schemas.microsoft.com/office/drawing/2014/main" id="{6F3CFD4F-BE27-647B-8418-8A4D5E6F9150}"/>
+                <a16:creationId xmlns:a16="http://schemas.microsoft.com/office/drawing/2014/main" id="{13B4C8C2-54DF-6938-4618-3821F90E8A5C}"/>
               </a:ext>
             </a:extLst>
           </p:cNvPr>
@@ -21989,7 +22027,7 @@
           <p:cNvPr id="24" name="矩形 23">
             <a:extLst>
               <a:ext uri="{FF2B5EF4-FFF2-40B4-BE49-F238E27FC236}">
-                <a16:creationId xmlns:a16="http://schemas.microsoft.com/office/drawing/2014/main" id="{FADA76C3-B3DC-7C8C-7CC0-FBD4DE9510F5}"/>
+                <a16:creationId xmlns:a16="http://schemas.microsoft.com/office/drawing/2014/main" id="{8CBA1E05-B15B-3E3B-E27C-B6173B493341}"/>
               </a:ext>
             </a:extLst>
           </p:cNvPr>
@@ -22057,7 +22095,7 @@
           <p:cNvPr id="25" name="矩形 24">
             <a:extLst>
               <a:ext uri="{FF2B5EF4-FFF2-40B4-BE49-F238E27FC236}">
-                <a16:creationId xmlns:a16="http://schemas.microsoft.com/office/drawing/2014/main" id="{B6DCDFD8-B28C-A882-2250-FAD374D6D395}"/>
+                <a16:creationId xmlns:a16="http://schemas.microsoft.com/office/drawing/2014/main" id="{AAE8A455-DFFF-445E-0708-A36F5D60F66A}"/>
               </a:ext>
             </a:extLst>
           </p:cNvPr>
@@ -22125,7 +22163,7 @@
           <p:cNvPr id="26" name="矩形 25">
             <a:extLst>
               <a:ext uri="{FF2B5EF4-FFF2-40B4-BE49-F238E27FC236}">
-                <a16:creationId xmlns:a16="http://schemas.microsoft.com/office/drawing/2014/main" id="{27EFB28E-40B6-C0D3-E661-A1FC6C71F8E7}"/>
+                <a16:creationId xmlns:a16="http://schemas.microsoft.com/office/drawing/2014/main" id="{54119CFA-A0D7-7141-1A67-C86B49115A6A}"/>
               </a:ext>
             </a:extLst>
           </p:cNvPr>
@@ -22193,7 +22231,7 @@
           <p:cNvPr id="27" name="矩形 26">
             <a:extLst>
               <a:ext uri="{FF2B5EF4-FFF2-40B4-BE49-F238E27FC236}">
-                <a16:creationId xmlns:a16="http://schemas.microsoft.com/office/drawing/2014/main" id="{EF8257F2-7802-51D8-CA56-CF53DEFFE990}"/>
+                <a16:creationId xmlns:a16="http://schemas.microsoft.com/office/drawing/2014/main" id="{1B8E5795-B867-718D-5EC7-65950D07C8F9}"/>
               </a:ext>
             </a:extLst>
           </p:cNvPr>
@@ -22261,7 +22299,7 @@
           <p:cNvPr id="28" name="矩形 27">
             <a:extLst>
               <a:ext uri="{FF2B5EF4-FFF2-40B4-BE49-F238E27FC236}">
-                <a16:creationId xmlns:a16="http://schemas.microsoft.com/office/drawing/2014/main" id="{CD5BC6F9-545B-8C89-D54B-EF53DDC2885F}"/>
+                <a16:creationId xmlns:a16="http://schemas.microsoft.com/office/drawing/2014/main" id="{C08F42F1-F2ED-1C96-FD54-FEB7F00E7924}"/>
               </a:ext>
             </a:extLst>
           </p:cNvPr>
@@ -22329,7 +22367,7 @@
           <p:cNvPr id="29" name="矩形: 圓角 28">
             <a:extLst>
               <a:ext uri="{FF2B5EF4-FFF2-40B4-BE49-F238E27FC236}">
-                <a16:creationId xmlns:a16="http://schemas.microsoft.com/office/drawing/2014/main" id="{1A854796-5DC1-B301-EA87-FBAB150A7DFF}"/>
+                <a16:creationId xmlns:a16="http://schemas.microsoft.com/office/drawing/2014/main" id="{131DDBB6-D496-4D86-E9C7-56786D12F76B}"/>
               </a:ext>
             </a:extLst>
           </p:cNvPr>
@@ -22399,7 +22437,7 @@
           <p:cNvPr id="30" name="文字方塊 29">
             <a:extLst>
               <a:ext uri="{FF2B5EF4-FFF2-40B4-BE49-F238E27FC236}">
-                <a16:creationId xmlns:a16="http://schemas.microsoft.com/office/drawing/2014/main" id="{4293212A-2DAB-5B26-6EA4-536CBDD39391}"/>
+                <a16:creationId xmlns:a16="http://schemas.microsoft.com/office/drawing/2014/main" id="{16DD986B-CFAB-BEBF-502A-256ED1C9B491}"/>
               </a:ext>
             </a:extLst>
           </p:cNvPr>
@@ -22507,7 +22545,7 @@
           <p:cNvPr id="31" name="矩形: 圓角 30">
             <a:extLst>
               <a:ext uri="{FF2B5EF4-FFF2-40B4-BE49-F238E27FC236}">
-                <a16:creationId xmlns:a16="http://schemas.microsoft.com/office/drawing/2014/main" id="{0CE1AFCA-2D57-47B5-40C3-466873D23266}"/>
+                <a16:creationId xmlns:a16="http://schemas.microsoft.com/office/drawing/2014/main" id="{8B704415-4BD8-90F0-15D1-DD4C71D7B061}"/>
               </a:ext>
             </a:extLst>
           </p:cNvPr>
@@ -22609,7 +22647,7 @@
           <p:cNvPr id="32" name="矩形 31">
             <a:extLst>
               <a:ext uri="{FF2B5EF4-FFF2-40B4-BE49-F238E27FC236}">
-                <a16:creationId xmlns:a16="http://schemas.microsoft.com/office/drawing/2014/main" id="{DB75A0B1-C133-30EE-2E71-A87B3329F38D}"/>
+                <a16:creationId xmlns:a16="http://schemas.microsoft.com/office/drawing/2014/main" id="{71D48667-C014-310C-16F0-D0B3A6062281}"/>
               </a:ext>
             </a:extLst>
           </p:cNvPr>
@@ -22677,7 +22715,7 @@
           <p:cNvPr id="33" name="矩形 32">
             <a:extLst>
               <a:ext uri="{FF2B5EF4-FFF2-40B4-BE49-F238E27FC236}">
-                <a16:creationId xmlns:a16="http://schemas.microsoft.com/office/drawing/2014/main" id="{329229E1-4A51-6092-BA89-CCA80730424F}"/>
+                <a16:creationId xmlns:a16="http://schemas.microsoft.com/office/drawing/2014/main" id="{F36DB90E-2119-617D-FEFA-0F0994FB1140}"/>
               </a:ext>
             </a:extLst>
           </p:cNvPr>
@@ -22745,7 +22783,7 @@
           <p:cNvPr id="34" name="矩形 33">
             <a:extLst>
               <a:ext uri="{FF2B5EF4-FFF2-40B4-BE49-F238E27FC236}">
-                <a16:creationId xmlns:a16="http://schemas.microsoft.com/office/drawing/2014/main" id="{7B8E4EF0-D159-9D44-F70A-D6ED674971EF}"/>
+                <a16:creationId xmlns:a16="http://schemas.microsoft.com/office/drawing/2014/main" id="{C4D69274-C44C-FF22-9A24-FF2863DA2EAD}"/>
               </a:ext>
             </a:extLst>
           </p:cNvPr>
@@ -22813,7 +22851,7 @@
           <p:cNvPr id="35" name="矩形 34">
             <a:extLst>
               <a:ext uri="{FF2B5EF4-FFF2-40B4-BE49-F238E27FC236}">
-                <a16:creationId xmlns:a16="http://schemas.microsoft.com/office/drawing/2014/main" id="{4960DC44-D9C2-EDDC-6726-B55D80627A4C}"/>
+                <a16:creationId xmlns:a16="http://schemas.microsoft.com/office/drawing/2014/main" id="{8EF49FDC-200C-AB54-D161-C3F51354DDD9}"/>
               </a:ext>
             </a:extLst>
           </p:cNvPr>
@@ -22881,7 +22919,7 @@
           <p:cNvPr id="36" name="矩形 35">
             <a:extLst>
               <a:ext uri="{FF2B5EF4-FFF2-40B4-BE49-F238E27FC236}">
-                <a16:creationId xmlns:a16="http://schemas.microsoft.com/office/drawing/2014/main" id="{06AFD729-40BE-8BDA-0606-84EBE1CF8DB0}"/>
+                <a16:creationId xmlns:a16="http://schemas.microsoft.com/office/drawing/2014/main" id="{8FD903B7-579D-1E88-06DE-2719D24A9019}"/>
               </a:ext>
             </a:extLst>
           </p:cNvPr>
@@ -22949,7 +22987,7 @@
           <p:cNvPr id="37" name="矩形 36">
             <a:extLst>
               <a:ext uri="{FF2B5EF4-FFF2-40B4-BE49-F238E27FC236}">
-                <a16:creationId xmlns:a16="http://schemas.microsoft.com/office/drawing/2014/main" id="{EC298146-323A-70E0-B2A8-9888643A32AE}"/>
+                <a16:creationId xmlns:a16="http://schemas.microsoft.com/office/drawing/2014/main" id="{2F8C292D-579A-7C27-B125-3105C7534300}"/>
               </a:ext>
             </a:extLst>
           </p:cNvPr>
@@ -23017,7 +23055,7 @@
           <p:cNvPr id="38" name="矩形 37">
             <a:extLst>
               <a:ext uri="{FF2B5EF4-FFF2-40B4-BE49-F238E27FC236}">
-                <a16:creationId xmlns:a16="http://schemas.microsoft.com/office/drawing/2014/main" id="{1AA174A0-0288-16B3-3CE6-DFB7272A06BA}"/>
+                <a16:creationId xmlns:a16="http://schemas.microsoft.com/office/drawing/2014/main" id="{4BC3C824-BCB7-2888-38E7-CEEA6193944D}"/>
               </a:ext>
             </a:extLst>
           </p:cNvPr>
@@ -23085,7 +23123,7 @@
           <p:cNvPr id="39" name="矩形 38">
             <a:extLst>
               <a:ext uri="{FF2B5EF4-FFF2-40B4-BE49-F238E27FC236}">
-                <a16:creationId xmlns:a16="http://schemas.microsoft.com/office/drawing/2014/main" id="{B32DF8FF-CF92-392B-6614-630D03067518}"/>
+                <a16:creationId xmlns:a16="http://schemas.microsoft.com/office/drawing/2014/main" id="{00371816-E156-6A46-445C-5E92166F0DC3}"/>
               </a:ext>
             </a:extLst>
           </p:cNvPr>
@@ -23153,7 +23191,7 @@
           <p:cNvPr id="40" name="矩形 39">
             <a:extLst>
               <a:ext uri="{FF2B5EF4-FFF2-40B4-BE49-F238E27FC236}">
-                <a16:creationId xmlns:a16="http://schemas.microsoft.com/office/drawing/2014/main" id="{2BC36A71-9949-F936-0DF9-E675E11182E1}"/>
+                <a16:creationId xmlns:a16="http://schemas.microsoft.com/office/drawing/2014/main" id="{E1249865-81A4-4E72-4201-ADBF40F28277}"/>
               </a:ext>
             </a:extLst>
           </p:cNvPr>
@@ -23221,7 +23259,7 @@
           <p:cNvPr id="41" name="矩形 40">
             <a:extLst>
               <a:ext uri="{FF2B5EF4-FFF2-40B4-BE49-F238E27FC236}">
-                <a16:creationId xmlns:a16="http://schemas.microsoft.com/office/drawing/2014/main" id="{152406B4-CEDC-2647-7DDA-3FB8D105B889}"/>
+                <a16:creationId xmlns:a16="http://schemas.microsoft.com/office/drawing/2014/main" id="{F3498628-9697-06E8-9122-1D2AADA0CB14}"/>
               </a:ext>
             </a:extLst>
           </p:cNvPr>
@@ -23289,7 +23327,7 @@
           <p:cNvPr id="42" name="矩形: 圓角 41">
             <a:extLst>
               <a:ext uri="{FF2B5EF4-FFF2-40B4-BE49-F238E27FC236}">
-                <a16:creationId xmlns:a16="http://schemas.microsoft.com/office/drawing/2014/main" id="{73413050-9082-D86C-0C96-9576D0F0F718}"/>
+                <a16:creationId xmlns:a16="http://schemas.microsoft.com/office/drawing/2014/main" id="{71CC7F3D-66AF-6DEF-E714-3E659C09C164}"/>
               </a:ext>
             </a:extLst>
           </p:cNvPr>
@@ -23359,7 +23397,7 @@
           <p:cNvPr id="43" name="文字方塊 42">
             <a:extLst>
               <a:ext uri="{FF2B5EF4-FFF2-40B4-BE49-F238E27FC236}">
-                <a16:creationId xmlns:a16="http://schemas.microsoft.com/office/drawing/2014/main" id="{D09D1E5A-B126-F2A6-7F93-51C541549954}"/>
+                <a16:creationId xmlns:a16="http://schemas.microsoft.com/office/drawing/2014/main" id="{95D9D5C1-7286-A63D-F503-3AAE2E4F7838}"/>
               </a:ext>
             </a:extLst>
           </p:cNvPr>
@@ -23467,7 +23505,7 @@
           <p:cNvPr id="44" name="矩形: 圓角 43">
             <a:extLst>
               <a:ext uri="{FF2B5EF4-FFF2-40B4-BE49-F238E27FC236}">
-                <a16:creationId xmlns:a16="http://schemas.microsoft.com/office/drawing/2014/main" id="{990E9CE2-098A-60E2-267C-6731F857CD5A}"/>
+                <a16:creationId xmlns:a16="http://schemas.microsoft.com/office/drawing/2014/main" id="{20899E6D-3FE4-5C11-670B-C1650464C56E}"/>
               </a:ext>
             </a:extLst>
           </p:cNvPr>
@@ -23547,7 +23585,7 @@
           <p:cNvPr id="45" name="矩形 44">
             <a:extLst>
               <a:ext uri="{FF2B5EF4-FFF2-40B4-BE49-F238E27FC236}">
-                <a16:creationId xmlns:a16="http://schemas.microsoft.com/office/drawing/2014/main" id="{BBF4B874-A563-F10C-05D6-A2420CCD70F4}"/>
+                <a16:creationId xmlns:a16="http://schemas.microsoft.com/office/drawing/2014/main" id="{CF715659-1776-F411-549A-208DD8AEF891}"/>
               </a:ext>
             </a:extLst>
           </p:cNvPr>
@@ -23615,7 +23653,7 @@
           <p:cNvPr id="46" name="矩形 45">
             <a:extLst>
               <a:ext uri="{FF2B5EF4-FFF2-40B4-BE49-F238E27FC236}">
-                <a16:creationId xmlns:a16="http://schemas.microsoft.com/office/drawing/2014/main" id="{B0D29D27-7A68-D430-6133-E0EB9C504C53}"/>
+                <a16:creationId xmlns:a16="http://schemas.microsoft.com/office/drawing/2014/main" id="{0E34DB94-7964-12FA-FE03-67DA58202BCF}"/>
               </a:ext>
             </a:extLst>
           </p:cNvPr>
@@ -23683,7 +23721,7 @@
           <p:cNvPr id="47" name="矩形 46">
             <a:extLst>
               <a:ext uri="{FF2B5EF4-FFF2-40B4-BE49-F238E27FC236}">
-                <a16:creationId xmlns:a16="http://schemas.microsoft.com/office/drawing/2014/main" id="{65CEAB1B-6A74-F1D7-BB69-E9820C72B530}"/>
+                <a16:creationId xmlns:a16="http://schemas.microsoft.com/office/drawing/2014/main" id="{8EF1FC6C-D102-ABA9-6E5A-423B623636D0}"/>
               </a:ext>
             </a:extLst>
           </p:cNvPr>
@@ -23751,7 +23789,7 @@
           <p:cNvPr id="48" name="矩形 47">
             <a:extLst>
               <a:ext uri="{FF2B5EF4-FFF2-40B4-BE49-F238E27FC236}">
-                <a16:creationId xmlns:a16="http://schemas.microsoft.com/office/drawing/2014/main" id="{44311194-A807-36FF-4F88-C1A1FCE48C64}"/>
+                <a16:creationId xmlns:a16="http://schemas.microsoft.com/office/drawing/2014/main" id="{E814032F-DBF3-49A7-C3D0-55E42E632F50}"/>
               </a:ext>
             </a:extLst>
           </p:cNvPr>
@@ -23819,7 +23857,7 @@
           <p:cNvPr id="49" name="矩形 48">
             <a:extLst>
               <a:ext uri="{FF2B5EF4-FFF2-40B4-BE49-F238E27FC236}">
-                <a16:creationId xmlns:a16="http://schemas.microsoft.com/office/drawing/2014/main" id="{AA0B981D-F339-6CBD-3887-7805278DA658}"/>
+                <a16:creationId xmlns:a16="http://schemas.microsoft.com/office/drawing/2014/main" id="{ECFA5BDD-88C3-FC26-25C9-1EDFDD67BD6D}"/>
               </a:ext>
             </a:extLst>
           </p:cNvPr>
@@ -23887,7 +23925,7 @@
           <p:cNvPr id="50" name="矩形 49">
             <a:extLst>
               <a:ext uri="{FF2B5EF4-FFF2-40B4-BE49-F238E27FC236}">
-                <a16:creationId xmlns:a16="http://schemas.microsoft.com/office/drawing/2014/main" id="{5B3DEB77-6A84-9766-E54B-AEDFBF11E361}"/>
+                <a16:creationId xmlns:a16="http://schemas.microsoft.com/office/drawing/2014/main" id="{C08513CD-6B51-A047-4862-80E26CEEED79}"/>
               </a:ext>
             </a:extLst>
           </p:cNvPr>
@@ -23955,7 +23993,7 @@
           <p:cNvPr id="51" name="矩形 50">
             <a:extLst>
               <a:ext uri="{FF2B5EF4-FFF2-40B4-BE49-F238E27FC236}">
-                <a16:creationId xmlns:a16="http://schemas.microsoft.com/office/drawing/2014/main" id="{12B0DAA3-3B36-E020-FA8F-D0D3FF29EE17}"/>
+                <a16:creationId xmlns:a16="http://schemas.microsoft.com/office/drawing/2014/main" id="{19C172FF-5E3B-E091-E90A-318779AC21C4}"/>
               </a:ext>
             </a:extLst>
           </p:cNvPr>
@@ -24023,7 +24061,7 @@
           <p:cNvPr id="52" name="矩形 51">
             <a:extLst>
               <a:ext uri="{FF2B5EF4-FFF2-40B4-BE49-F238E27FC236}">
-                <a16:creationId xmlns:a16="http://schemas.microsoft.com/office/drawing/2014/main" id="{EA55BA71-6A5C-38A3-0C4D-CE0F9FC3C743}"/>
+                <a16:creationId xmlns:a16="http://schemas.microsoft.com/office/drawing/2014/main" id="{F0DB8894-59B1-2C6B-04CC-7AC5B691D66F}"/>
               </a:ext>
             </a:extLst>
           </p:cNvPr>
@@ -24091,7 +24129,7 @@
           <p:cNvPr id="53" name="矩形 52">
             <a:extLst>
               <a:ext uri="{FF2B5EF4-FFF2-40B4-BE49-F238E27FC236}">
-                <a16:creationId xmlns:a16="http://schemas.microsoft.com/office/drawing/2014/main" id="{7E7C4C67-E19A-73AE-2AA2-3A0BCE7B85FE}"/>
+                <a16:creationId xmlns:a16="http://schemas.microsoft.com/office/drawing/2014/main" id="{0CC9CD97-0453-3663-183C-F0B8DD0052C4}"/>
               </a:ext>
             </a:extLst>
           </p:cNvPr>
@@ -24159,7 +24197,7 @@
           <p:cNvPr id="54" name="矩形 53">
             <a:extLst>
               <a:ext uri="{FF2B5EF4-FFF2-40B4-BE49-F238E27FC236}">
-                <a16:creationId xmlns:a16="http://schemas.microsoft.com/office/drawing/2014/main" id="{B58CFEA1-CFE9-73DB-43A3-9FA4D7C2EAA4}"/>
+                <a16:creationId xmlns:a16="http://schemas.microsoft.com/office/drawing/2014/main" id="{400488A7-9A89-BD17-4031-1EAC7C1D3E68}"/>
               </a:ext>
             </a:extLst>
           </p:cNvPr>
@@ -24227,7 +24265,7 @@
           <p:cNvPr id="55" name="矩形: 圓角 54">
             <a:extLst>
               <a:ext uri="{FF2B5EF4-FFF2-40B4-BE49-F238E27FC236}">
-                <a16:creationId xmlns:a16="http://schemas.microsoft.com/office/drawing/2014/main" id="{1C2F515A-8BE5-32A1-2B0C-86A1495C830A}"/>
+                <a16:creationId xmlns:a16="http://schemas.microsoft.com/office/drawing/2014/main" id="{5856886D-979F-1E06-9193-20ECB2DBC6A6}"/>
               </a:ext>
             </a:extLst>
           </p:cNvPr>
@@ -24297,7 +24335,7 @@
           <p:cNvPr id="56" name="文字方塊 55">
             <a:extLst>
               <a:ext uri="{FF2B5EF4-FFF2-40B4-BE49-F238E27FC236}">
-                <a16:creationId xmlns:a16="http://schemas.microsoft.com/office/drawing/2014/main" id="{CD787BB1-83A6-DACE-BDDB-0221D5E13CE8}"/>
+                <a16:creationId xmlns:a16="http://schemas.microsoft.com/office/drawing/2014/main" id="{0BC430E8-6A7B-4698-96EB-9194009C39EA}"/>
               </a:ext>
             </a:extLst>
           </p:cNvPr>
@@ -24394,7 +24432,7 @@
           <p:cNvPr id="57" name="矩形 56">
             <a:extLst>
               <a:ext uri="{FF2B5EF4-FFF2-40B4-BE49-F238E27FC236}">
-                <a16:creationId xmlns:a16="http://schemas.microsoft.com/office/drawing/2014/main" id="{F27E80BB-0988-0469-617F-565A0C91D919}"/>
+                <a16:creationId xmlns:a16="http://schemas.microsoft.com/office/drawing/2014/main" id="{5DA7D872-2C32-F34C-F74A-DB489D0D696E}"/>
               </a:ext>
             </a:extLst>
           </p:cNvPr>
@@ -24462,7 +24500,7 @@
           <p:cNvPr id="58" name="文字方塊 57">
             <a:extLst>
               <a:ext uri="{FF2B5EF4-FFF2-40B4-BE49-F238E27FC236}">
-                <a16:creationId xmlns:a16="http://schemas.microsoft.com/office/drawing/2014/main" id="{A8BE191B-07E6-6CAC-26D5-118B3ED7D95F}"/>
+                <a16:creationId xmlns:a16="http://schemas.microsoft.com/office/drawing/2014/main" id="{AA5BC68C-C04F-FF2F-55E8-2189BF7693D3}"/>
               </a:ext>
             </a:extLst>
           </p:cNvPr>
@@ -24526,7 +24564,7 @@
           <p:cNvPr id="59" name="矩形 58">
             <a:extLst>
               <a:ext uri="{FF2B5EF4-FFF2-40B4-BE49-F238E27FC236}">
-                <a16:creationId xmlns:a16="http://schemas.microsoft.com/office/drawing/2014/main" id="{4AFB7E90-47B7-C68E-DB97-1F1AC4B3440E}"/>
+                <a16:creationId xmlns:a16="http://schemas.microsoft.com/office/drawing/2014/main" id="{AE97E8C1-095E-290E-C8A3-1806DDF6045A}"/>
               </a:ext>
             </a:extLst>
           </p:cNvPr>
@@ -24594,7 +24632,7 @@
           <p:cNvPr id="60" name="文字方塊 59">
             <a:extLst>
               <a:ext uri="{FF2B5EF4-FFF2-40B4-BE49-F238E27FC236}">
-                <a16:creationId xmlns:a16="http://schemas.microsoft.com/office/drawing/2014/main" id="{497A73CD-8AE6-69D2-BD14-40B84D18D548}"/>
+                <a16:creationId xmlns:a16="http://schemas.microsoft.com/office/drawing/2014/main" id="{529122B9-A30F-8DA4-BE36-51C7EC10AC58}"/>
               </a:ext>
             </a:extLst>
           </p:cNvPr>
@@ -24658,7 +24696,7 @@
           <p:cNvPr id="61" name="矩形 60">
             <a:extLst>
               <a:ext uri="{FF2B5EF4-FFF2-40B4-BE49-F238E27FC236}">
-                <a16:creationId xmlns:a16="http://schemas.microsoft.com/office/drawing/2014/main" id="{189FDD6E-EB03-83EC-E943-DF0796354DE0}"/>
+                <a16:creationId xmlns:a16="http://schemas.microsoft.com/office/drawing/2014/main" id="{DBF8A910-F40F-AB8F-6B18-6C2BA0D61EC6}"/>
               </a:ext>
             </a:extLst>
           </p:cNvPr>
@@ -24726,7 +24764,7 @@
           <p:cNvPr id="62" name="文字方塊 61">
             <a:extLst>
               <a:ext uri="{FF2B5EF4-FFF2-40B4-BE49-F238E27FC236}">
-                <a16:creationId xmlns:a16="http://schemas.microsoft.com/office/drawing/2014/main" id="{FB8147C6-B7A0-20D1-49FD-4280D30DF011}"/>
+                <a16:creationId xmlns:a16="http://schemas.microsoft.com/office/drawing/2014/main" id="{9E8C8A8F-FF58-2FBE-A017-5009E7B59176}"/>
               </a:ext>
             </a:extLst>
           </p:cNvPr>
@@ -24768,7 +24806,7 @@
           <p:cNvPr id="63" name="矩形: 圓角 62">
             <a:extLst>
               <a:ext uri="{FF2B5EF4-FFF2-40B4-BE49-F238E27FC236}">
-                <a16:creationId xmlns:a16="http://schemas.microsoft.com/office/drawing/2014/main" id="{3649F18C-4569-6B17-37D4-4EC3F03A9847}"/>
+                <a16:creationId xmlns:a16="http://schemas.microsoft.com/office/drawing/2014/main" id="{D78EDE8B-70B2-983B-3F5E-A03A1ED89B7D}"/>
               </a:ext>
             </a:extLst>
           </p:cNvPr>
@@ -24845,7 +24883,7 @@
     </p:spTree>
     <p:extLst>
       <p:ext uri="{BB962C8B-B14F-4D97-AF65-F5344CB8AC3E}">
-        <p14:creationId xmlns:p14="http://schemas.microsoft.com/office/powerpoint/2010/main" val="3179810714"/>
+        <p14:creationId xmlns:p14="http://schemas.microsoft.com/office/powerpoint/2010/main" val="2294026184"/>
       </p:ext>
     </p:extLst>
   </p:cSld>
@@ -24877,7 +24915,7 @@
           <p:cNvPr id="2" name="標題 1">
             <a:extLst>
               <a:ext uri="{FF2B5EF4-FFF2-40B4-BE49-F238E27FC236}">
-                <a16:creationId xmlns:a16="http://schemas.microsoft.com/office/drawing/2014/main" id="{F58C0E43-0832-0D76-568A-170F05612607}"/>
+                <a16:creationId xmlns:a16="http://schemas.microsoft.com/office/drawing/2014/main" id="{FE5FAF13-9DE6-6F26-7FAA-0D8F6450013A}"/>
               </a:ext>
             </a:extLst>
           </p:cNvPr>
@@ -24919,7 +24957,7 @@
           <p:cNvPr id="3" name="文字方塊 2">
             <a:extLst>
               <a:ext uri="{FF2B5EF4-FFF2-40B4-BE49-F238E27FC236}">
-                <a16:creationId xmlns:a16="http://schemas.microsoft.com/office/drawing/2014/main" id="{0CC82FD3-06E7-BA49-B5BF-86989EF38AF2}"/>
+                <a16:creationId xmlns:a16="http://schemas.microsoft.com/office/drawing/2014/main" id="{40048961-824E-CA66-EEDA-C159A785016C}"/>
               </a:ext>
             </a:extLst>
           </p:cNvPr>
@@ -24972,7 +25010,7 @@
           <p:cNvPr id="4" name="投影片編號版面配置區 3">
             <a:extLst>
               <a:ext uri="{FF2B5EF4-FFF2-40B4-BE49-F238E27FC236}">
-                <a16:creationId xmlns:a16="http://schemas.microsoft.com/office/drawing/2014/main" id="{570EA8E6-7F50-F1B8-E0EA-33A8A1F14A80}"/>
+                <a16:creationId xmlns:a16="http://schemas.microsoft.com/office/drawing/2014/main" id="{A4C84C09-18CA-F017-9B0D-0AE8D453F393}"/>
               </a:ext>
             </a:extLst>
           </p:cNvPr>
@@ -24988,7 +25026,7 @@
           <a:bodyPr/>
           <a:lstStyle/>
           <a:p>
-            <a:fld id="{82E2CFFA-BCF7-4941-9F1D-DE24BA5E8539}" type="slidenum">
+            <a:fld id="{62F1B366-B12D-4E81-AEC3-117FBF7F511D}" type="slidenum">
               <a:rPr lang="zh-TW" altLang="en-US" smtClean="0"/>
               <a:t>7</a:t>
             </a:fld>
@@ -25001,7 +25039,7 @@
           <p:cNvPr id="5" name="矩形: 圓角 4">
             <a:extLst>
               <a:ext uri="{FF2B5EF4-FFF2-40B4-BE49-F238E27FC236}">
-                <a16:creationId xmlns:a16="http://schemas.microsoft.com/office/drawing/2014/main" id="{A3C4374C-4DA0-52FA-4459-741EB892EE8F}"/>
+                <a16:creationId xmlns:a16="http://schemas.microsoft.com/office/drawing/2014/main" id="{6907D43C-699B-E25D-EEDE-0DA539B0C0BD}"/>
               </a:ext>
             </a:extLst>
           </p:cNvPr>
@@ -25071,7 +25109,7 @@
           <p:cNvPr id="6" name="文字方塊 5">
             <a:extLst>
               <a:ext uri="{FF2B5EF4-FFF2-40B4-BE49-F238E27FC236}">
-                <a16:creationId xmlns:a16="http://schemas.microsoft.com/office/drawing/2014/main" id="{08E48D8F-968D-0065-82CA-67507B61D209}"/>
+                <a16:creationId xmlns:a16="http://schemas.microsoft.com/office/drawing/2014/main" id="{2420816C-BA85-6A5E-FC03-0554CBC4E29C}"/>
               </a:ext>
             </a:extLst>
           </p:cNvPr>
@@ -25124,7 +25162,7 @@
           <p:cNvPr id="7" name="文字方塊 6">
             <a:extLst>
               <a:ext uri="{FF2B5EF4-FFF2-40B4-BE49-F238E27FC236}">
-                <a16:creationId xmlns:a16="http://schemas.microsoft.com/office/drawing/2014/main" id="{E62FD799-8D45-A0C0-ADCB-3BAC8CA58FB9}"/>
+                <a16:creationId xmlns:a16="http://schemas.microsoft.com/office/drawing/2014/main" id="{FD4F73E9-D1D6-C6FC-DD05-95FA583B3493}"/>
               </a:ext>
             </a:extLst>
           </p:cNvPr>
@@ -25166,7 +25204,7 @@
           <p:cNvPr id="8" name="文字方塊 7">
             <a:extLst>
               <a:ext uri="{FF2B5EF4-FFF2-40B4-BE49-F238E27FC236}">
-                <a16:creationId xmlns:a16="http://schemas.microsoft.com/office/drawing/2014/main" id="{A9F8598A-16CD-4752-41B4-1BC9FAD8BC01}"/>
+                <a16:creationId xmlns:a16="http://schemas.microsoft.com/office/drawing/2014/main" id="{BA5B25AC-BBE6-6FCA-D353-CD3F922C0148}"/>
               </a:ext>
             </a:extLst>
           </p:cNvPr>
@@ -25216,7 +25254,7 @@
           <p:cNvPr id="9" name="矩形: 圓角 8">
             <a:extLst>
               <a:ext uri="{FF2B5EF4-FFF2-40B4-BE49-F238E27FC236}">
-                <a16:creationId xmlns:a16="http://schemas.microsoft.com/office/drawing/2014/main" id="{CDB2F860-0F66-763E-2B53-ECD9B48738F8}"/>
+                <a16:creationId xmlns:a16="http://schemas.microsoft.com/office/drawing/2014/main" id="{57D1B795-49C9-B117-B7E4-18617DE62D82}"/>
               </a:ext>
             </a:extLst>
           </p:cNvPr>
@@ -25286,7 +25324,7 @@
           <p:cNvPr id="10" name="文字方塊 9">
             <a:extLst>
               <a:ext uri="{FF2B5EF4-FFF2-40B4-BE49-F238E27FC236}">
-                <a16:creationId xmlns:a16="http://schemas.microsoft.com/office/drawing/2014/main" id="{8A9DDE3E-78B1-E383-5ACC-6857AAFBBF4B}"/>
+                <a16:creationId xmlns:a16="http://schemas.microsoft.com/office/drawing/2014/main" id="{F2FD2DB9-4BA5-BB43-010F-A90628DFAAD3}"/>
               </a:ext>
             </a:extLst>
           </p:cNvPr>
@@ -25339,7 +25377,7 @@
           <p:cNvPr id="11" name="文字方塊 10">
             <a:extLst>
               <a:ext uri="{FF2B5EF4-FFF2-40B4-BE49-F238E27FC236}">
-                <a16:creationId xmlns:a16="http://schemas.microsoft.com/office/drawing/2014/main" id="{4505F1D2-5B68-3492-868B-103ECBE3B017}"/>
+                <a16:creationId xmlns:a16="http://schemas.microsoft.com/office/drawing/2014/main" id="{F72D06D5-405C-B729-66AD-1EE508152551}"/>
               </a:ext>
             </a:extLst>
           </p:cNvPr>
@@ -25400,7 +25438,7 @@
           <p:cNvPr id="12" name="文字方塊 11">
             <a:extLst>
               <a:ext uri="{FF2B5EF4-FFF2-40B4-BE49-F238E27FC236}">
-                <a16:creationId xmlns:a16="http://schemas.microsoft.com/office/drawing/2014/main" id="{22D91805-2AEE-F539-90B5-742976E7F62C}"/>
+                <a16:creationId xmlns:a16="http://schemas.microsoft.com/office/drawing/2014/main" id="{1E96354F-C66E-43DE-3345-FC2769AE5098}"/>
               </a:ext>
             </a:extLst>
           </p:cNvPr>
@@ -25450,7 +25488,7 @@
           <p:cNvPr id="13" name="矩形: 圓角 12">
             <a:extLst>
               <a:ext uri="{FF2B5EF4-FFF2-40B4-BE49-F238E27FC236}">
-                <a16:creationId xmlns:a16="http://schemas.microsoft.com/office/drawing/2014/main" id="{C81141B5-CB83-4FB8-671B-7B72A9CACC41}"/>
+                <a16:creationId xmlns:a16="http://schemas.microsoft.com/office/drawing/2014/main" id="{ED99449F-6E5F-83B0-5E39-03F577FBFA22}"/>
               </a:ext>
             </a:extLst>
           </p:cNvPr>
@@ -25520,7 +25558,7 @@
           <p:cNvPr id="14" name="文字方塊 13">
             <a:extLst>
               <a:ext uri="{FF2B5EF4-FFF2-40B4-BE49-F238E27FC236}">
-                <a16:creationId xmlns:a16="http://schemas.microsoft.com/office/drawing/2014/main" id="{33BF2581-155A-39F0-E116-372DE88DABF6}"/>
+                <a16:creationId xmlns:a16="http://schemas.microsoft.com/office/drawing/2014/main" id="{63477CC5-E8A7-913A-74FC-A4584556619C}"/>
               </a:ext>
             </a:extLst>
           </p:cNvPr>
@@ -25573,7 +25611,7 @@
           <p:cNvPr id="15" name="文字方塊 14">
             <a:extLst>
               <a:ext uri="{FF2B5EF4-FFF2-40B4-BE49-F238E27FC236}">
-                <a16:creationId xmlns:a16="http://schemas.microsoft.com/office/drawing/2014/main" id="{3E721A0F-FD7E-BB5E-1A1C-8424BEEB5343}"/>
+                <a16:creationId xmlns:a16="http://schemas.microsoft.com/office/drawing/2014/main" id="{6DBA5D85-29DA-14C0-0282-6914821E6CD5}"/>
               </a:ext>
             </a:extLst>
           </p:cNvPr>
@@ -25615,7 +25653,7 @@
           <p:cNvPr id="16" name="文字方塊 15">
             <a:extLst>
               <a:ext uri="{FF2B5EF4-FFF2-40B4-BE49-F238E27FC236}">
-                <a16:creationId xmlns:a16="http://schemas.microsoft.com/office/drawing/2014/main" id="{7B9A4542-E36C-13AC-3B69-0C84D61690B0}"/>
+                <a16:creationId xmlns:a16="http://schemas.microsoft.com/office/drawing/2014/main" id="{AD435E27-C93B-6633-2FFE-CE88C09B9D68}"/>
               </a:ext>
             </a:extLst>
           </p:cNvPr>
@@ -25665,7 +25703,7 @@
           <p:cNvPr id="17" name="矩形: 圓角 16">
             <a:extLst>
               <a:ext uri="{FF2B5EF4-FFF2-40B4-BE49-F238E27FC236}">
-                <a16:creationId xmlns:a16="http://schemas.microsoft.com/office/drawing/2014/main" id="{A1900422-FD2F-D3CA-0D19-3B3257F21A57}"/>
+                <a16:creationId xmlns:a16="http://schemas.microsoft.com/office/drawing/2014/main" id="{09784829-EF67-9F57-9863-A53179D26E7B}"/>
               </a:ext>
             </a:extLst>
           </p:cNvPr>
@@ -25735,7 +25773,7 @@
           <p:cNvPr id="18" name="文字方塊 17">
             <a:extLst>
               <a:ext uri="{FF2B5EF4-FFF2-40B4-BE49-F238E27FC236}">
-                <a16:creationId xmlns:a16="http://schemas.microsoft.com/office/drawing/2014/main" id="{704AC93C-5E88-E885-B67B-11C7000E2C6B}"/>
+                <a16:creationId xmlns:a16="http://schemas.microsoft.com/office/drawing/2014/main" id="{C2C15AC6-84D0-1308-021C-42403DA22848}"/>
               </a:ext>
             </a:extLst>
           </p:cNvPr>
@@ -25788,7 +25826,7 @@
           <p:cNvPr id="19" name="文字方塊 18">
             <a:extLst>
               <a:ext uri="{FF2B5EF4-FFF2-40B4-BE49-F238E27FC236}">
-                <a16:creationId xmlns:a16="http://schemas.microsoft.com/office/drawing/2014/main" id="{854D5ABB-3A3F-E3B8-6944-CE8EED87C402}"/>
+                <a16:creationId xmlns:a16="http://schemas.microsoft.com/office/drawing/2014/main" id="{EB718DA9-9C47-2FC2-79FC-14B7C905FFBD}"/>
               </a:ext>
             </a:extLst>
           </p:cNvPr>
@@ -25830,7 +25868,7 @@
           <p:cNvPr id="20" name="文字方塊 19">
             <a:extLst>
               <a:ext uri="{FF2B5EF4-FFF2-40B4-BE49-F238E27FC236}">
-                <a16:creationId xmlns:a16="http://schemas.microsoft.com/office/drawing/2014/main" id="{4924BA5D-1D69-EFEB-2621-B51B23585627}"/>
+                <a16:creationId xmlns:a16="http://schemas.microsoft.com/office/drawing/2014/main" id="{BB6FDB74-FD91-B678-7DCC-4E55172D98F8}"/>
               </a:ext>
             </a:extLst>
           </p:cNvPr>
@@ -25880,7 +25918,7 @@
           <p:cNvPr id="21" name="矩形: 圓角 20">
             <a:extLst>
               <a:ext uri="{FF2B5EF4-FFF2-40B4-BE49-F238E27FC236}">
-                <a16:creationId xmlns:a16="http://schemas.microsoft.com/office/drawing/2014/main" id="{BC98A4FB-94EA-A3E8-EE07-F12F0B03A20A}"/>
+                <a16:creationId xmlns:a16="http://schemas.microsoft.com/office/drawing/2014/main" id="{F3A81225-FABB-5CED-4AEF-B1B148828CCE}"/>
               </a:ext>
             </a:extLst>
           </p:cNvPr>
@@ -25950,7 +25988,7 @@
           <p:cNvPr id="22" name="文字方塊 21">
             <a:extLst>
               <a:ext uri="{FF2B5EF4-FFF2-40B4-BE49-F238E27FC236}">
-                <a16:creationId xmlns:a16="http://schemas.microsoft.com/office/drawing/2014/main" id="{BC151A92-115C-65AC-8E86-9931E962B175}"/>
+                <a16:creationId xmlns:a16="http://schemas.microsoft.com/office/drawing/2014/main" id="{D485B95B-F6FD-6E25-D604-3464950E2B99}"/>
               </a:ext>
             </a:extLst>
           </p:cNvPr>
@@ -26003,7 +26041,7 @@
           <p:cNvPr id="23" name="文字方塊 22">
             <a:extLst>
               <a:ext uri="{FF2B5EF4-FFF2-40B4-BE49-F238E27FC236}">
-                <a16:creationId xmlns:a16="http://schemas.microsoft.com/office/drawing/2014/main" id="{B732F33C-F1AF-4A21-B1EE-EFD272B70AD6}"/>
+                <a16:creationId xmlns:a16="http://schemas.microsoft.com/office/drawing/2014/main" id="{83FA2B55-1CC8-30E5-8487-690AEBC6FF2B}"/>
               </a:ext>
             </a:extLst>
           </p:cNvPr>
@@ -26045,7 +26083,7 @@
           <p:cNvPr id="24" name="文字方塊 23">
             <a:extLst>
               <a:ext uri="{FF2B5EF4-FFF2-40B4-BE49-F238E27FC236}">
-                <a16:creationId xmlns:a16="http://schemas.microsoft.com/office/drawing/2014/main" id="{E6E8E979-6346-5AC2-2652-AD9E51B1C9DA}"/>
+                <a16:creationId xmlns:a16="http://schemas.microsoft.com/office/drawing/2014/main" id="{1F61AB94-0EFE-4377-38B5-623B1756A612}"/>
               </a:ext>
             </a:extLst>
           </p:cNvPr>
@@ -26095,7 +26133,7 @@
           <p:cNvPr id="25" name="矩形: 圓角 24">
             <a:extLst>
               <a:ext uri="{FF2B5EF4-FFF2-40B4-BE49-F238E27FC236}">
-                <a16:creationId xmlns:a16="http://schemas.microsoft.com/office/drawing/2014/main" id="{AAD1FFCA-507C-381C-0B14-74C239E0DB53}"/>
+                <a16:creationId xmlns:a16="http://schemas.microsoft.com/office/drawing/2014/main" id="{F0F98D95-DEBC-EE7A-0419-401CCA94CCA9}"/>
               </a:ext>
             </a:extLst>
           </p:cNvPr>
@@ -26165,7 +26203,7 @@
           <p:cNvPr id="26" name="文字方塊 25">
             <a:extLst>
               <a:ext uri="{FF2B5EF4-FFF2-40B4-BE49-F238E27FC236}">
-                <a16:creationId xmlns:a16="http://schemas.microsoft.com/office/drawing/2014/main" id="{0761E2E8-94C1-641C-723C-BC2B1080C250}"/>
+                <a16:creationId xmlns:a16="http://schemas.microsoft.com/office/drawing/2014/main" id="{73FD3FA6-EF38-0F9B-9E4A-6C30CF848D1B}"/>
               </a:ext>
             </a:extLst>
           </p:cNvPr>
@@ -26207,7 +26245,7 @@
           <p:cNvPr id="27" name="文字方塊 26">
             <a:extLst>
               <a:ext uri="{FF2B5EF4-FFF2-40B4-BE49-F238E27FC236}">
-                <a16:creationId xmlns:a16="http://schemas.microsoft.com/office/drawing/2014/main" id="{5363A11D-058E-6B29-142A-5FF87B70AC74}"/>
+                <a16:creationId xmlns:a16="http://schemas.microsoft.com/office/drawing/2014/main" id="{B1873FA6-9E3C-BB5F-B56F-70AEDD7EEFFC}"/>
               </a:ext>
             </a:extLst>
           </p:cNvPr>
@@ -26336,7 +26374,7 @@
     </p:spTree>
     <p:extLst>
       <p:ext uri="{BB962C8B-B14F-4D97-AF65-F5344CB8AC3E}">
-        <p14:creationId xmlns:p14="http://schemas.microsoft.com/office/powerpoint/2010/main" val="3949118028"/>
+        <p14:creationId xmlns:p14="http://schemas.microsoft.com/office/powerpoint/2010/main" val="3018516668"/>
       </p:ext>
     </p:extLst>
   </p:cSld>
@@ -26368,7 +26406,7 @@
           <p:cNvPr id="2" name="標題 1">
             <a:extLst>
               <a:ext uri="{FF2B5EF4-FFF2-40B4-BE49-F238E27FC236}">
-                <a16:creationId xmlns:a16="http://schemas.microsoft.com/office/drawing/2014/main" id="{D6B7EB01-CAE1-0A74-40EA-649A32348D43}"/>
+                <a16:creationId xmlns:a16="http://schemas.microsoft.com/office/drawing/2014/main" id="{EDB9CA6B-323A-519E-2450-C0383CD97E4B}"/>
               </a:ext>
             </a:extLst>
           </p:cNvPr>
@@ -26410,7 +26448,7 @@
           <p:cNvPr id="3" name="文字方塊 2">
             <a:extLst>
               <a:ext uri="{FF2B5EF4-FFF2-40B4-BE49-F238E27FC236}">
-                <a16:creationId xmlns:a16="http://schemas.microsoft.com/office/drawing/2014/main" id="{FFD91CF4-C353-E2BA-A8A2-6522F01E597C}"/>
+                <a16:creationId xmlns:a16="http://schemas.microsoft.com/office/drawing/2014/main" id="{E8746C37-F57D-94CF-B135-D0935C39A6B4}"/>
               </a:ext>
             </a:extLst>
           </p:cNvPr>
@@ -26463,7 +26501,7 @@
           <p:cNvPr id="4" name="投影片編號版面配置區 3">
             <a:extLst>
               <a:ext uri="{FF2B5EF4-FFF2-40B4-BE49-F238E27FC236}">
-                <a16:creationId xmlns:a16="http://schemas.microsoft.com/office/drawing/2014/main" id="{0EA9A0BA-7E4D-2AF1-94B3-3012159FC34B}"/>
+                <a16:creationId xmlns:a16="http://schemas.microsoft.com/office/drawing/2014/main" id="{31DDF6D4-26D3-EAC4-ACF4-F4A8D433133E}"/>
               </a:ext>
             </a:extLst>
           </p:cNvPr>
@@ -26479,7 +26517,7 @@
           <a:bodyPr/>
           <a:lstStyle/>
           <a:p>
-            <a:fld id="{82E2CFFA-BCF7-4941-9F1D-DE24BA5E8539}" type="slidenum">
+            <a:fld id="{62F1B366-B12D-4E81-AEC3-117FBF7F511D}" type="slidenum">
               <a:rPr lang="zh-TW" altLang="en-US" smtClean="0"/>
               <a:t>8</a:t>
             </a:fld>
@@ -26492,7 +26530,7 @@
           <p:cNvPr id="5" name="橢圓 4">
             <a:extLst>
               <a:ext uri="{FF2B5EF4-FFF2-40B4-BE49-F238E27FC236}">
-                <a16:creationId xmlns:a16="http://schemas.microsoft.com/office/drawing/2014/main" id="{6A662838-1E52-6F22-4D0D-1505442C2CC5}"/>
+                <a16:creationId xmlns:a16="http://schemas.microsoft.com/office/drawing/2014/main" id="{C6B03154-9CDE-6A6C-23FD-132D2E239375}"/>
               </a:ext>
             </a:extLst>
           </p:cNvPr>
@@ -26558,7 +26596,7 @@
           <p:cNvPr id="6" name="橢圓 5">
             <a:extLst>
               <a:ext uri="{FF2B5EF4-FFF2-40B4-BE49-F238E27FC236}">
-                <a16:creationId xmlns:a16="http://schemas.microsoft.com/office/drawing/2014/main" id="{9A2CA78F-21CF-05A7-F068-0B77E3925020}"/>
+                <a16:creationId xmlns:a16="http://schemas.microsoft.com/office/drawing/2014/main" id="{74FCD4D5-4D09-4A31-5F0D-B22FA741A4D1}"/>
               </a:ext>
             </a:extLst>
           </p:cNvPr>
@@ -26636,7 +26674,7 @@
           <p:cNvPr id="7" name="直線單箭頭接點 6">
             <a:extLst>
               <a:ext uri="{FF2B5EF4-FFF2-40B4-BE49-F238E27FC236}">
-                <a16:creationId xmlns:a16="http://schemas.microsoft.com/office/drawing/2014/main" id="{DA5B5754-641F-526F-32F5-DF80043CD473}"/>
+                <a16:creationId xmlns:a16="http://schemas.microsoft.com/office/drawing/2014/main" id="{21077CC4-033D-8D36-AAB0-5CD7F18BD912}"/>
               </a:ext>
             </a:extLst>
           </p:cNvPr>
@@ -26678,7 +26716,7 @@
           <p:cNvPr id="8" name="文字方塊 7">
             <a:extLst>
               <a:ext uri="{FF2B5EF4-FFF2-40B4-BE49-F238E27FC236}">
-                <a16:creationId xmlns:a16="http://schemas.microsoft.com/office/drawing/2014/main" id="{E9E42E87-FD4B-4B3B-338D-414F83827FDE}"/>
+                <a16:creationId xmlns:a16="http://schemas.microsoft.com/office/drawing/2014/main" id="{F155E37B-6E32-8D6D-35EB-6C7F222F77A2}"/>
               </a:ext>
             </a:extLst>
           </p:cNvPr>
@@ -26721,7 +26759,7 @@
           <p:cNvPr id="9" name="直線單箭頭接點 8">
             <a:extLst>
               <a:ext uri="{FF2B5EF4-FFF2-40B4-BE49-F238E27FC236}">
-                <a16:creationId xmlns:a16="http://schemas.microsoft.com/office/drawing/2014/main" id="{ED61679C-318A-5247-0D3E-AB90DF1AB09A}"/>
+                <a16:creationId xmlns:a16="http://schemas.microsoft.com/office/drawing/2014/main" id="{48407C9F-54F9-54AF-E3DC-2607990EF016}"/>
               </a:ext>
             </a:extLst>
           </p:cNvPr>
@@ -26763,7 +26801,7 @@
           <p:cNvPr id="10" name="文字方塊 9">
             <a:extLst>
               <a:ext uri="{FF2B5EF4-FFF2-40B4-BE49-F238E27FC236}">
-                <a16:creationId xmlns:a16="http://schemas.microsoft.com/office/drawing/2014/main" id="{8BF3C71D-1E97-AD60-ADF8-BF9338F3DF38}"/>
+                <a16:creationId xmlns:a16="http://schemas.microsoft.com/office/drawing/2014/main" id="{B7743F89-4CC7-F569-A873-94D7693A6C5C}"/>
               </a:ext>
             </a:extLst>
           </p:cNvPr>
@@ -26806,7 +26844,7 @@
           <p:cNvPr id="11" name="文字方塊 10">
             <a:extLst>
               <a:ext uri="{FF2B5EF4-FFF2-40B4-BE49-F238E27FC236}">
-                <a16:creationId xmlns:a16="http://schemas.microsoft.com/office/drawing/2014/main" id="{2462E722-955D-3F07-C41E-0B924BAAD26B}"/>
+                <a16:creationId xmlns:a16="http://schemas.microsoft.com/office/drawing/2014/main" id="{674CD75C-5522-BC10-4399-C4777963D1C3}"/>
               </a:ext>
             </a:extLst>
           </p:cNvPr>
@@ -26863,7 +26901,7 @@
           <p:cNvPr id="12" name="直線單箭頭接點 11">
             <a:extLst>
               <a:ext uri="{FF2B5EF4-FFF2-40B4-BE49-F238E27FC236}">
-                <a16:creationId xmlns:a16="http://schemas.microsoft.com/office/drawing/2014/main" id="{AE85C560-A4D1-12F8-DFD0-680DFB490A0D}"/>
+                <a16:creationId xmlns:a16="http://schemas.microsoft.com/office/drawing/2014/main" id="{3D439B74-BE3F-41DA-9C25-2593E9BD1397}"/>
               </a:ext>
             </a:extLst>
           </p:cNvPr>
@@ -26906,7 +26944,7 @@
           <p:cNvPr id="13" name="文字方塊 12">
             <a:extLst>
               <a:ext uri="{FF2B5EF4-FFF2-40B4-BE49-F238E27FC236}">
-                <a16:creationId xmlns:a16="http://schemas.microsoft.com/office/drawing/2014/main" id="{EFCBA04C-F92C-B797-E014-1D5ABA15130D}"/>
+                <a16:creationId xmlns:a16="http://schemas.microsoft.com/office/drawing/2014/main" id="{FD771671-24CB-A57E-0FB3-054667FD89ED}"/>
               </a:ext>
             </a:extLst>
           </p:cNvPr>
@@ -26948,7 +26986,7 @@
           <p:cNvPr id="14" name="矩形: 圓角 13">
             <a:extLst>
               <a:ext uri="{FF2B5EF4-FFF2-40B4-BE49-F238E27FC236}">
-                <a16:creationId xmlns:a16="http://schemas.microsoft.com/office/drawing/2014/main" id="{B02EDA0C-23B1-E229-F220-A5864B37B04F}"/>
+                <a16:creationId xmlns:a16="http://schemas.microsoft.com/office/drawing/2014/main" id="{04F25B12-29A0-2A11-BCAB-B2D38B752C87}"/>
               </a:ext>
             </a:extLst>
           </p:cNvPr>
@@ -27028,7 +27066,7 @@
           <p:cNvPr id="15" name="矩形: 圓角 14">
             <a:extLst>
               <a:ext uri="{FF2B5EF4-FFF2-40B4-BE49-F238E27FC236}">
-                <a16:creationId xmlns:a16="http://schemas.microsoft.com/office/drawing/2014/main" id="{F6893D87-56C7-E1AB-3984-2335EA543777}"/>
+                <a16:creationId xmlns:a16="http://schemas.microsoft.com/office/drawing/2014/main" id="{EA24DBB0-85E6-455B-F2D1-CBFF7BCB8107}"/>
               </a:ext>
             </a:extLst>
           </p:cNvPr>
@@ -27108,7 +27146,7 @@
           <p:cNvPr id="16" name="矩形: 圓角 15">
             <a:extLst>
               <a:ext uri="{FF2B5EF4-FFF2-40B4-BE49-F238E27FC236}">
-                <a16:creationId xmlns:a16="http://schemas.microsoft.com/office/drawing/2014/main" id="{65B7F11A-5F00-2313-DF5F-FC733BD039C0}"/>
+                <a16:creationId xmlns:a16="http://schemas.microsoft.com/office/drawing/2014/main" id="{2F5477DD-F57A-35CA-BDC4-150479BB7358}"/>
               </a:ext>
             </a:extLst>
           </p:cNvPr>
@@ -27188,7 +27226,7 @@
           <p:cNvPr id="17" name="矩形: 圓角 16">
             <a:extLst>
               <a:ext uri="{FF2B5EF4-FFF2-40B4-BE49-F238E27FC236}">
-                <a16:creationId xmlns:a16="http://schemas.microsoft.com/office/drawing/2014/main" id="{358433FF-7C9E-A70F-B338-5639BAD1FE9F}"/>
+                <a16:creationId xmlns:a16="http://schemas.microsoft.com/office/drawing/2014/main" id="{6AFF4E21-2743-11AD-D2DB-A7CA708CFE39}"/>
               </a:ext>
             </a:extLst>
           </p:cNvPr>
@@ -27258,7 +27296,7 @@
           <p:cNvPr id="18" name="文字方塊 17">
             <a:extLst>
               <a:ext uri="{FF2B5EF4-FFF2-40B4-BE49-F238E27FC236}">
-                <a16:creationId xmlns:a16="http://schemas.microsoft.com/office/drawing/2014/main" id="{844D0C7C-0D99-87EE-29F4-0AACDE7AE7B0}"/>
+                <a16:creationId xmlns:a16="http://schemas.microsoft.com/office/drawing/2014/main" id="{E0AB0F64-F810-40B6-1FBB-70F09E8982CD}"/>
               </a:ext>
             </a:extLst>
           </p:cNvPr>
@@ -27300,7 +27338,7 @@
           <p:cNvPr id="19" name="文字方塊 18">
             <a:extLst>
               <a:ext uri="{FF2B5EF4-FFF2-40B4-BE49-F238E27FC236}">
-                <a16:creationId xmlns:a16="http://schemas.microsoft.com/office/drawing/2014/main" id="{2044B864-88AB-14A4-F503-306D5704792E}"/>
+                <a16:creationId xmlns:a16="http://schemas.microsoft.com/office/drawing/2014/main" id="{DC25F340-F522-8EAC-A454-6C9176FBF6B1}"/>
               </a:ext>
             </a:extLst>
           </p:cNvPr>
@@ -27464,7 +27502,7 @@
     </p:spTree>
     <p:extLst>
       <p:ext uri="{BB962C8B-B14F-4D97-AF65-F5344CB8AC3E}">
-        <p14:creationId xmlns:p14="http://schemas.microsoft.com/office/powerpoint/2010/main" val="1307027088"/>
+        <p14:creationId xmlns:p14="http://schemas.microsoft.com/office/powerpoint/2010/main" val="709123201"/>
       </p:ext>
     </p:extLst>
   </p:cSld>
@@ -27496,7 +27534,7 @@
           <p:cNvPr id="2" name="標題 1">
             <a:extLst>
               <a:ext uri="{FF2B5EF4-FFF2-40B4-BE49-F238E27FC236}">
-                <a16:creationId xmlns:a16="http://schemas.microsoft.com/office/drawing/2014/main" id="{69EBA678-7188-6DE2-3620-098030DD9059}"/>
+                <a16:creationId xmlns:a16="http://schemas.microsoft.com/office/drawing/2014/main" id="{C9F141DE-8759-4DC2-ACF2-88AFBCDB6101}"/>
               </a:ext>
             </a:extLst>
           </p:cNvPr>
@@ -27582,7 +27620,7 @@
           <p:cNvPr id="3" name="文字方塊 2">
             <a:extLst>
               <a:ext uri="{FF2B5EF4-FFF2-40B4-BE49-F238E27FC236}">
-                <a16:creationId xmlns:a16="http://schemas.microsoft.com/office/drawing/2014/main" id="{B8857404-1D97-2B48-CBD1-1B283E65805A}"/>
+                <a16:creationId xmlns:a16="http://schemas.microsoft.com/office/drawing/2014/main" id="{4E31719E-D6F3-FBF4-BD97-27A6BFB1F1E2}"/>
               </a:ext>
             </a:extLst>
           </p:cNvPr>
@@ -27635,7 +27673,7 @@
           <p:cNvPr id="4" name="投影片編號版面配置區 3">
             <a:extLst>
               <a:ext uri="{FF2B5EF4-FFF2-40B4-BE49-F238E27FC236}">
-                <a16:creationId xmlns:a16="http://schemas.microsoft.com/office/drawing/2014/main" id="{5BD203E8-6270-D9BF-445B-F125DD5DBC09}"/>
+                <a16:creationId xmlns:a16="http://schemas.microsoft.com/office/drawing/2014/main" id="{A812BE1D-D0C7-E0FA-323E-C87C9AE332B6}"/>
               </a:ext>
             </a:extLst>
           </p:cNvPr>
@@ -27651,7 +27689,7 @@
           <a:bodyPr/>
           <a:lstStyle/>
           <a:p>
-            <a:fld id="{82E2CFFA-BCF7-4941-9F1D-DE24BA5E8539}" type="slidenum">
+            <a:fld id="{62F1B366-B12D-4E81-AEC3-117FBF7F511D}" type="slidenum">
               <a:rPr lang="zh-TW" altLang="en-US" smtClean="0"/>
               <a:t>9</a:t>
             </a:fld>
@@ -27664,7 +27702,7 @@
           <p:cNvPr id="5" name="矩形: 圓角 4">
             <a:extLst>
               <a:ext uri="{FF2B5EF4-FFF2-40B4-BE49-F238E27FC236}">
-                <a16:creationId xmlns:a16="http://schemas.microsoft.com/office/drawing/2014/main" id="{6B85A3C0-5D8D-18E5-47B4-DECD3D7A0705}"/>
+                <a16:creationId xmlns:a16="http://schemas.microsoft.com/office/drawing/2014/main" id="{A0C7F796-2EA3-D09D-24C2-F11A55E6C18D}"/>
               </a:ext>
             </a:extLst>
           </p:cNvPr>
@@ -27734,7 +27772,7 @@
           <p:cNvPr id="6" name="文字方塊 5">
             <a:extLst>
               <a:ext uri="{FF2B5EF4-FFF2-40B4-BE49-F238E27FC236}">
-                <a16:creationId xmlns:a16="http://schemas.microsoft.com/office/drawing/2014/main" id="{B4EF7F89-A9B2-271C-FDE6-BFB4F1D4E325}"/>
+                <a16:creationId xmlns:a16="http://schemas.microsoft.com/office/drawing/2014/main" id="{1067271B-6B1C-23C3-7EE5-73C2BCCFEC53}"/>
               </a:ext>
             </a:extLst>
           </p:cNvPr>
@@ -27776,7 +27814,7 @@
           <p:cNvPr id="7" name="文字方塊 6">
             <a:extLst>
               <a:ext uri="{FF2B5EF4-FFF2-40B4-BE49-F238E27FC236}">
-                <a16:creationId xmlns:a16="http://schemas.microsoft.com/office/drawing/2014/main" id="{EF4A1C97-AF42-E700-DD96-84A8B33A9C50}"/>
+                <a16:creationId xmlns:a16="http://schemas.microsoft.com/office/drawing/2014/main" id="{AF5962F7-FFEC-5F32-D091-A9C2166C875C}"/>
               </a:ext>
             </a:extLst>
           </p:cNvPr>
@@ -27826,7 +27864,7 @@
           <p:cNvPr id="8" name="文字方塊 7">
             <a:extLst>
               <a:ext uri="{FF2B5EF4-FFF2-40B4-BE49-F238E27FC236}">
-                <a16:creationId xmlns:a16="http://schemas.microsoft.com/office/drawing/2014/main" id="{2C18F4E8-04CA-94FA-3796-8901A5B34E56}"/>
+                <a16:creationId xmlns:a16="http://schemas.microsoft.com/office/drawing/2014/main" id="{FF34C6AE-EEF3-9E53-C6F0-8C7C90FD22F4}"/>
               </a:ext>
             </a:extLst>
           </p:cNvPr>
@@ -27868,7 +27906,7 @@
           <p:cNvPr id="9" name="文字方塊 8">
             <a:extLst>
               <a:ext uri="{FF2B5EF4-FFF2-40B4-BE49-F238E27FC236}">
-                <a16:creationId xmlns:a16="http://schemas.microsoft.com/office/drawing/2014/main" id="{B5FEA0E9-89FE-039D-F0BF-F02517A60798}"/>
+                <a16:creationId xmlns:a16="http://schemas.microsoft.com/office/drawing/2014/main" id="{CFCDB72F-F386-B5F3-D128-0D2CA1178329}"/>
               </a:ext>
             </a:extLst>
           </p:cNvPr>
@@ -27918,7 +27956,7 @@
           <p:cNvPr id="10" name="文字方塊 9">
             <a:extLst>
               <a:ext uri="{FF2B5EF4-FFF2-40B4-BE49-F238E27FC236}">
-                <a16:creationId xmlns:a16="http://schemas.microsoft.com/office/drawing/2014/main" id="{0FD15ED4-C07D-575B-D5F1-6C3EF8B1500E}"/>
+                <a16:creationId xmlns:a16="http://schemas.microsoft.com/office/drawing/2014/main" id="{C593EFFE-374C-B785-E3DF-6369639676E3}"/>
               </a:ext>
             </a:extLst>
           </p:cNvPr>
@@ -27960,7 +27998,7 @@
           <p:cNvPr id="11" name="文字方塊 10">
             <a:extLst>
               <a:ext uri="{FF2B5EF4-FFF2-40B4-BE49-F238E27FC236}">
-                <a16:creationId xmlns:a16="http://schemas.microsoft.com/office/drawing/2014/main" id="{191CC635-DEB2-DDAF-6802-11CF9BF5E239}"/>
+                <a16:creationId xmlns:a16="http://schemas.microsoft.com/office/drawing/2014/main" id="{4974AFB0-B41F-856C-00A2-FB976A55FD00}"/>
               </a:ext>
             </a:extLst>
           </p:cNvPr>
@@ -28010,7 +28048,7 @@
           <p:cNvPr id="12" name="文字方塊 11">
             <a:extLst>
               <a:ext uri="{FF2B5EF4-FFF2-40B4-BE49-F238E27FC236}">
-                <a16:creationId xmlns:a16="http://schemas.microsoft.com/office/drawing/2014/main" id="{CBFA5B29-579C-55C8-4A1E-ADE6E2FA875A}"/>
+                <a16:creationId xmlns:a16="http://schemas.microsoft.com/office/drawing/2014/main" id="{19E70100-1D1B-CA82-6600-97AB4FA09B75}"/>
               </a:ext>
             </a:extLst>
           </p:cNvPr>
@@ -28052,7 +28090,7 @@
           <p:cNvPr id="13" name="文字方塊 12">
             <a:extLst>
               <a:ext uri="{FF2B5EF4-FFF2-40B4-BE49-F238E27FC236}">
-                <a16:creationId xmlns:a16="http://schemas.microsoft.com/office/drawing/2014/main" id="{35586C78-D043-4AEA-0129-BB9C0749F554}"/>
+                <a16:creationId xmlns:a16="http://schemas.microsoft.com/office/drawing/2014/main" id="{7B8794E5-8892-58FB-BB48-ED5A7A4B2E3B}"/>
               </a:ext>
             </a:extLst>
           </p:cNvPr>
@@ -28102,7 +28140,7 @@
           <p:cNvPr id="14" name="文字方塊 13">
             <a:extLst>
               <a:ext uri="{FF2B5EF4-FFF2-40B4-BE49-F238E27FC236}">
-                <a16:creationId xmlns:a16="http://schemas.microsoft.com/office/drawing/2014/main" id="{20669728-EAA3-1AAB-D1DE-73DA5D7DF384}"/>
+                <a16:creationId xmlns:a16="http://schemas.microsoft.com/office/drawing/2014/main" id="{E1E79C09-3F5B-6358-2B9D-2115A13EA70F}"/>
               </a:ext>
             </a:extLst>
           </p:cNvPr>
@@ -28144,7 +28182,7 @@
           <p:cNvPr id="15" name="文字方塊 14">
             <a:extLst>
               <a:ext uri="{FF2B5EF4-FFF2-40B4-BE49-F238E27FC236}">
-                <a16:creationId xmlns:a16="http://schemas.microsoft.com/office/drawing/2014/main" id="{AE486AB7-EA55-CFAE-0586-F3D89FE3D0B9}"/>
+                <a16:creationId xmlns:a16="http://schemas.microsoft.com/office/drawing/2014/main" id="{02E82167-98CE-24D1-7ECD-7CAC8C50AF90}"/>
               </a:ext>
             </a:extLst>
           </p:cNvPr>
@@ -28194,7 +28232,7 @@
           <p:cNvPr id="16" name="文字方塊 15">
             <a:extLst>
               <a:ext uri="{FF2B5EF4-FFF2-40B4-BE49-F238E27FC236}">
-                <a16:creationId xmlns:a16="http://schemas.microsoft.com/office/drawing/2014/main" id="{B1EA2DC7-7933-F216-9C55-E9CE30CC7EB4}"/>
+                <a16:creationId xmlns:a16="http://schemas.microsoft.com/office/drawing/2014/main" id="{3F967CF1-FF67-CFCB-2CC9-F15567F22547}"/>
               </a:ext>
             </a:extLst>
           </p:cNvPr>
@@ -28236,7 +28274,7 @@
           <p:cNvPr id="17" name="矩形: 圓角 16">
             <a:extLst>
               <a:ext uri="{FF2B5EF4-FFF2-40B4-BE49-F238E27FC236}">
-                <a16:creationId xmlns:a16="http://schemas.microsoft.com/office/drawing/2014/main" id="{29235C6B-1E93-1CF4-B131-84C35E4D5F81}"/>
+                <a16:creationId xmlns:a16="http://schemas.microsoft.com/office/drawing/2014/main" id="{8FE3E1EA-60FB-ADBA-E188-5B36685B9FD1}"/>
               </a:ext>
             </a:extLst>
           </p:cNvPr>
@@ -28306,7 +28344,7 @@
           <p:cNvPr id="18" name="文字方塊 17">
             <a:extLst>
               <a:ext uri="{FF2B5EF4-FFF2-40B4-BE49-F238E27FC236}">
-                <a16:creationId xmlns:a16="http://schemas.microsoft.com/office/drawing/2014/main" id="{E0121EE3-7564-1FED-4CB1-2F73E591DB7C}"/>
+                <a16:creationId xmlns:a16="http://schemas.microsoft.com/office/drawing/2014/main" id="{621F5982-200E-A160-7960-B3C2088898E8}"/>
               </a:ext>
             </a:extLst>
           </p:cNvPr>
@@ -28338,7 +28376,7 @@
                 <a:ea typeface="Microsoft JhengHei" panose="020B0604030504040204" pitchFamily="34" charset="-120"/>
                 <a:sym typeface="Microsoft JhengHei" panose="020B0604030504040204" pitchFamily="34" charset="-120"/>
               </a:rPr>
-              <a:t>管理者（需管理者金鑰）</a:t>
+              <a:t>管理者（需管理者密碼）</a:t>
             </a:r>
           </a:p>
         </p:txBody>
@@ -28348,7 +28386,7 @@
           <p:cNvPr id="19" name="文字方塊 18">
             <a:extLst>
               <a:ext uri="{FF2B5EF4-FFF2-40B4-BE49-F238E27FC236}">
-                <a16:creationId xmlns:a16="http://schemas.microsoft.com/office/drawing/2014/main" id="{18ADC2EB-CF23-65FF-182E-97D5DB71AFB0}"/>
+                <a16:creationId xmlns:a16="http://schemas.microsoft.com/office/drawing/2014/main" id="{962F6778-955B-65FC-A23C-CE16A14A70B2}"/>
               </a:ext>
             </a:extLst>
           </p:cNvPr>
@@ -28357,7 +28395,7 @@
         </p:nvSpPr>
         <p:spPr>
           <a:xfrm>
-            <a:off x="6502400" y="1930400"/>
+            <a:off x="6502400" y="1905000"/>
             <a:ext cx="1905000" cy="369332"/>
           </a:xfrm>
           <a:prstGeom prst="rect">
@@ -28398,7 +28436,7 @@
           <p:cNvPr id="20" name="文字方塊 19">
             <a:extLst>
               <a:ext uri="{FF2B5EF4-FFF2-40B4-BE49-F238E27FC236}">
-                <a16:creationId xmlns:a16="http://schemas.microsoft.com/office/drawing/2014/main" id="{A1D67C2E-30E1-F600-2659-7D6E806E9136}"/>
+                <a16:creationId xmlns:a16="http://schemas.microsoft.com/office/drawing/2014/main" id="{302E908D-1563-E973-56AA-8EFF066A234E}"/>
               </a:ext>
             </a:extLst>
           </p:cNvPr>
@@ -28407,7 +28445,7 @@
         </p:nvSpPr>
         <p:spPr>
           <a:xfrm>
-            <a:off x="8483600" y="1930400"/>
+            <a:off x="8483600" y="1905000"/>
             <a:ext cx="2921000" cy="369332"/>
           </a:xfrm>
           <a:prstGeom prst="rect">
@@ -28440,7 +28478,7 @@
           <p:cNvPr id="21" name="文字方塊 20">
             <a:extLst>
               <a:ext uri="{FF2B5EF4-FFF2-40B4-BE49-F238E27FC236}">
-                <a16:creationId xmlns:a16="http://schemas.microsoft.com/office/drawing/2014/main" id="{66C30123-EFFE-7071-E3D4-A169F971C8D6}"/>
+                <a16:creationId xmlns:a16="http://schemas.microsoft.com/office/drawing/2014/main" id="{AD5AACE0-059F-41D5-59F9-9756DD3C0B6F}"/>
               </a:ext>
             </a:extLst>
           </p:cNvPr>
@@ -28449,7 +28487,7 @@
         </p:nvSpPr>
         <p:spPr>
           <a:xfrm>
-            <a:off x="6502400" y="2298700"/>
+            <a:off x="6502400" y="2235200"/>
             <a:ext cx="1905000" cy="369332"/>
           </a:xfrm>
           <a:prstGeom prst="rect">
@@ -28490,7 +28528,7 @@
           <p:cNvPr id="22" name="文字方塊 21">
             <a:extLst>
               <a:ext uri="{FF2B5EF4-FFF2-40B4-BE49-F238E27FC236}">
-                <a16:creationId xmlns:a16="http://schemas.microsoft.com/office/drawing/2014/main" id="{D8E82666-D713-6848-E6F5-CF22D246E3AC}"/>
+                <a16:creationId xmlns:a16="http://schemas.microsoft.com/office/drawing/2014/main" id="{956A89D4-CD68-FCE2-3E04-A0770210A14D}"/>
               </a:ext>
             </a:extLst>
           </p:cNvPr>
@@ -28499,7 +28537,7 @@
         </p:nvSpPr>
         <p:spPr>
           <a:xfrm>
-            <a:off x="8483600" y="2298700"/>
+            <a:off x="8483600" y="2235200"/>
             <a:ext cx="2921000" cy="369332"/>
           </a:xfrm>
           <a:prstGeom prst="rect">
@@ -28532,7 +28570,7 @@
           <p:cNvPr id="23" name="文字方塊 22">
             <a:extLst>
               <a:ext uri="{FF2B5EF4-FFF2-40B4-BE49-F238E27FC236}">
-                <a16:creationId xmlns:a16="http://schemas.microsoft.com/office/drawing/2014/main" id="{36C87731-14A5-FBC5-65BC-1CD78BCA92E9}"/>
+                <a16:creationId xmlns:a16="http://schemas.microsoft.com/office/drawing/2014/main" id="{52508E6B-AFD6-D03E-D058-3EF1AA5B12E7}"/>
               </a:ext>
             </a:extLst>
           </p:cNvPr>
@@ -28541,7 +28579,7 @@
         </p:nvSpPr>
         <p:spPr>
           <a:xfrm>
-            <a:off x="6502400" y="2667000"/>
+            <a:off x="6502400" y="2565400"/>
             <a:ext cx="1905000" cy="369332"/>
           </a:xfrm>
           <a:prstGeom prst="rect">
@@ -28564,7 +28602,7 @@
                 <a:ea typeface="Microsoft JhengHei" panose="020B0604030504040204" pitchFamily="34" charset="-120"/>
                 <a:sym typeface="Consolas" panose="020B0609020204030204" pitchFamily="49" charset="0"/>
               </a:rPr>
-              <a:t>setItemStatus</a:t>
+              <a:t>deleteItem</a:t>
             </a:r>
             <a:endParaRPr lang="zh-TW" altLang="en-US" sz="1400" b="1">
               <a:solidFill>
@@ -28582,7 +28620,7 @@
           <p:cNvPr id="24" name="文字方塊 23">
             <a:extLst>
               <a:ext uri="{FF2B5EF4-FFF2-40B4-BE49-F238E27FC236}">
-                <a16:creationId xmlns:a16="http://schemas.microsoft.com/office/drawing/2014/main" id="{68C3F556-1CB8-B48C-3851-10A324D6365C}"/>
+                <a16:creationId xmlns:a16="http://schemas.microsoft.com/office/drawing/2014/main" id="{5A94F009-DE58-9CA8-85AE-9DC575063882}"/>
               </a:ext>
             </a:extLst>
           </p:cNvPr>
@@ -28591,7 +28629,7 @@
         </p:nvSpPr>
         <p:spPr>
           <a:xfrm>
-            <a:off x="8483600" y="2667000"/>
+            <a:off x="8483600" y="2565400"/>
             <a:ext cx="2921000" cy="369332"/>
           </a:xfrm>
           <a:prstGeom prst="rect">
@@ -28614,7 +28652,7 @@
                 <a:ea typeface="Microsoft JhengHei" panose="020B0604030504040204" pitchFamily="34" charset="-120"/>
                 <a:sym typeface="Microsoft JhengHei" panose="020B0604030504040204" pitchFamily="34" charset="-120"/>
               </a:rPr>
-              <a:t>送修／遺失／報廢</a:t>
+              <a:t>刪除展品</a:t>
             </a:r>
           </a:p>
         </p:txBody>
@@ -28624,7 +28662,7 @@
           <p:cNvPr id="25" name="文字方塊 24">
             <a:extLst>
               <a:ext uri="{FF2B5EF4-FFF2-40B4-BE49-F238E27FC236}">
-                <a16:creationId xmlns:a16="http://schemas.microsoft.com/office/drawing/2014/main" id="{A4FED6E1-EE17-4684-D64C-C1E08C89642D}"/>
+                <a16:creationId xmlns:a16="http://schemas.microsoft.com/office/drawing/2014/main" id="{7BBD6D4B-BBC8-9158-B893-1048538F584D}"/>
               </a:ext>
             </a:extLst>
           </p:cNvPr>
@@ -28633,7 +28671,7 @@
         </p:nvSpPr>
         <p:spPr>
           <a:xfrm>
-            <a:off x="6502400" y="3035300"/>
+            <a:off x="6502400" y="2895600"/>
             <a:ext cx="1905000" cy="369332"/>
           </a:xfrm>
           <a:prstGeom prst="rect">
@@ -28656,7 +28694,7 @@
                 <a:ea typeface="Microsoft JhengHei" panose="020B0604030504040204" pitchFamily="34" charset="-120"/>
                 <a:sym typeface="Consolas" panose="020B0609020204030204" pitchFamily="49" charset="0"/>
               </a:rPr>
-              <a:t>transfer</a:t>
+              <a:t>setItemStatus</a:t>
             </a:r>
             <a:endParaRPr lang="zh-TW" altLang="en-US" sz="1400" b="1">
               <a:solidFill>
@@ -28674,7 +28712,7 @@
           <p:cNvPr id="26" name="文字方塊 25">
             <a:extLst>
               <a:ext uri="{FF2B5EF4-FFF2-40B4-BE49-F238E27FC236}">
-                <a16:creationId xmlns:a16="http://schemas.microsoft.com/office/drawing/2014/main" id="{A030C9D5-62A9-8F63-53E7-44CF143F2908}"/>
+                <a16:creationId xmlns:a16="http://schemas.microsoft.com/office/drawing/2014/main" id="{A4625E39-0CEC-4B97-1B36-78B01F676784}"/>
               </a:ext>
             </a:extLst>
           </p:cNvPr>
@@ -28683,7 +28721,7 @@
         </p:nvSpPr>
         <p:spPr>
           <a:xfrm>
-            <a:off x="8483600" y="3035300"/>
+            <a:off x="8483600" y="2895600"/>
             <a:ext cx="2921000" cy="369332"/>
           </a:xfrm>
           <a:prstGeom prst="rect">
@@ -28706,7 +28744,7 @@
                 <a:ea typeface="Microsoft JhengHei" panose="020B0604030504040204" pitchFamily="34" charset="-120"/>
                 <a:sym typeface="Microsoft JhengHei" panose="020B0604030504040204" pitchFamily="34" charset="-120"/>
               </a:rPr>
-              <a:t>移轉借用</a:t>
+              <a:t>送修／遺失／報廢</a:t>
             </a:r>
           </a:p>
         </p:txBody>
@@ -28716,7 +28754,7 @@
           <p:cNvPr id="27" name="文字方塊 26">
             <a:extLst>
               <a:ext uri="{FF2B5EF4-FFF2-40B4-BE49-F238E27FC236}">
-                <a16:creationId xmlns:a16="http://schemas.microsoft.com/office/drawing/2014/main" id="{BCD1A4EF-EB0C-E394-4F0E-EB21D4315092}"/>
+                <a16:creationId xmlns:a16="http://schemas.microsoft.com/office/drawing/2014/main" id="{DABA2135-401A-629D-F867-47D9E09E6917}"/>
               </a:ext>
             </a:extLst>
           </p:cNvPr>
@@ -28725,7 +28763,7 @@
         </p:nvSpPr>
         <p:spPr>
           <a:xfrm>
-            <a:off x="6502400" y="3403600"/>
+            <a:off x="6502400" y="3225800"/>
             <a:ext cx="1905000" cy="369332"/>
           </a:xfrm>
           <a:prstGeom prst="rect">
@@ -28748,7 +28786,7 @@
                 <a:ea typeface="Microsoft JhengHei" panose="020B0604030504040204" pitchFamily="34" charset="-120"/>
                 <a:sym typeface="Consolas" panose="020B0609020204030204" pitchFamily="49" charset="0"/>
               </a:rPr>
-              <a:t>getHistory</a:t>
+              <a:t>transfer</a:t>
             </a:r>
             <a:endParaRPr lang="zh-TW" altLang="en-US" sz="1400" b="1">
               <a:solidFill>
@@ -28766,7 +28804,7 @@
           <p:cNvPr id="28" name="文字方塊 27">
             <a:extLst>
               <a:ext uri="{FF2B5EF4-FFF2-40B4-BE49-F238E27FC236}">
-                <a16:creationId xmlns:a16="http://schemas.microsoft.com/office/drawing/2014/main" id="{9202CF40-79DB-5C5D-FCA8-0504B2513E29}"/>
+                <a16:creationId xmlns:a16="http://schemas.microsoft.com/office/drawing/2014/main" id="{1B53B124-8FE0-5E06-36D0-C86CD6135FF8}"/>
               </a:ext>
             </a:extLst>
           </p:cNvPr>
@@ -28775,7 +28813,7 @@
         </p:nvSpPr>
         <p:spPr>
           <a:xfrm>
-            <a:off x="8483600" y="3403600"/>
+            <a:off x="8483600" y="3225800"/>
             <a:ext cx="2921000" cy="369332"/>
           </a:xfrm>
           <a:prstGeom prst="rect">
@@ -28798,7 +28836,7 @@
                 <a:ea typeface="Microsoft JhengHei" panose="020B0604030504040204" pitchFamily="34" charset="-120"/>
                 <a:sym typeface="Microsoft JhengHei" panose="020B0604030504040204" pitchFamily="34" charset="-120"/>
               </a:rPr>
-              <a:t>單品履歷</a:t>
+              <a:t>移轉借用</a:t>
             </a:r>
           </a:p>
         </p:txBody>
@@ -28808,7 +28846,7 @@
           <p:cNvPr id="29" name="文字方塊 28">
             <a:extLst>
               <a:ext uri="{FF2B5EF4-FFF2-40B4-BE49-F238E27FC236}">
-                <a16:creationId xmlns:a16="http://schemas.microsoft.com/office/drawing/2014/main" id="{172E833E-EAC9-23C1-FFD8-C5309C44E427}"/>
+                <a16:creationId xmlns:a16="http://schemas.microsoft.com/office/drawing/2014/main" id="{F680003F-A4D6-65A3-AB1D-A3F23E2EA095}"/>
               </a:ext>
             </a:extLst>
           </p:cNvPr>
@@ -28817,7 +28855,7 @@
         </p:nvSpPr>
         <p:spPr>
           <a:xfrm>
-            <a:off x="6502400" y="3771900"/>
+            <a:off x="6502400" y="3556000"/>
             <a:ext cx="1905000" cy="369332"/>
           </a:xfrm>
           <a:prstGeom prst="rect">
@@ -28840,7 +28878,7 @@
                 <a:ea typeface="Microsoft JhengHei" panose="020B0604030504040204" pitchFamily="34" charset="-120"/>
                 <a:sym typeface="Consolas" panose="020B0609020204030204" pitchFamily="49" charset="0"/>
               </a:rPr>
-              <a:t>listOverdue</a:t>
+              <a:t>getHistory</a:t>
             </a:r>
             <a:endParaRPr lang="zh-TW" altLang="en-US" sz="1400" b="1">
               <a:solidFill>
@@ -28858,7 +28896,7 @@
           <p:cNvPr id="30" name="文字方塊 29">
             <a:extLst>
               <a:ext uri="{FF2B5EF4-FFF2-40B4-BE49-F238E27FC236}">
-                <a16:creationId xmlns:a16="http://schemas.microsoft.com/office/drawing/2014/main" id="{36D21C98-E87F-A181-9616-4E47386852FA}"/>
+                <a16:creationId xmlns:a16="http://schemas.microsoft.com/office/drawing/2014/main" id="{C2D913F3-C39D-CDD0-C4A9-F1314D015154}"/>
               </a:ext>
             </a:extLst>
           </p:cNvPr>
@@ -28867,7 +28905,7 @@
         </p:nvSpPr>
         <p:spPr>
           <a:xfrm>
-            <a:off x="8483600" y="3771900"/>
+            <a:off x="8483600" y="3556000"/>
             <a:ext cx="2921000" cy="369332"/>
           </a:xfrm>
           <a:prstGeom prst="rect">
@@ -28890,7 +28928,7 @@
                 <a:ea typeface="Microsoft JhengHei" panose="020B0604030504040204" pitchFamily="34" charset="-120"/>
                 <a:sym typeface="Microsoft JhengHei" panose="020B0604030504040204" pitchFamily="34" charset="-120"/>
               </a:rPr>
-              <a:t>逾期清單</a:t>
+              <a:t>單品履歷</a:t>
             </a:r>
           </a:p>
         </p:txBody>
@@ -28900,7 +28938,7 @@
           <p:cNvPr id="31" name="文字方塊 30">
             <a:extLst>
               <a:ext uri="{FF2B5EF4-FFF2-40B4-BE49-F238E27FC236}">
-                <a16:creationId xmlns:a16="http://schemas.microsoft.com/office/drawing/2014/main" id="{7A5906F0-EEED-18AB-F6C3-52D6BACC757E}"/>
+                <a16:creationId xmlns:a16="http://schemas.microsoft.com/office/drawing/2014/main" id="{77DC09B1-FA74-A276-E979-90909135534F}"/>
               </a:ext>
             </a:extLst>
           </p:cNvPr>
@@ -28909,7 +28947,7 @@
         </p:nvSpPr>
         <p:spPr>
           <a:xfrm>
-            <a:off x="6502400" y="4140200"/>
+            <a:off x="6502400" y="3886200"/>
             <a:ext cx="1905000" cy="369332"/>
           </a:xfrm>
           <a:prstGeom prst="rect">
@@ -28932,7 +28970,7 @@
                 <a:ea typeface="Microsoft JhengHei" panose="020B0604030504040204" pitchFamily="34" charset="-120"/>
                 <a:sym typeface="Consolas" panose="020B0609020204030204" pitchFamily="49" charset="0"/>
               </a:rPr>
-              <a:t>sendReminders</a:t>
+              <a:t>listOverdue</a:t>
             </a:r>
             <a:endParaRPr lang="zh-TW" altLang="en-US" sz="1400" b="1">
               <a:solidFill>
@@ -28950,7 +28988,7 @@
           <p:cNvPr id="32" name="文字方塊 31">
             <a:extLst>
               <a:ext uri="{FF2B5EF4-FFF2-40B4-BE49-F238E27FC236}">
-                <a16:creationId xmlns:a16="http://schemas.microsoft.com/office/drawing/2014/main" id="{8A917599-A247-53E9-99CA-F155B3A4F77F}"/>
+                <a16:creationId xmlns:a16="http://schemas.microsoft.com/office/drawing/2014/main" id="{7A3DFF31-A8F6-16F3-2528-3641D2C3CD00}"/>
               </a:ext>
             </a:extLst>
           </p:cNvPr>
@@ -28959,7 +28997,7 @@
         </p:nvSpPr>
         <p:spPr>
           <a:xfrm>
-            <a:off x="8483600" y="4140200"/>
+            <a:off x="8483600" y="3886200"/>
             <a:ext cx="2921000" cy="369332"/>
           </a:xfrm>
           <a:prstGeom prst="rect">
@@ -28982,7 +29020,7 @@
                 <a:ea typeface="Microsoft JhengHei" panose="020B0604030504040204" pitchFamily="34" charset="-120"/>
                 <a:sym typeface="Microsoft JhengHei" panose="020B0604030504040204" pitchFamily="34" charset="-120"/>
               </a:rPr>
-              <a:t>立即寄催還信</a:t>
+              <a:t>逾期清單</a:t>
             </a:r>
           </a:p>
         </p:txBody>
@@ -28992,7 +29030,7 @@
           <p:cNvPr id="33" name="文字方塊 32">
             <a:extLst>
               <a:ext uri="{FF2B5EF4-FFF2-40B4-BE49-F238E27FC236}">
-                <a16:creationId xmlns:a16="http://schemas.microsoft.com/office/drawing/2014/main" id="{626D8FCC-98EA-7589-2835-6716256B1E1A}"/>
+                <a16:creationId xmlns:a16="http://schemas.microsoft.com/office/drawing/2014/main" id="{8430D8C5-DDBA-352D-F270-11A11CBA3107}"/>
               </a:ext>
             </a:extLst>
           </p:cNvPr>
@@ -29001,7 +29039,7 @@
         </p:nvSpPr>
         <p:spPr>
           <a:xfrm>
-            <a:off x="6502400" y="4508500"/>
+            <a:off x="6502400" y="4216400"/>
             <a:ext cx="1905000" cy="369332"/>
           </a:xfrm>
           <a:prstGeom prst="rect">
@@ -29024,7 +29062,7 @@
                 <a:ea typeface="Microsoft JhengHei" panose="020B0604030504040204" pitchFamily="34" charset="-120"/>
                 <a:sym typeface="Consolas" panose="020B0609020204030204" pitchFamily="49" charset="0"/>
               </a:rPr>
-              <a:t>verifyAdmin</a:t>
+              <a:t>sendReminders</a:t>
             </a:r>
             <a:endParaRPr lang="zh-TW" altLang="en-US" sz="1400" b="1">
               <a:solidFill>
@@ -29042,7 +29080,7 @@
           <p:cNvPr id="34" name="文字方塊 33">
             <a:extLst>
               <a:ext uri="{FF2B5EF4-FFF2-40B4-BE49-F238E27FC236}">
-                <a16:creationId xmlns:a16="http://schemas.microsoft.com/office/drawing/2014/main" id="{F7C30790-58E3-1488-307B-48290777D3D1}"/>
+                <a16:creationId xmlns:a16="http://schemas.microsoft.com/office/drawing/2014/main" id="{29AA1930-7FA0-8CD5-5214-1F27745C0EA3}"/>
               </a:ext>
             </a:extLst>
           </p:cNvPr>
@@ -29051,7 +29089,7 @@
         </p:nvSpPr>
         <p:spPr>
           <a:xfrm>
-            <a:off x="8483600" y="4508500"/>
+            <a:off x="8483600" y="4216400"/>
             <a:ext cx="2921000" cy="369332"/>
           </a:xfrm>
           <a:prstGeom prst="rect">
@@ -29074,17 +29112,109 @@
                 <a:ea typeface="Microsoft JhengHei" panose="020B0604030504040204" pitchFamily="34" charset="-120"/>
                 <a:sym typeface="Microsoft JhengHei" panose="020B0604030504040204" pitchFamily="34" charset="-120"/>
               </a:rPr>
-              <a:t>驗證金鑰</a:t>
-            </a:r>
-          </a:p>
-        </p:txBody>
-      </p:sp>
-      <p:sp>
-        <p:nvSpPr>
-          <p:cNvPr id="35" name="矩形: 圓角 34">
-            <a:extLst>
-              <a:ext uri="{FF2B5EF4-FFF2-40B4-BE49-F238E27FC236}">
-                <a16:creationId xmlns:a16="http://schemas.microsoft.com/office/drawing/2014/main" id="{B80762D4-927F-FC4E-DC27-E2B9C24C6A1A}"/>
+              <a:t>立即寄催還信</a:t>
+            </a:r>
+          </a:p>
+        </p:txBody>
+      </p:sp>
+      <p:sp>
+        <p:nvSpPr>
+          <p:cNvPr id="35" name="文字方塊 34">
+            <a:extLst>
+              <a:ext uri="{FF2B5EF4-FFF2-40B4-BE49-F238E27FC236}">
+                <a16:creationId xmlns:a16="http://schemas.microsoft.com/office/drawing/2014/main" id="{305CC5D2-4E83-6787-AC10-022A6CCD0AAB}"/>
+              </a:ext>
+            </a:extLst>
+          </p:cNvPr>
+          <p:cNvSpPr txBox="1"/>
+          <p:nvPr/>
+        </p:nvSpPr>
+        <p:spPr>
+          <a:xfrm>
+            <a:off x="6502400" y="4546600"/>
+            <a:ext cx="1905000" cy="369332"/>
+          </a:xfrm>
+          <a:prstGeom prst="rect">
+            <a:avLst/>
+          </a:prstGeom>
+          <a:noFill/>
+        </p:spPr>
+        <p:txBody>
+          <a:bodyPr vert="horz" wrap="square" lIns="0" tIns="0" rIns="0" bIns="0" rtlCol="0" anchor="t">
+            <a:noAutofit/>
+          </a:bodyPr>
+          <a:lstStyle/>
+          <a:p>
+            <a:r>
+              <a:rPr lang="en-US" altLang="zh-TW" sz="1400" b="1">
+                <a:solidFill>
+                  <a:srgbClr val="C9E4E0"/>
+                </a:solidFill>
+                <a:latin typeface="Consolas" panose="020B0609020204030204" pitchFamily="49" charset="0"/>
+                <a:ea typeface="Microsoft JhengHei" panose="020B0604030504040204" pitchFamily="34" charset="-120"/>
+                <a:sym typeface="Consolas" panose="020B0609020204030204" pitchFamily="49" charset="0"/>
+              </a:rPr>
+              <a:t>verifyAdmin</a:t>
+            </a:r>
+            <a:endParaRPr lang="zh-TW" altLang="en-US" sz="1400" b="1">
+              <a:solidFill>
+                <a:srgbClr val="C9E4E0"/>
+              </a:solidFill>
+              <a:latin typeface="Consolas" panose="020B0609020204030204" pitchFamily="49" charset="0"/>
+              <a:ea typeface="Microsoft JhengHei" panose="020B0604030504040204" pitchFamily="34" charset="-120"/>
+              <a:sym typeface="Consolas" panose="020B0609020204030204" pitchFamily="49" charset="0"/>
+            </a:endParaRPr>
+          </a:p>
+        </p:txBody>
+      </p:sp>
+      <p:sp>
+        <p:nvSpPr>
+          <p:cNvPr id="36" name="文字方塊 35">
+            <a:extLst>
+              <a:ext uri="{FF2B5EF4-FFF2-40B4-BE49-F238E27FC236}">
+                <a16:creationId xmlns:a16="http://schemas.microsoft.com/office/drawing/2014/main" id="{603C87F2-3782-CA9D-3632-BA4A8EBE37A5}"/>
+              </a:ext>
+            </a:extLst>
+          </p:cNvPr>
+          <p:cNvSpPr txBox="1"/>
+          <p:nvPr/>
+        </p:nvSpPr>
+        <p:spPr>
+          <a:xfrm>
+            <a:off x="8483600" y="4546600"/>
+            <a:ext cx="2921000" cy="369332"/>
+          </a:xfrm>
+          <a:prstGeom prst="rect">
+            <a:avLst/>
+          </a:prstGeom>
+          <a:noFill/>
+        </p:spPr>
+        <p:txBody>
+          <a:bodyPr vert="horz" wrap="square" lIns="0" tIns="0" rIns="0" bIns="0" rtlCol="0" anchor="t">
+            <a:noAutofit/>
+          </a:bodyPr>
+          <a:lstStyle/>
+          <a:p>
+            <a:r>
+              <a:rPr lang="zh-TW" altLang="en-US" sz="1400">
+                <a:solidFill>
+                  <a:srgbClr val="FFFFFF"/>
+                </a:solidFill>
+                <a:latin typeface="Microsoft JhengHei" panose="020B0604030504040204" pitchFamily="34" charset="-120"/>
+                <a:ea typeface="Microsoft JhengHei" panose="020B0604030504040204" pitchFamily="34" charset="-120"/>
+                <a:sym typeface="Microsoft JhengHei" panose="020B0604030504040204" pitchFamily="34" charset="-120"/>
+              </a:rPr>
+              <a:t>驗證密碼</a:t>
+            </a:r>
+          </a:p>
+        </p:txBody>
+      </p:sp>
+      <p:sp>
+        <p:nvSpPr>
+          <p:cNvPr id="37" name="矩形: 圓角 36">
+            <a:extLst>
+              <a:ext uri="{FF2B5EF4-FFF2-40B4-BE49-F238E27FC236}">
+                <a16:creationId xmlns:a16="http://schemas.microsoft.com/office/drawing/2014/main" id="{3A115988-8E32-B067-711B-3C86B21F481E}"/>
               </a:ext>
             </a:extLst>
           </p:cNvPr>
@@ -29151,10 +29281,10 @@
       </p:sp>
       <p:sp>
         <p:nvSpPr>
-          <p:cNvPr id="36" name="文字方塊 35">
-            <a:extLst>
-              <a:ext uri="{FF2B5EF4-FFF2-40B4-BE49-F238E27FC236}">
-                <a16:creationId xmlns:a16="http://schemas.microsoft.com/office/drawing/2014/main" id="{BE364B21-B2F2-C2BC-1559-D15E62AA03F8}"/>
+          <p:cNvPr id="38" name="文字方塊 37">
+            <a:extLst>
+              <a:ext uri="{FF2B5EF4-FFF2-40B4-BE49-F238E27FC236}">
+                <a16:creationId xmlns:a16="http://schemas.microsoft.com/office/drawing/2014/main" id="{55A8051A-6ADC-D1B4-0200-9DC2F1C5026D}"/>
               </a:ext>
             </a:extLst>
           </p:cNvPr>
@@ -29302,7 +29432,7 @@
     </p:spTree>
     <p:extLst>
       <p:ext uri="{BB962C8B-B14F-4D97-AF65-F5344CB8AC3E}">
-        <p14:creationId xmlns:p14="http://schemas.microsoft.com/office/powerpoint/2010/main" val="4066945202"/>
+        <p14:creationId xmlns:p14="http://schemas.microsoft.com/office/powerpoint/2010/main" val="4102363384"/>
       </p:ext>
     </p:extLst>
   </p:cSld>
